--- a/Slides/Module 08 Concurrency.pptx
+++ b/Slides/Module 08 Concurrency.pptx
@@ -402,9 +402,107 @@
 <file path=ppt/revisionInfo.xml><?xml version="1.0" encoding="utf-8"?>
 <p1510:revInfo xmlns:a="http://schemas.openxmlformats.org/drawingml/2006/main" xmlns:r="http://schemas.openxmlformats.org/officeDocument/2006/relationships" xmlns:p1510="http://schemas.microsoft.com/office/powerpoint/2015/10/main">
   <p1510:revLst>
-    <p1510:client id="{D1188332-BD64-46A5-B32A-6D80E54C4ECE}" v="27" dt="2024-11-01T00:40:56.925"/>
+    <p1510:client id="{16DDEC03-6889-4853-94DE-DFA20764CB2B}" v="3" dt="2026-09-25T16:27:58.984"/>
   </p1510:revLst>
 </p1510:revInfo>
+</file>
+
+<file path=ppt/changesInfos/changesInfo1.xml><?xml version="1.0" encoding="utf-8"?>
+<pc:chgInfo xmlns:a="http://schemas.openxmlformats.org/drawingml/2006/main" xmlns:r="http://schemas.openxmlformats.org/officeDocument/2006/relationships" xmlns:ac="http://schemas.microsoft.com/office/drawing/2013/main/command" xmlns:pc="http://schemas.microsoft.com/office/powerpoint/2013/main/command">
+  <pc:docChgLst>
+    <pc:chgData name="Mitchell Wand" userId="de9b44c55c049659" providerId="LiveId" clId="{7A9D5940-B2CC-47DD-AF5E-71219F1A1E26}"/>
+    <pc:docChg chg="custSel modSld">
+      <pc:chgData name="Mitchell Wand" userId="de9b44c55c049659" providerId="LiveId" clId="{7A9D5940-B2CC-47DD-AF5E-71219F1A1E26}" dt="2026-09-25T16:31:04.395" v="152" actId="20577"/>
+      <pc:docMkLst>
+        <pc:docMk/>
+      </pc:docMkLst>
+      <pc:sldChg chg="modNotesTx">
+        <pc:chgData name="Mitchell Wand" userId="de9b44c55c049659" providerId="LiveId" clId="{7A9D5940-B2CC-47DD-AF5E-71219F1A1E26}" dt="2026-09-25T16:31:04.395" v="152" actId="20577"/>
+        <pc:sldMkLst>
+          <pc:docMk/>
+          <pc:sldMk cId="334896783" sldId="499"/>
+        </pc:sldMkLst>
+      </pc:sldChg>
+      <pc:sldChg chg="modSp mod">
+        <pc:chgData name="Mitchell Wand" userId="de9b44c55c049659" providerId="LiveId" clId="{7A9D5940-B2CC-47DD-AF5E-71219F1A1E26}" dt="2026-09-25T16:00:25.168" v="14" actId="20577"/>
+        <pc:sldMkLst>
+          <pc:docMk/>
+          <pc:sldMk cId="831730851" sldId="579"/>
+        </pc:sldMkLst>
+        <pc:spChg chg="mod">
+          <ac:chgData name="Mitchell Wand" userId="de9b44c55c049659" providerId="LiveId" clId="{7A9D5940-B2CC-47DD-AF5E-71219F1A1E26}" dt="2026-09-25T16:00:25.168" v="14" actId="20577"/>
+          <ac:spMkLst>
+            <pc:docMk/>
+            <pc:sldMk cId="831730851" sldId="579"/>
+            <ac:spMk id="4" creationId="{455689C7-7C27-5D24-90F6-149A2C5D118F}"/>
+          </ac:spMkLst>
+        </pc:spChg>
+      </pc:sldChg>
+      <pc:sldChg chg="modSp mod">
+        <pc:chgData name="Mitchell Wand" userId="de9b44c55c049659" providerId="LiveId" clId="{7A9D5940-B2CC-47DD-AF5E-71219F1A1E26}" dt="2026-09-25T16:28:22.096" v="92" actId="1076"/>
+        <pc:sldMkLst>
+          <pc:docMk/>
+          <pc:sldMk cId="2045028461" sldId="682"/>
+        </pc:sldMkLst>
+        <pc:spChg chg="mod">
+          <ac:chgData name="Mitchell Wand" userId="de9b44c55c049659" providerId="LiveId" clId="{7A9D5940-B2CC-47DD-AF5E-71219F1A1E26}" dt="2026-09-25T16:26:24.022" v="87" actId="20577"/>
+          <ac:spMkLst>
+            <pc:docMk/>
+            <pc:sldMk cId="2045028461" sldId="682"/>
+            <ac:spMk id="5" creationId="{5463AA30-80EE-A64B-CB98-E6D0ABBA68FA}"/>
+          </ac:spMkLst>
+        </pc:spChg>
+        <pc:spChg chg="mod">
+          <ac:chgData name="Mitchell Wand" userId="de9b44c55c049659" providerId="LiveId" clId="{7A9D5940-B2CC-47DD-AF5E-71219F1A1E26}" dt="2026-09-25T16:28:22.096" v="92" actId="1076"/>
+          <ac:spMkLst>
+            <pc:docMk/>
+            <pc:sldMk cId="2045028461" sldId="682"/>
+            <ac:spMk id="6" creationId="{78A3314E-5172-5F8E-8896-D7ADF7D3024D}"/>
+          </ac:spMkLst>
+        </pc:spChg>
+      </pc:sldChg>
+      <pc:sldChg chg="delSp modSp mod modAnim">
+        <pc:chgData name="Mitchell Wand" userId="de9b44c55c049659" providerId="LiveId" clId="{7A9D5940-B2CC-47DD-AF5E-71219F1A1E26}" dt="2026-09-25T16:23:30.757" v="41" actId="14100"/>
+        <pc:sldMkLst>
+          <pc:docMk/>
+          <pc:sldMk cId="2008209886" sldId="695"/>
+        </pc:sldMkLst>
+        <pc:spChg chg="mod">
+          <ac:chgData name="Mitchell Wand" userId="de9b44c55c049659" providerId="LiveId" clId="{7A9D5940-B2CC-47DD-AF5E-71219F1A1E26}" dt="2026-09-25T16:23:30.757" v="41" actId="14100"/>
+          <ac:spMkLst>
+            <pc:docMk/>
+            <pc:sldMk cId="2008209886" sldId="695"/>
+            <ac:spMk id="4" creationId="{0A9DC6B3-C52B-0E35-E5BE-5239B6039A57}"/>
+          </ac:spMkLst>
+        </pc:spChg>
+        <pc:spChg chg="mod">
+          <ac:chgData name="Mitchell Wand" userId="de9b44c55c049659" providerId="LiveId" clId="{7A9D5940-B2CC-47DD-AF5E-71219F1A1E26}" dt="2026-09-25T16:21:59.926" v="37" actId="255"/>
+          <ac:spMkLst>
+            <pc:docMk/>
+            <pc:sldMk cId="2008209886" sldId="695"/>
+            <ac:spMk id="5" creationId="{7EEEED4A-F825-36DE-4D0D-71F249BADA7F}"/>
+          </ac:spMkLst>
+        </pc:spChg>
+        <pc:spChg chg="del">
+          <ac:chgData name="Mitchell Wand" userId="de9b44c55c049659" providerId="LiveId" clId="{7A9D5940-B2CC-47DD-AF5E-71219F1A1E26}" dt="2026-09-25T16:11:44.340" v="29" actId="478"/>
+          <ac:spMkLst>
+            <pc:docMk/>
+            <pc:sldMk cId="2008209886" sldId="695"/>
+            <ac:spMk id="6" creationId="{AD1001DB-76DD-2586-B9F2-E882C95ACD40}"/>
+          </ac:spMkLst>
+        </pc:spChg>
+        <pc:spChg chg="mod">
+          <ac:chgData name="Mitchell Wand" userId="de9b44c55c049659" providerId="LiveId" clId="{7A9D5940-B2CC-47DD-AF5E-71219F1A1E26}" dt="2026-09-25T16:11:38.732" v="28" actId="20577"/>
+          <ac:spMkLst>
+            <pc:docMk/>
+            <pc:sldMk cId="2008209886" sldId="695"/>
+            <ac:spMk id="11" creationId="{3A1A2B3D-50BE-3B83-D716-F6FF92A3781B}"/>
+          </ac:spMkLst>
+        </pc:spChg>
+      </pc:sldChg>
+    </pc:docChg>
+  </pc:docChgLst>
+</pc:chgInfo>
 </file>
 
 <file path=ppt/notesMasters/notesMaster1.xml><?xml version="1.0" encoding="utf-8"?>
@@ -3031,7 +3129,15 @@
           <a:p>
             <a:r>
               <a:rPr lang="en-US" dirty="0"/>
-              <a:t>You will occasionally see code written in this style. The main request is a microtask; the .then() blocks become microtasks.  The "return" in a microtask is also a pause point; if you have more than one microtask on the queue, they can switch </a:t>
+              <a:t>You will occasionally see code written in this style. The main request is a microtask; the .then() blocks become microtasks.  The "return" in a microtask is also a pause point; if you have more than one microtask on the queue, they can switch (but they will still run before any </a:t>
+            </a:r>
+            <a:r>
+              <a:rPr lang="en-US" dirty="0" err="1"/>
+              <a:t>macrotasks</a:t>
+            </a:r>
+            <a:r>
+              <a:rPr lang="en-US" dirty="0"/>
+              <a:t>) </a:t>
             </a:r>
           </a:p>
         </p:txBody>
@@ -4029,7 +4135,7 @@
                 <a:tabLst/>
                 <a:defRPr/>
               </a:pPr>
-              <a:t>8/12/2026</a:t>
+              <a:t>9/25/2026</a:t>
             </a:fld>
             <a:endParaRPr kumimoji="0" lang="en-US" sz="1200" b="0" i="0" u="none" strike="noStrike" kern="1200" cap="none" spc="0" normalizeH="0" baseline="0" noProof="0">
               <a:ln>
@@ -4513,7 +4619,7 @@
                 <a:tabLst/>
                 <a:defRPr/>
               </a:pPr>
-              <a:t>8/12/2026</a:t>
+              <a:t>9/25/2026</a:t>
             </a:fld>
             <a:endParaRPr kumimoji="0" lang="en-US" sz="1200" b="0" i="0" u="none" strike="noStrike" kern="1200" cap="none" spc="0" normalizeH="0" baseline="0" noProof="0">
               <a:ln>
@@ -4871,7 +4977,7 @@
                 <a:tabLst/>
                 <a:defRPr/>
               </a:pPr>
-              <a:t>8/12/2026</a:t>
+              <a:t>9/25/2026</a:t>
             </a:fld>
             <a:endParaRPr kumimoji="0" lang="en-US" sz="1200" b="0" i="0" u="none" strike="noStrike" kern="1200" cap="none" spc="0" normalizeH="0" baseline="0" noProof="0">
               <a:ln>
@@ -5239,7 +5345,7 @@
                 <a:tabLst/>
                 <a:defRPr/>
               </a:pPr>
-              <a:t>8/12/2026</a:t>
+              <a:t>9/25/2026</a:t>
             </a:fld>
             <a:endParaRPr kumimoji="0" lang="en-US" sz="1200" b="0" i="0" u="none" strike="noStrike" kern="1200" cap="none" spc="0" normalizeH="0" baseline="0" noProof="0">
               <a:ln>
@@ -6209,7 +6315,7 @@
                 <a:tabLst/>
                 <a:defRPr/>
               </a:pPr>
-              <a:t>8/12/2026</a:t>
+              <a:t>9/25/2026</a:t>
             </a:fld>
             <a:endParaRPr kumimoji="0" lang="en-US" sz="1200" b="0" i="0" u="none" strike="noStrike" kern="1200" cap="none" spc="0" normalizeH="0" baseline="0" noProof="0">
               <a:ln>
@@ -6635,7 +6741,7 @@
                 <a:tabLst/>
                 <a:defRPr/>
               </a:pPr>
-              <a:t>8/12/2026</a:t>
+              <a:t>9/25/2026</a:t>
             </a:fld>
             <a:endParaRPr kumimoji="0" lang="en-US" sz="1200" b="0" i="0" u="none" strike="noStrike" kern="1200" cap="none" spc="0" normalizeH="0" baseline="0" noProof="0">
               <a:ln>
@@ -6999,7 +7105,7 @@
                 <a:tabLst/>
                 <a:defRPr/>
               </a:pPr>
-              <a:t>8/12/2026</a:t>
+              <a:t>9/25/2026</a:t>
             </a:fld>
             <a:endParaRPr kumimoji="0" lang="en-US" sz="1200" b="0" i="0" u="none" strike="noStrike" kern="1200" cap="none" spc="0" normalizeH="0" baseline="0" noProof="0">
               <a:ln>
@@ -7526,7 +7632,7 @@
                 <a:tabLst/>
                 <a:defRPr/>
               </a:pPr>
-              <a:t>8/12/2026</a:t>
+              <a:t>9/25/2026</a:t>
             </a:fld>
             <a:endParaRPr kumimoji="0" lang="en-US" sz="1200" b="0" i="0" u="none" strike="noStrike" kern="1200" cap="none" spc="0" normalizeH="0" baseline="0" noProof="0">
               <a:ln>
@@ -7987,7 +8093,7 @@
                 <a:tabLst/>
                 <a:defRPr/>
               </a:pPr>
-              <a:t>8/12/2026</a:t>
+              <a:t>9/25/2026</a:t>
             </a:fld>
             <a:endParaRPr kumimoji="0" lang="en-US" sz="1200" b="0" i="0" u="none" strike="noStrike" kern="1200" cap="none" spc="0" normalizeH="0" baseline="0" noProof="0">
               <a:ln>
@@ -8595,7 +8701,7 @@
                 <a:tabLst/>
                 <a:defRPr/>
               </a:pPr>
-              <a:t>8/12/2026</a:t>
+              <a:t>9/25/2026</a:t>
             </a:fld>
             <a:endParaRPr kumimoji="0" lang="en-US" sz="1200" b="0" i="0" u="none" strike="noStrike" kern="1200" cap="none" spc="0" normalizeH="0" baseline="0" noProof="0">
               <a:ln>
@@ -8868,7 +8974,7 @@
                 <a:tabLst/>
                 <a:defRPr/>
               </a:pPr>
-              <a:t>8/12/2026</a:t>
+              <a:t>9/25/2026</a:t>
             </a:fld>
             <a:endParaRPr kumimoji="0" lang="en-US" sz="1200" b="0" i="0" u="none" strike="noStrike" kern="1200" cap="none" spc="0" normalizeH="0" baseline="0" noProof="0">
               <a:ln>
@@ -9339,7 +9445,7 @@
                 <a:tabLst/>
                 <a:defRPr/>
               </a:pPr>
-              <a:t>8/12/2026</a:t>
+              <a:t>9/25/2026</a:t>
             </a:fld>
             <a:endParaRPr kumimoji="0" lang="en-US" sz="1200" b="0" i="0" u="none" strike="noStrike" kern="1200" cap="none" spc="0" normalizeH="0" baseline="0" noProof="0">
               <a:ln>
@@ -9740,7 +9846,7 @@
                 <a:tabLst/>
                 <a:defRPr/>
               </a:pPr>
-              <a:t>8/12/2026</a:t>
+              <a:t>9/25/2026</a:t>
             </a:fld>
             <a:endParaRPr kumimoji="0" lang="en-US" sz="1200" b="0" i="0" u="none" strike="noStrike" kern="1200" cap="none" spc="0" normalizeH="0" baseline="0" noProof="0">
               <a:ln>
@@ -17312,8 +17418,21 @@
                   <a:schemeClr val="tx1"/>
                 </a:solidFill>
               </a:rPr>
-              <a:t>/Slides/dataRace2.ts</a:t>
-            </a:r>
+              <a:t>/Slides/</a:t>
+            </a:r>
+            <a:r>
+              <a:rPr lang="en-US" sz="2400" dirty="0" err="1">
+                <a:solidFill>
+                  <a:schemeClr val="tx1"/>
+                </a:solidFill>
+              </a:rPr>
+              <a:t>criticalSection.ts</a:t>
+            </a:r>
+            <a:endParaRPr lang="en-US" sz="2400" dirty="0">
+              <a:solidFill>
+                <a:schemeClr val="tx1"/>
+              </a:solidFill>
+            </a:endParaRPr>
           </a:p>
         </p:txBody>
       </p:sp>
@@ -31679,7 +31798,7 @@
         <p:spPr>
           <a:xfrm>
             <a:off x="838200" y="1439663"/>
-            <a:ext cx="9921240" cy="4708981"/>
+            <a:ext cx="9921240" cy="5640583"/>
           </a:xfrm>
           <a:prstGeom prst="rect">
             <a:avLst/>
@@ -31714,18 +31833,309 @@
           </a:bodyPr>
           <a:lstStyle/>
           <a:p>
-            <a:pPr algn="l"/>
-            <a:r>
-              <a:rPr lang="en-US" sz="2000" b="0" dirty="0">
-                <a:solidFill>
-                  <a:srgbClr val="008000"/>
-                </a:solidFill>
-                <a:effectLst/>
-                <a:latin typeface="Consolas" panose="020B0609020204030204" pitchFamily="49" charset="0"/>
-              </a:rPr>
-              <a:t>// simple synchronous execution</a:t>
-            </a:r>
-            <a:endParaRPr lang="en-US" sz="2000" b="0" dirty="0">
+            <a:pPr algn="l">
+              <a:lnSpc>
+                <a:spcPct val="113095"/>
+              </a:lnSpc>
+              <a:buNone/>
+            </a:pPr>
+            <a:r>
+              <a:rPr lang="en-US" sz="1800" b="0" dirty="0">
+                <a:solidFill>
+                  <a:srgbClr val="0000FF"/>
+                </a:solidFill>
+                <a:effectLst/>
+                <a:latin typeface="Consolas" panose="020B0609020204030204" pitchFamily="49" charset="0"/>
+              </a:rPr>
+              <a:t>async</a:t>
+            </a:r>
+            <a:r>
+              <a:rPr lang="en-US" sz="1800" b="0" dirty="0">
+                <a:solidFill>
+                  <a:srgbClr val="000000"/>
+                </a:solidFill>
+                <a:effectLst/>
+                <a:latin typeface="Consolas" panose="020B0609020204030204" pitchFamily="49" charset="0"/>
+              </a:rPr>
+              <a:t> </a:t>
+            </a:r>
+            <a:r>
+              <a:rPr lang="en-US" sz="1800" b="0" dirty="0">
+                <a:solidFill>
+                  <a:srgbClr val="0000FF"/>
+                </a:solidFill>
+                <a:effectLst/>
+                <a:latin typeface="Consolas" panose="020B0609020204030204" pitchFamily="49" charset="0"/>
+              </a:rPr>
+              <a:t>function</a:t>
+            </a:r>
+            <a:r>
+              <a:rPr lang="en-US" sz="1800" b="0" dirty="0">
+                <a:solidFill>
+                  <a:srgbClr val="000000"/>
+                </a:solidFill>
+                <a:effectLst/>
+                <a:latin typeface="Consolas" panose="020B0609020204030204" pitchFamily="49" charset="0"/>
+              </a:rPr>
+              <a:t> main() {</a:t>
+            </a:r>
+          </a:p>
+          <a:p>
+            <a:pPr algn="l">
+              <a:lnSpc>
+                <a:spcPct val="113095"/>
+              </a:lnSpc>
+              <a:buNone/>
+            </a:pPr>
+            <a:r>
+              <a:rPr lang="en-US" sz="1800" b="0" dirty="0">
+                <a:solidFill>
+                  <a:srgbClr val="000000"/>
+                </a:solidFill>
+                <a:effectLst/>
+                <a:latin typeface="Consolas" panose="020B0609020204030204" pitchFamily="49" charset="0"/>
+              </a:rPr>
+              <a:t>    console.log(</a:t>
+            </a:r>
+            <a:r>
+              <a:rPr lang="en-US" sz="1800" b="0" dirty="0">
+                <a:solidFill>
+                  <a:srgbClr val="A31515"/>
+                </a:solidFill>
+                <a:effectLst/>
+                <a:latin typeface="Consolas" panose="020B0609020204030204" pitchFamily="49" charset="0"/>
+              </a:rPr>
+              <a:t>'main started'</a:t>
+            </a:r>
+            <a:r>
+              <a:rPr lang="en-US" sz="1800" b="0" dirty="0">
+                <a:solidFill>
+                  <a:srgbClr val="000000"/>
+                </a:solidFill>
+                <a:effectLst/>
+                <a:latin typeface="Consolas" panose="020B0609020204030204" pitchFamily="49" charset="0"/>
+              </a:rPr>
+              <a:t>);</a:t>
+            </a:r>
+          </a:p>
+          <a:p>
+            <a:pPr algn="l">
+              <a:lnSpc>
+                <a:spcPct val="113095"/>
+              </a:lnSpc>
+              <a:buNone/>
+            </a:pPr>
+            <a:r>
+              <a:rPr lang="en-US" sz="1800" b="0" dirty="0">
+                <a:solidFill>
+                  <a:srgbClr val="000000"/>
+                </a:solidFill>
+                <a:effectLst/>
+                <a:latin typeface="Consolas" panose="020B0609020204030204" pitchFamily="49" charset="0"/>
+              </a:rPr>
+              <a:t>    console.log(</a:t>
+            </a:r>
+            <a:r>
+              <a:rPr lang="en-US" sz="1800" b="0" dirty="0">
+                <a:solidFill>
+                  <a:srgbClr val="A31515"/>
+                </a:solidFill>
+                <a:effectLst/>
+                <a:latin typeface="Consolas" panose="020B0609020204030204" pitchFamily="49" charset="0"/>
+              </a:rPr>
+              <a:t>`creating </a:t>
+            </a:r>
+            <a:r>
+              <a:rPr lang="en-US" sz="1800" b="0" dirty="0" err="1">
+                <a:solidFill>
+                  <a:srgbClr val="A31515"/>
+                </a:solidFill>
+                <a:effectLst/>
+                <a:latin typeface="Consolas" panose="020B0609020204030204" pitchFamily="49" charset="0"/>
+              </a:rPr>
+              <a:t>macrotask</a:t>
+            </a:r>
+            <a:r>
+              <a:rPr lang="en-US" sz="1800" b="0" dirty="0">
+                <a:solidFill>
+                  <a:srgbClr val="A31515"/>
+                </a:solidFill>
+                <a:effectLst/>
+                <a:latin typeface="Consolas" panose="020B0609020204030204" pitchFamily="49" charset="0"/>
+              </a:rPr>
+              <a:t>`</a:t>
+            </a:r>
+            <a:r>
+              <a:rPr lang="en-US" sz="1800" b="0" dirty="0">
+                <a:solidFill>
+                  <a:srgbClr val="000000"/>
+                </a:solidFill>
+                <a:effectLst/>
+                <a:latin typeface="Consolas" panose="020B0609020204030204" pitchFamily="49" charset="0"/>
+              </a:rPr>
+              <a:t>);</a:t>
+            </a:r>
+          </a:p>
+          <a:p>
+            <a:pPr algn="l">
+              <a:lnSpc>
+                <a:spcPct val="113095"/>
+              </a:lnSpc>
+              <a:buNone/>
+            </a:pPr>
+            <a:r>
+              <a:rPr lang="en-US" sz="1800" b="0" dirty="0">
+                <a:solidFill>
+                  <a:srgbClr val="000000"/>
+                </a:solidFill>
+                <a:effectLst/>
+                <a:latin typeface="Consolas" panose="020B0609020204030204" pitchFamily="49" charset="0"/>
+              </a:rPr>
+              <a:t>    </a:t>
+            </a:r>
+            <a:r>
+              <a:rPr lang="en-US" sz="1800" b="0" dirty="0">
+                <a:solidFill>
+                  <a:srgbClr val="0000FF"/>
+                </a:solidFill>
+                <a:effectLst/>
+                <a:latin typeface="Consolas" panose="020B0609020204030204" pitchFamily="49" charset="0"/>
+              </a:rPr>
+              <a:t>await</a:t>
+            </a:r>
+            <a:r>
+              <a:rPr lang="en-US" sz="1800" b="0" dirty="0">
+                <a:solidFill>
+                  <a:srgbClr val="000000"/>
+                </a:solidFill>
+                <a:effectLst/>
+                <a:latin typeface="Consolas" panose="020B0609020204030204" pitchFamily="49" charset="0"/>
+              </a:rPr>
+              <a:t> </a:t>
+            </a:r>
+            <a:r>
+              <a:rPr lang="en-US" sz="1800" b="0" dirty="0" err="1">
+                <a:solidFill>
+                  <a:srgbClr val="000000"/>
+                </a:solidFill>
+                <a:effectLst/>
+                <a:latin typeface="Consolas" panose="020B0609020204030204" pitchFamily="49" charset="0"/>
+              </a:rPr>
+              <a:t>macrotask</a:t>
+            </a:r>
+            <a:r>
+              <a:rPr lang="en-US" sz="1800" b="0" dirty="0">
+                <a:solidFill>
+                  <a:srgbClr val="000000"/>
+                </a:solidFill>
+                <a:effectLst/>
+                <a:latin typeface="Consolas" panose="020B0609020204030204" pitchFamily="49" charset="0"/>
+              </a:rPr>
+              <a:t>();</a:t>
+            </a:r>
+          </a:p>
+          <a:p>
+            <a:pPr algn="l">
+              <a:lnSpc>
+                <a:spcPct val="113095"/>
+              </a:lnSpc>
+              <a:buNone/>
+            </a:pPr>
+            <a:r>
+              <a:rPr lang="en-US" sz="1800" b="0" dirty="0">
+                <a:solidFill>
+                  <a:srgbClr val="000000"/>
+                </a:solidFill>
+                <a:effectLst/>
+                <a:latin typeface="Consolas" panose="020B0609020204030204" pitchFamily="49" charset="0"/>
+              </a:rPr>
+              <a:t>    console.log(</a:t>
+            </a:r>
+            <a:r>
+              <a:rPr lang="en-US" sz="1800" b="0" dirty="0">
+                <a:solidFill>
+                  <a:srgbClr val="A31515"/>
+                </a:solidFill>
+                <a:effectLst/>
+                <a:latin typeface="Consolas" panose="020B0609020204030204" pitchFamily="49" charset="0"/>
+              </a:rPr>
+              <a:t>'running microtask1'</a:t>
+            </a:r>
+            <a:r>
+              <a:rPr lang="en-US" sz="1800" b="0" dirty="0">
+                <a:solidFill>
+                  <a:srgbClr val="000000"/>
+                </a:solidFill>
+                <a:effectLst/>
+                <a:latin typeface="Consolas" panose="020B0609020204030204" pitchFamily="49" charset="0"/>
+              </a:rPr>
+              <a:t>);</a:t>
+            </a:r>
+          </a:p>
+          <a:p>
+            <a:pPr algn="l">
+              <a:lnSpc>
+                <a:spcPct val="113095"/>
+              </a:lnSpc>
+              <a:buNone/>
+            </a:pPr>
+            <a:r>
+              <a:rPr lang="en-US" sz="1800" b="0" dirty="0">
+                <a:solidFill>
+                  <a:srgbClr val="000000"/>
+                </a:solidFill>
+                <a:effectLst/>
+                <a:latin typeface="Consolas" panose="020B0609020204030204" pitchFamily="49" charset="0"/>
+              </a:rPr>
+              <a:t>    console.log(</a:t>
+            </a:r>
+            <a:r>
+              <a:rPr lang="en-US" sz="1800" b="0" dirty="0">
+                <a:solidFill>
+                  <a:srgbClr val="A31515"/>
+                </a:solidFill>
+                <a:effectLst/>
+                <a:latin typeface="Consolas" panose="020B0609020204030204" pitchFamily="49" charset="0"/>
+              </a:rPr>
+              <a:t>'running microtask2'</a:t>
+            </a:r>
+            <a:r>
+              <a:rPr lang="en-US" sz="1800" b="0" dirty="0">
+                <a:solidFill>
+                  <a:srgbClr val="000000"/>
+                </a:solidFill>
+                <a:effectLst/>
+                <a:latin typeface="Consolas" panose="020B0609020204030204" pitchFamily="49" charset="0"/>
+              </a:rPr>
+              <a:t>);</a:t>
+            </a:r>
+          </a:p>
+          <a:p>
+            <a:pPr algn="l">
+              <a:lnSpc>
+                <a:spcPct val="113095"/>
+              </a:lnSpc>
+              <a:buNone/>
+            </a:pPr>
+            <a:r>
+              <a:rPr lang="en-US" sz="1800" b="0" dirty="0">
+                <a:solidFill>
+                  <a:srgbClr val="000000"/>
+                </a:solidFill>
+                <a:effectLst/>
+                <a:latin typeface="Consolas" panose="020B0609020204030204" pitchFamily="49" charset="0"/>
+              </a:rPr>
+              <a:t>}</a:t>
+            </a:r>
+          </a:p>
+          <a:p>
+            <a:pPr algn="l">
+              <a:lnSpc>
+                <a:spcPct val="113095"/>
+              </a:lnSpc>
+              <a:buNone/>
+            </a:pPr>
+            <a:endParaRPr lang="en-US" sz="1800" b="0" dirty="0">
               <a:solidFill>
                 <a:srgbClr val="000000"/>
               </a:solidFill>
@@ -31734,388 +32144,33 @@
             </a:endParaRPr>
           </a:p>
           <a:p>
-            <a:pPr algn="l"/>
-            <a:r>
-              <a:rPr lang="en-US" sz="2000" b="0" dirty="0">
-                <a:solidFill>
-                  <a:srgbClr val="0000FF"/>
-                </a:solidFill>
-                <a:effectLst/>
-                <a:latin typeface="Consolas" panose="020B0609020204030204" pitchFamily="49" charset="0"/>
-              </a:rPr>
-              <a:t>async</a:t>
-            </a:r>
-            <a:r>
-              <a:rPr lang="en-US" sz="2000" b="0" dirty="0">
-                <a:solidFill>
-                  <a:srgbClr val="000000"/>
-                </a:solidFill>
-                <a:effectLst/>
-                <a:latin typeface="Consolas" panose="020B0609020204030204" pitchFamily="49" charset="0"/>
-              </a:rPr>
-              <a:t> </a:t>
-            </a:r>
-            <a:r>
-              <a:rPr lang="en-US" sz="2000" b="0" dirty="0">
-                <a:solidFill>
-                  <a:srgbClr val="0000FF"/>
-                </a:solidFill>
-                <a:effectLst/>
-                <a:latin typeface="Consolas" panose="020B0609020204030204" pitchFamily="49" charset="0"/>
-              </a:rPr>
-              <a:t>function</a:t>
-            </a:r>
-            <a:r>
-              <a:rPr lang="en-US" sz="2000" b="0" dirty="0">
-                <a:solidFill>
-                  <a:srgbClr val="000000"/>
-                </a:solidFill>
-                <a:effectLst/>
-                <a:latin typeface="Consolas" panose="020B0609020204030204" pitchFamily="49" charset="0"/>
-              </a:rPr>
-              <a:t> main() {</a:t>
-            </a:r>
-          </a:p>
-          <a:p>
             <a:pPr algn="l">
+              <a:lnSpc>
+                <a:spcPct val="113095"/>
+              </a:lnSpc>
               <a:buNone/>
             </a:pPr>
             <a:r>
-              <a:rPr lang="en-US" sz="2000" b="0" dirty="0">
-                <a:solidFill>
-                  <a:srgbClr val="000000"/>
-                </a:solidFill>
-                <a:effectLst/>
-                <a:latin typeface="Consolas" panose="020B0609020204030204" pitchFamily="49" charset="0"/>
-              </a:rPr>
-              <a:t>    console.log(</a:t>
-            </a:r>
-            <a:r>
-              <a:rPr lang="en-US" sz="2000" b="0" dirty="0">
-                <a:solidFill>
-                  <a:srgbClr val="A31515"/>
-                </a:solidFill>
-                <a:effectLst/>
-                <a:latin typeface="Consolas" panose="020B0609020204030204" pitchFamily="49" charset="0"/>
-              </a:rPr>
-              <a:t>'main started'</a:t>
-            </a:r>
-            <a:r>
-              <a:rPr lang="en-US" sz="2000" b="0" dirty="0">
-                <a:solidFill>
-                  <a:srgbClr val="000000"/>
-                </a:solidFill>
-                <a:effectLst/>
-                <a:latin typeface="Consolas" panose="020B0609020204030204" pitchFamily="49" charset="0"/>
-              </a:rPr>
-              <a:t>);</a:t>
-            </a:r>
-          </a:p>
-          <a:p>
-            <a:pPr algn="l">
-              <a:buNone/>
-            </a:pPr>
-            <a:r>
-              <a:rPr lang="en-US" sz="2000" b="0" dirty="0">
-                <a:solidFill>
-                  <a:srgbClr val="000000"/>
-                </a:solidFill>
-                <a:effectLst/>
-                <a:latin typeface="Consolas" panose="020B0609020204030204" pitchFamily="49" charset="0"/>
-              </a:rPr>
-              <a:t>    console.log(</a:t>
-            </a:r>
-            <a:r>
-              <a:rPr lang="en-US" sz="2000" b="0" dirty="0">
-                <a:solidFill>
-                  <a:srgbClr val="A31515"/>
-                </a:solidFill>
-                <a:effectLst/>
-                <a:latin typeface="Consolas" panose="020B0609020204030204" pitchFamily="49" charset="0"/>
-              </a:rPr>
-              <a:t>`sync task`</a:t>
-            </a:r>
-            <a:r>
-              <a:rPr lang="en-US" sz="2000" b="0" dirty="0">
-                <a:solidFill>
-                  <a:srgbClr val="000000"/>
-                </a:solidFill>
-                <a:effectLst/>
-                <a:latin typeface="Consolas" panose="020B0609020204030204" pitchFamily="49" charset="0"/>
-              </a:rPr>
-              <a:t>);</a:t>
-            </a:r>
-            <a:br>
-              <a:rPr lang="en-US" sz="2000" b="0" dirty="0">
-                <a:solidFill>
-                  <a:srgbClr val="000000"/>
-                </a:solidFill>
-                <a:effectLst/>
-                <a:latin typeface="Consolas" panose="020B0609020204030204" pitchFamily="49" charset="0"/>
-              </a:rPr>
-            </a:br>
-            <a:r>
-              <a:rPr lang="en-US" sz="2000" b="0" dirty="0">
-                <a:solidFill>
-                  <a:srgbClr val="000000"/>
-                </a:solidFill>
-                <a:effectLst/>
-                <a:latin typeface="Consolas" panose="020B0609020204030204" pitchFamily="49" charset="0"/>
-              </a:rPr>
-              <a:t>    </a:t>
-            </a:r>
-            <a:r>
-              <a:rPr lang="en-US" sz="2000" b="0" dirty="0" err="1">
-                <a:solidFill>
-                  <a:srgbClr val="000000"/>
-                </a:solidFill>
-                <a:effectLst/>
-                <a:latin typeface="Consolas" panose="020B0609020204030204" pitchFamily="49" charset="0"/>
-              </a:rPr>
-              <a:t>Promise.resolve</a:t>
-            </a:r>
-            <a:r>
-              <a:rPr lang="en-US" sz="2000" b="0" dirty="0">
-                <a:solidFill>
-                  <a:srgbClr val="000000"/>
-                </a:solidFill>
-                <a:effectLst/>
-                <a:latin typeface="Consolas" panose="020B0609020204030204" pitchFamily="49" charset="0"/>
-              </a:rPr>
-              <a:t>().then( () =&gt; {</a:t>
-            </a:r>
-          </a:p>
-          <a:p>
-            <a:pPr algn="l">
-              <a:buNone/>
-            </a:pPr>
-            <a:r>
-              <a:rPr lang="en-US" sz="2000" b="0" dirty="0">
-                <a:solidFill>
-                  <a:srgbClr val="000000"/>
-                </a:solidFill>
-                <a:effectLst/>
-                <a:latin typeface="Consolas" panose="020B0609020204030204" pitchFamily="49" charset="0"/>
-              </a:rPr>
-              <a:t>      console.log('</a:t>
-            </a:r>
-            <a:r>
-              <a:rPr lang="en-US" sz="2000" b="0" dirty="0">
-                <a:solidFill>
-                  <a:srgbClr val="C00000"/>
-                </a:solidFill>
-                <a:effectLst/>
-                <a:latin typeface="Consolas" panose="020B0609020204030204" pitchFamily="49" charset="0"/>
-              </a:rPr>
-              <a:t>promise</a:t>
-            </a:r>
-            <a:r>
-              <a:rPr lang="en-US" sz="2000" b="0" dirty="0">
-                <a:solidFill>
-                  <a:srgbClr val="000000"/>
-                </a:solidFill>
-                <a:effectLst/>
-                <a:latin typeface="Consolas" panose="020B0609020204030204" pitchFamily="49" charset="0"/>
-              </a:rPr>
-              <a:t>');</a:t>
-            </a:r>
-          </a:p>
-          <a:p>
-            <a:pPr algn="l">
-              <a:buNone/>
-            </a:pPr>
-            <a:r>
-              <a:rPr lang="en-US" sz="2000" b="0" dirty="0">
-                <a:solidFill>
-                  <a:srgbClr val="000000"/>
-                </a:solidFill>
-                <a:effectLst/>
-                <a:latin typeface="Consolas" panose="020B0609020204030204" pitchFamily="49" charset="0"/>
-              </a:rPr>
-              <a:t>    } ); </a:t>
-            </a:r>
-          </a:p>
-          <a:p>
-            <a:pPr algn="l"/>
-            <a:r>
-              <a:rPr lang="en-US" sz="2000" b="0" dirty="0">
-                <a:solidFill>
-                  <a:srgbClr val="000000"/>
-                </a:solidFill>
-                <a:effectLst/>
-                <a:latin typeface="Consolas" panose="020B0609020204030204" pitchFamily="49" charset="0"/>
-              </a:rPr>
-              <a:t>   </a:t>
-            </a:r>
-            <a:r>
-              <a:rPr lang="en-US" sz="2000" dirty="0">
-                <a:solidFill>
-                  <a:srgbClr val="000000"/>
-                </a:solidFill>
-                <a:latin typeface="Consolas" panose="020B0609020204030204" pitchFamily="49" charset="0"/>
-              </a:rPr>
-              <a:t> </a:t>
-            </a:r>
-            <a:r>
-              <a:rPr lang="en-US" sz="2000" dirty="0" err="1">
-                <a:solidFill>
-                  <a:srgbClr val="000000"/>
-                </a:solidFill>
-                <a:latin typeface="Consolas" panose="020B0609020204030204" pitchFamily="49" charset="0"/>
-              </a:rPr>
-              <a:t>setTimeout</a:t>
-            </a:r>
-            <a:r>
-              <a:rPr lang="en-US" sz="2000" dirty="0">
-                <a:solidFill>
-                  <a:srgbClr val="000000"/>
-                </a:solidFill>
-                <a:latin typeface="Consolas" panose="020B0609020204030204" pitchFamily="49" charset="0"/>
-              </a:rPr>
-              <a:t>(() =&gt; {</a:t>
-            </a:r>
-          </a:p>
-          <a:p>
-            <a:pPr algn="l"/>
-            <a:r>
-              <a:rPr lang="en-US" sz="2000" dirty="0">
-                <a:solidFill>
-                  <a:srgbClr val="000000"/>
-                </a:solidFill>
-                <a:latin typeface="Consolas" panose="020B0609020204030204" pitchFamily="49" charset="0"/>
-              </a:rPr>
-              <a:t>      console.log(</a:t>
-            </a:r>
-            <a:r>
-              <a:rPr lang="en-US" sz="2000" dirty="0">
-                <a:solidFill>
-                  <a:srgbClr val="C00000"/>
-                </a:solidFill>
-                <a:latin typeface="Consolas" panose="020B0609020204030204" pitchFamily="49" charset="0"/>
-              </a:rPr>
-              <a:t>'timeout'</a:t>
-            </a:r>
-            <a:r>
-              <a:rPr lang="en-US" sz="2000" dirty="0">
-                <a:solidFill>
-                  <a:srgbClr val="000000"/>
-                </a:solidFill>
-                <a:latin typeface="Consolas" panose="020B0609020204030204" pitchFamily="49" charset="0"/>
-              </a:rPr>
-              <a:t>);</a:t>
-            </a:r>
-          </a:p>
-          <a:p>
-            <a:pPr algn="l"/>
-            <a:r>
-              <a:rPr lang="en-US" sz="2000" dirty="0">
-                <a:solidFill>
-                  <a:srgbClr val="000000"/>
-                </a:solidFill>
-                <a:latin typeface="Consolas" panose="020B0609020204030204" pitchFamily="49" charset="0"/>
-              </a:rPr>
-              <a:t>    }, </a:t>
-            </a:r>
-            <a:r>
-              <a:rPr lang="en-US" sz="2000" dirty="0">
-                <a:solidFill>
-                  <a:schemeClr val="accent6">
-                    <a:lumMod val="75000"/>
-                  </a:schemeClr>
-                </a:solidFill>
-                <a:latin typeface="Consolas" panose="020B0609020204030204" pitchFamily="49" charset="0"/>
-              </a:rPr>
-              <a:t>0</a:t>
-            </a:r>
-            <a:r>
-              <a:rPr lang="en-US" sz="2000" dirty="0">
-                <a:solidFill>
-                  <a:srgbClr val="000000"/>
-                </a:solidFill>
-                <a:latin typeface="Consolas" panose="020B0609020204030204" pitchFamily="49" charset="0"/>
-              </a:rPr>
-              <a:t>);</a:t>
-            </a:r>
-          </a:p>
-          <a:p>
-            <a:pPr algn="l"/>
-            <a:r>
-              <a:rPr lang="en-US" sz="2000" b="0" dirty="0">
-                <a:solidFill>
-                  <a:srgbClr val="000000"/>
-                </a:solidFill>
-                <a:effectLst/>
-                <a:latin typeface="Consolas" panose="020B0609020204030204" pitchFamily="49" charset="0"/>
-              </a:rPr>
-              <a:t>   console.log(</a:t>
-            </a:r>
-            <a:r>
-              <a:rPr lang="en-US" sz="2000" b="0" dirty="0">
-                <a:solidFill>
-                  <a:srgbClr val="A31515"/>
-                </a:solidFill>
-                <a:effectLst/>
-                <a:latin typeface="Consolas" panose="020B0609020204030204" pitchFamily="49" charset="0"/>
-              </a:rPr>
-              <a:t>'main done'</a:t>
-            </a:r>
-            <a:r>
-              <a:rPr lang="en-US" sz="2000" b="0" dirty="0">
-                <a:solidFill>
-                  <a:srgbClr val="000000"/>
-                </a:solidFill>
-                <a:effectLst/>
-                <a:latin typeface="Consolas" panose="020B0609020204030204" pitchFamily="49" charset="0"/>
-              </a:rPr>
-              <a:t>);</a:t>
-            </a:r>
-          </a:p>
-          <a:p>
-            <a:pPr algn="l"/>
-            <a:r>
-              <a:rPr lang="en-US" sz="2000" b="0" dirty="0">
-                <a:solidFill>
-                  <a:srgbClr val="000000"/>
-                </a:solidFill>
-                <a:effectLst/>
-                <a:latin typeface="Consolas" panose="020B0609020204030204" pitchFamily="49" charset="0"/>
-              </a:rPr>
-              <a:t>}</a:t>
-            </a:r>
-          </a:p>
-          <a:p>
-            <a:pPr algn="l">
-              <a:buNone/>
-            </a:pPr>
-            <a:br>
-              <a:rPr lang="en-US" sz="2000" b="0" dirty="0">
-                <a:solidFill>
-                  <a:srgbClr val="000000"/>
-                </a:solidFill>
-                <a:effectLst/>
-                <a:latin typeface="Consolas" panose="020B0609020204030204" pitchFamily="49" charset="0"/>
-              </a:rPr>
-            </a:br>
-            <a:r>
-              <a:rPr lang="en-US" sz="2000" b="0" dirty="0">
-                <a:solidFill>
-                  <a:srgbClr val="000000"/>
-                </a:solidFill>
-                <a:effectLst/>
-                <a:latin typeface="Consolas" panose="020B0609020204030204" pitchFamily="49" charset="0"/>
-              </a:rPr>
-              <a:t>main</a:t>
-            </a:r>
-            <a:r>
-              <a:rPr lang="en-US" sz="2000" dirty="0">
-                <a:solidFill>
-                  <a:srgbClr val="000000"/>
-                </a:solidFill>
-                <a:latin typeface="Consolas" panose="020B0609020204030204" pitchFamily="49" charset="0"/>
-              </a:rPr>
-              <a:t>()</a:t>
-            </a:r>
-            <a:endParaRPr lang="en-US" sz="2000" b="0" dirty="0">
+              <a:rPr lang="en-US" sz="1800" b="0" dirty="0">
+                <a:solidFill>
+                  <a:srgbClr val="008000"/>
+                </a:solidFill>
+                <a:effectLst/>
+                <a:latin typeface="Consolas" panose="020B0609020204030204" pitchFamily="49" charset="0"/>
+              </a:rPr>
+              <a:t>// returns a promise to wait 0 milliseconds and then run the </a:t>
+            </a:r>
+            <a:r>
+              <a:rPr lang="en-US" sz="1800" b="0" dirty="0" err="1">
+                <a:solidFill>
+                  <a:srgbClr val="008000"/>
+                </a:solidFill>
+                <a:effectLst/>
+                <a:latin typeface="Consolas" panose="020B0609020204030204" pitchFamily="49" charset="0"/>
+              </a:rPr>
+              <a:t>macrotask</a:t>
+            </a:r>
+            <a:endParaRPr lang="en-US" sz="1800" b="0" dirty="0">
               <a:solidFill>
                 <a:srgbClr val="000000"/>
               </a:solidFill>
@@ -32124,8 +32179,295 @@
             </a:endParaRPr>
           </a:p>
           <a:p>
-            <a:pPr algn="l"/>
-            <a:endParaRPr lang="en-US" sz="2000" b="0" dirty="0">
+            <a:pPr algn="l">
+              <a:lnSpc>
+                <a:spcPct val="113095"/>
+              </a:lnSpc>
+              <a:buNone/>
+            </a:pPr>
+            <a:r>
+              <a:rPr lang="en-US" sz="1800" b="0" dirty="0">
+                <a:solidFill>
+                  <a:srgbClr val="0000FF"/>
+                </a:solidFill>
+                <a:effectLst/>
+                <a:latin typeface="Consolas" panose="020B0609020204030204" pitchFamily="49" charset="0"/>
+              </a:rPr>
+              <a:t>async</a:t>
+            </a:r>
+            <a:r>
+              <a:rPr lang="en-US" sz="1800" b="0" dirty="0">
+                <a:solidFill>
+                  <a:srgbClr val="000000"/>
+                </a:solidFill>
+                <a:effectLst/>
+                <a:latin typeface="Consolas" panose="020B0609020204030204" pitchFamily="49" charset="0"/>
+              </a:rPr>
+              <a:t> </a:t>
+            </a:r>
+            <a:r>
+              <a:rPr lang="en-US" sz="1800" b="0" dirty="0">
+                <a:solidFill>
+                  <a:srgbClr val="0000FF"/>
+                </a:solidFill>
+                <a:effectLst/>
+                <a:latin typeface="Consolas" panose="020B0609020204030204" pitchFamily="49" charset="0"/>
+              </a:rPr>
+              <a:t>function</a:t>
+            </a:r>
+            <a:r>
+              <a:rPr lang="en-US" sz="1800" b="0" dirty="0">
+                <a:solidFill>
+                  <a:srgbClr val="000000"/>
+                </a:solidFill>
+                <a:effectLst/>
+                <a:latin typeface="Consolas" panose="020B0609020204030204" pitchFamily="49" charset="0"/>
+              </a:rPr>
+              <a:t> </a:t>
+            </a:r>
+            <a:r>
+              <a:rPr lang="en-US" sz="1800" b="0" dirty="0" err="1">
+                <a:solidFill>
+                  <a:srgbClr val="000000"/>
+                </a:solidFill>
+                <a:effectLst/>
+                <a:latin typeface="Consolas" panose="020B0609020204030204" pitchFamily="49" charset="0"/>
+              </a:rPr>
+              <a:t>macrotask</a:t>
+            </a:r>
+            <a:r>
+              <a:rPr lang="en-US" sz="1800" b="0" dirty="0">
+                <a:solidFill>
+                  <a:srgbClr val="000000"/>
+                </a:solidFill>
+                <a:effectLst/>
+                <a:latin typeface="Consolas" panose="020B0609020204030204" pitchFamily="49" charset="0"/>
+              </a:rPr>
+              <a:t>() { </a:t>
+            </a:r>
+          </a:p>
+          <a:p>
+            <a:pPr algn="l">
+              <a:lnSpc>
+                <a:spcPct val="113095"/>
+              </a:lnSpc>
+              <a:buNone/>
+            </a:pPr>
+            <a:r>
+              <a:rPr lang="en-US" sz="1800" b="0" dirty="0">
+                <a:solidFill>
+                  <a:srgbClr val="000000"/>
+                </a:solidFill>
+                <a:effectLst/>
+                <a:latin typeface="Consolas" panose="020B0609020204030204" pitchFamily="49" charset="0"/>
+              </a:rPr>
+              <a:t>    </a:t>
+            </a:r>
+            <a:r>
+              <a:rPr lang="en-US" sz="1800" b="0" dirty="0" err="1">
+                <a:solidFill>
+                  <a:srgbClr val="000000"/>
+                </a:solidFill>
+                <a:effectLst/>
+                <a:latin typeface="Consolas" panose="020B0609020204030204" pitchFamily="49" charset="0"/>
+              </a:rPr>
+              <a:t>setTimeout</a:t>
+            </a:r>
+            <a:r>
+              <a:rPr lang="en-US" sz="1800" b="0" dirty="0">
+                <a:solidFill>
+                  <a:srgbClr val="000000"/>
+                </a:solidFill>
+                <a:effectLst/>
+                <a:latin typeface="Consolas" panose="020B0609020204030204" pitchFamily="49" charset="0"/>
+              </a:rPr>
+              <a:t>(() </a:t>
+            </a:r>
+            <a:r>
+              <a:rPr lang="en-US" sz="1800" b="0" dirty="0">
+                <a:solidFill>
+                  <a:srgbClr val="0000FF"/>
+                </a:solidFill>
+                <a:effectLst/>
+                <a:latin typeface="Consolas" panose="020B0609020204030204" pitchFamily="49" charset="0"/>
+              </a:rPr>
+              <a:t>=&gt;</a:t>
+            </a:r>
+            <a:r>
+              <a:rPr lang="en-US" sz="1800" b="0" dirty="0">
+                <a:solidFill>
+                  <a:srgbClr val="000000"/>
+                </a:solidFill>
+                <a:effectLst/>
+                <a:latin typeface="Consolas" panose="020B0609020204030204" pitchFamily="49" charset="0"/>
+              </a:rPr>
+              <a:t> {</a:t>
+            </a:r>
+          </a:p>
+          <a:p>
+            <a:pPr algn="l">
+              <a:lnSpc>
+                <a:spcPct val="113095"/>
+              </a:lnSpc>
+              <a:buNone/>
+            </a:pPr>
+            <a:r>
+              <a:rPr lang="en-US" sz="1800" b="0" dirty="0">
+                <a:solidFill>
+                  <a:srgbClr val="000000"/>
+                </a:solidFill>
+                <a:effectLst/>
+                <a:latin typeface="Consolas" panose="020B0609020204030204" pitchFamily="49" charset="0"/>
+              </a:rPr>
+              <a:t>        console.log(</a:t>
+            </a:r>
+            <a:r>
+              <a:rPr lang="en-US" sz="1800" b="0" dirty="0">
+                <a:solidFill>
+                  <a:srgbClr val="A31515"/>
+                </a:solidFill>
+                <a:effectLst/>
+                <a:latin typeface="Consolas" panose="020B0609020204030204" pitchFamily="49" charset="0"/>
+              </a:rPr>
+              <a:t>'running </a:t>
+            </a:r>
+            <a:r>
+              <a:rPr lang="en-US" sz="1800" b="0" dirty="0" err="1">
+                <a:solidFill>
+                  <a:srgbClr val="A31515"/>
+                </a:solidFill>
+                <a:effectLst/>
+                <a:latin typeface="Consolas" panose="020B0609020204030204" pitchFamily="49" charset="0"/>
+              </a:rPr>
+              <a:t>macrotask</a:t>
+            </a:r>
+            <a:r>
+              <a:rPr lang="en-US" sz="1800" b="0" dirty="0">
+                <a:solidFill>
+                  <a:srgbClr val="A31515"/>
+                </a:solidFill>
+                <a:effectLst/>
+                <a:latin typeface="Consolas" panose="020B0609020204030204" pitchFamily="49" charset="0"/>
+              </a:rPr>
+              <a:t>'</a:t>
+            </a:r>
+            <a:r>
+              <a:rPr lang="en-US" sz="1800" b="0" dirty="0">
+                <a:solidFill>
+                  <a:srgbClr val="000000"/>
+                </a:solidFill>
+                <a:effectLst/>
+                <a:latin typeface="Consolas" panose="020B0609020204030204" pitchFamily="49" charset="0"/>
+              </a:rPr>
+              <a:t>);</a:t>
+            </a:r>
+          </a:p>
+          <a:p>
+            <a:pPr algn="l">
+              <a:lnSpc>
+                <a:spcPct val="113095"/>
+              </a:lnSpc>
+              <a:buNone/>
+            </a:pPr>
+            <a:r>
+              <a:rPr lang="en-US" sz="1800" b="0" dirty="0">
+                <a:solidFill>
+                  <a:srgbClr val="000000"/>
+                </a:solidFill>
+                <a:effectLst/>
+                <a:latin typeface="Consolas" panose="020B0609020204030204" pitchFamily="49" charset="0"/>
+              </a:rPr>
+              <a:t>    }, </a:t>
+            </a:r>
+            <a:r>
+              <a:rPr lang="en-US" sz="1800" b="0" dirty="0">
+                <a:solidFill>
+                  <a:srgbClr val="098658"/>
+                </a:solidFill>
+                <a:effectLst/>
+                <a:latin typeface="Consolas" panose="020B0609020204030204" pitchFamily="49" charset="0"/>
+              </a:rPr>
+              <a:t>0</a:t>
+            </a:r>
+            <a:r>
+              <a:rPr lang="en-US" sz="1800" b="0" dirty="0">
+                <a:solidFill>
+                  <a:srgbClr val="000000"/>
+                </a:solidFill>
+                <a:effectLst/>
+                <a:latin typeface="Consolas" panose="020B0609020204030204" pitchFamily="49" charset="0"/>
+              </a:rPr>
+              <a:t>);</a:t>
+            </a:r>
+          </a:p>
+          <a:p>
+            <a:pPr algn="l">
+              <a:lnSpc>
+                <a:spcPct val="113095"/>
+              </a:lnSpc>
+              <a:buNone/>
+            </a:pPr>
+            <a:r>
+              <a:rPr lang="en-US" sz="1800" b="0" dirty="0">
+                <a:solidFill>
+                  <a:srgbClr val="000000"/>
+                </a:solidFill>
+                <a:effectLst/>
+                <a:latin typeface="Consolas" panose="020B0609020204030204" pitchFamily="49" charset="0"/>
+              </a:rPr>
+              <a:t>}</a:t>
+            </a:r>
+          </a:p>
+          <a:p>
+            <a:pPr algn="l">
+              <a:lnSpc>
+                <a:spcPct val="113095"/>
+              </a:lnSpc>
+              <a:buNone/>
+            </a:pPr>
+            <a:endParaRPr lang="en-US" sz="1800" b="0" dirty="0">
+              <a:solidFill>
+                <a:srgbClr val="000000"/>
+              </a:solidFill>
+              <a:effectLst/>
+              <a:latin typeface="Consolas" panose="020B0609020204030204" pitchFamily="49" charset="0"/>
+            </a:endParaRPr>
+          </a:p>
+          <a:p>
+            <a:pPr algn="l">
+              <a:lnSpc>
+                <a:spcPct val="113095"/>
+              </a:lnSpc>
+              <a:buNone/>
+            </a:pPr>
+            <a:r>
+              <a:rPr lang="en-US" sz="1800" b="0" dirty="0">
+                <a:solidFill>
+                  <a:srgbClr val="000000"/>
+                </a:solidFill>
+                <a:effectLst/>
+                <a:latin typeface="Consolas" panose="020B0609020204030204" pitchFamily="49" charset="0"/>
+              </a:rPr>
+              <a:t>main()</a:t>
+            </a:r>
+          </a:p>
+          <a:p>
+            <a:pPr algn="l">
+              <a:lnSpc>
+                <a:spcPct val="113095"/>
+              </a:lnSpc>
+              <a:buNone/>
+            </a:pPr>
+            <a:br>
+              <a:rPr lang="en-US" sz="1600" b="0" dirty="0">
+                <a:solidFill>
+                  <a:srgbClr val="000000"/>
+                </a:solidFill>
+                <a:effectLst/>
+                <a:latin typeface="Consolas" panose="020B0609020204030204" pitchFamily="49" charset="0"/>
+              </a:rPr>
+            </a:br>
+            <a:endParaRPr lang="en-US" sz="1600" b="0" dirty="0">
               <a:solidFill>
                 <a:srgbClr val="000000"/>
               </a:solidFill>
@@ -32210,7 +32552,7 @@
                   <a:schemeClr val="tx1"/>
                 </a:solidFill>
               </a:rPr>
-              <a:t>newRequest.ts</a:t>
+              <a:t>microOverMacro.ts</a:t>
             </a:r>
             <a:endParaRPr lang="en-US" sz="2400" dirty="0">
               <a:solidFill>
@@ -32234,8 +32576,8 @@
         </p:nvSpPr>
         <p:spPr>
           <a:xfrm>
-            <a:off x="7234475" y="4628324"/>
-            <a:ext cx="4745491" cy="1971259"/>
+            <a:off x="7234475" y="4345858"/>
+            <a:ext cx="4745491" cy="2253725"/>
           </a:xfrm>
           <a:prstGeom prst="rect">
             <a:avLst/>
@@ -32295,7 +32637,53 @@
                 <a:latin typeface="Verdana" panose="020B0604030504040204" pitchFamily="34" charset="0"/>
                 <a:ea typeface="Verdana" panose="020B0604030504040204" pitchFamily="34" charset="0"/>
               </a:rPr>
-              <a:t>newRequest.ts</a:t>
+              <a:t>microOverMacro.ts</a:t>
+            </a:r>
+            <a:r>
+              <a:rPr lang="en-US" sz="2000" dirty="0">
+                <a:solidFill>
+                  <a:schemeClr val="tx1"/>
+                </a:solidFill>
+                <a:latin typeface="Verdana" panose="020B0604030504040204" pitchFamily="34" charset="0"/>
+                <a:ea typeface="Verdana" panose="020B0604030504040204" pitchFamily="34" charset="0"/>
+              </a:rPr>
+              <a:t> </a:t>
+            </a:r>
+          </a:p>
+          <a:p>
+            <a:pPr algn="l"/>
+            <a:r>
+              <a:rPr lang="en-US" sz="2000" dirty="0">
+                <a:solidFill>
+                  <a:schemeClr val="tx1"/>
+                </a:solidFill>
+                <a:latin typeface="Verdana" panose="020B0604030504040204" pitchFamily="34" charset="0"/>
+                <a:ea typeface="Verdana" panose="020B0604030504040204" pitchFamily="34" charset="0"/>
+              </a:rPr>
+              <a:t>main started</a:t>
+            </a:r>
+          </a:p>
+          <a:p>
+            <a:pPr algn="l"/>
+            <a:r>
+              <a:rPr lang="en-US" sz="2000" dirty="0">
+                <a:solidFill>
+                  <a:schemeClr val="tx1"/>
+                </a:solidFill>
+                <a:latin typeface="Verdana" panose="020B0604030504040204" pitchFamily="34" charset="0"/>
+                <a:ea typeface="Verdana" panose="020B0604030504040204" pitchFamily="34" charset="0"/>
+              </a:rPr>
+              <a:t>creating </a:t>
+            </a:r>
+            <a:r>
+              <a:rPr lang="en-US" sz="2000" dirty="0" err="1">
+                <a:solidFill>
+                  <a:schemeClr val="tx1"/>
+                </a:solidFill>
+                <a:latin typeface="Verdana" panose="020B0604030504040204" pitchFamily="34" charset="0"/>
+                <a:ea typeface="Verdana" panose="020B0604030504040204" pitchFamily="34" charset="0"/>
+              </a:rPr>
+              <a:t>macrotask</a:t>
             </a:r>
             <a:endParaRPr lang="en-US" sz="2000" dirty="0">
               <a:solidFill>
@@ -32315,7 +32703,7 @@
                 <a:latin typeface="Verdana" panose="020B0604030504040204" pitchFamily="34" charset="0"/>
                 <a:ea typeface="Verdana" panose="020B0604030504040204" pitchFamily="34" charset="0"/>
               </a:rPr>
-              <a:t>main started</a:t>
+              <a:t>running microtask1</a:t>
             </a:r>
           </a:p>
           <a:p>
@@ -32328,7 +32716,7 @@
                 <a:latin typeface="Verdana" panose="020B0604030504040204" pitchFamily="34" charset="0"/>
                 <a:ea typeface="Verdana" panose="020B0604030504040204" pitchFamily="34" charset="0"/>
               </a:rPr>
-              <a:t>sync task</a:t>
+              <a:t>running microtask2</a:t>
             </a:r>
           </a:p>
           <a:p>
@@ -32341,120 +32729,25 @@
                 <a:latin typeface="Verdana" panose="020B0604030504040204" pitchFamily="34" charset="0"/>
                 <a:ea typeface="Verdana" panose="020B0604030504040204" pitchFamily="34" charset="0"/>
               </a:rPr>
-              <a:t>main done</a:t>
-            </a:r>
-          </a:p>
-          <a:p>
-            <a:pPr algn="l"/>
-            <a:r>
-              <a:rPr lang="en-US" sz="2000" dirty="0">
+              <a:t>running </a:t>
+            </a:r>
+            <a:r>
+              <a:rPr lang="en-US" sz="2000" dirty="0" err="1">
                 <a:solidFill>
                   <a:schemeClr val="tx1"/>
                 </a:solidFill>
                 <a:latin typeface="Verdana" panose="020B0604030504040204" pitchFamily="34" charset="0"/>
                 <a:ea typeface="Verdana" panose="020B0604030504040204" pitchFamily="34" charset="0"/>
               </a:rPr>
-              <a:t>promise</a:t>
-            </a:r>
-          </a:p>
-          <a:p>
-            <a:pPr algn="l"/>
-            <a:r>
-              <a:rPr lang="en-US" sz="2000" dirty="0">
-                <a:solidFill>
-                  <a:schemeClr val="tx1"/>
-                </a:solidFill>
-                <a:latin typeface="Verdana" panose="020B0604030504040204" pitchFamily="34" charset="0"/>
-                <a:ea typeface="Verdana" panose="020B0604030504040204" pitchFamily="34" charset="0"/>
-              </a:rPr>
-              <a:t>timeout</a:t>
-            </a:r>
-          </a:p>
-        </p:txBody>
-      </p:sp>
-      <p:sp>
-        <p:nvSpPr>
-          <p:cNvPr id="6" name="TextBox 5">
-            <a:extLst>
-              <a:ext uri="{FF2B5EF4-FFF2-40B4-BE49-F238E27FC236}">
-                <a16:creationId xmlns:a16="http://schemas.microsoft.com/office/drawing/2014/main" id="{AD1001DB-76DD-2586-B9F2-E882C95ACD40}"/>
-              </a:ext>
-            </a:extLst>
-          </p:cNvPr>
-          <p:cNvSpPr txBox="1"/>
-          <p:nvPr/>
-        </p:nvSpPr>
-        <p:spPr>
-          <a:xfrm>
-            <a:off x="6237854" y="2226796"/>
-            <a:ext cx="4745491" cy="1267801"/>
-          </a:xfrm>
-          <a:prstGeom prst="rect">
-            <a:avLst/>
-          </a:prstGeom>
-          <a:solidFill>
-            <a:srgbClr val="FFFF00"/>
-          </a:solidFill>
-          <a:ln>
-            <a:noFill/>
-          </a:ln>
-        </p:spPr>
-        <p:style>
-          <a:lnRef idx="2">
-            <a:schemeClr val="accent1">
-              <a:shade val="50000"/>
-            </a:schemeClr>
-          </a:lnRef>
-          <a:fillRef idx="1">
-            <a:schemeClr val="accent1"/>
-          </a:fillRef>
-          <a:effectRef idx="0">
-            <a:schemeClr val="accent1"/>
-          </a:effectRef>
-          <a:fontRef idx="minor">
-            <a:schemeClr val="lt1"/>
-          </a:fontRef>
-        </p:style>
-        <p:txBody>
-          <a:bodyPr rot="0" spcFirstLastPara="0" vertOverflow="overflow" horzOverflow="overflow" vert="horz" wrap="square" lIns="91440" tIns="45720" rIns="91440" bIns="45720" numCol="1" spcCol="0" rtlCol="0" fromWordArt="0" anchor="ctr" anchorCtr="0" forceAA="0" compatLnSpc="1">
-            <a:prstTxWarp prst="textNoShape">
-              <a:avLst/>
-            </a:prstTxWarp>
-            <a:noAutofit/>
-          </a:bodyPr>
-          <a:lstStyle/>
-          <a:p>
-            <a:pPr algn="l"/>
-            <a:r>
-              <a:rPr lang="en-US" sz="2000" dirty="0">
-                <a:solidFill>
-                  <a:schemeClr val="tx1"/>
-                </a:solidFill>
-                <a:latin typeface="Verdana" panose="020B0604030504040204" pitchFamily="34" charset="0"/>
-                <a:ea typeface="Verdana" panose="020B0604030504040204" pitchFamily="34" charset="0"/>
-              </a:rPr>
-              <a:t>I don't understand this. Is it necessary? It uses </a:t>
-            </a:r>
-            <a:r>
-              <a:rPr lang="en-US" sz="2000" dirty="0" err="1">
-                <a:solidFill>
-                  <a:schemeClr val="tx1"/>
-                </a:solidFill>
-                <a:latin typeface="Verdana" panose="020B0604030504040204" pitchFamily="34" charset="0"/>
-                <a:ea typeface="Verdana" panose="020B0604030504040204" pitchFamily="34" charset="0"/>
-              </a:rPr>
-              <a:t>Promise.resolve</a:t>
-            </a:r>
-            <a:r>
-              <a:rPr lang="en-US" sz="2000" dirty="0">
-                <a:solidFill>
-                  <a:schemeClr val="tx1"/>
-                </a:solidFill>
-                <a:latin typeface="Verdana" panose="020B0604030504040204" pitchFamily="34" charset="0"/>
-                <a:ea typeface="Verdana" panose="020B0604030504040204" pitchFamily="34" charset="0"/>
-              </a:rPr>
-              <a:t> and .then, which we don't use elsewhere.</a:t>
-            </a:r>
+              <a:t>macrotask</a:t>
+            </a:r>
+            <a:endParaRPr lang="en-US" sz="2000" dirty="0">
+              <a:solidFill>
+                <a:schemeClr val="tx1"/>
+              </a:solidFill>
+              <a:latin typeface="Verdana" panose="020B0604030504040204" pitchFamily="34" charset="0"/>
+              <a:ea typeface="Verdana" panose="020B0604030504040204" pitchFamily="34" charset="0"/>
+            </a:endParaRPr>
           </a:p>
         </p:txBody>
       </p:sp>
@@ -32610,33 +32903,15 @@
                                   </p:childTnLst>
                                 </p:cTn>
                               </p:par>
-                            </p:childTnLst>
-                          </p:cTn>
-                        </p:par>
-                      </p:childTnLst>
-                    </p:cTn>
-                  </p:par>
-                  <p:par>
-                    <p:cTn id="13" fill="hold">
-                      <p:stCondLst>
-                        <p:cond delay="indefinite"/>
-                      </p:stCondLst>
-                      <p:childTnLst>
-                        <p:par>
-                          <p:cTn id="14" fill="hold">
-                            <p:stCondLst>
-                              <p:cond delay="0"/>
-                            </p:stCondLst>
-                            <p:childTnLst>
                               <p:par>
-                                <p:cTn id="15" presetID="1" presetClass="entr" presetSubtype="0" fill="hold" grpId="0" nodeType="clickEffect">
+                                <p:cTn id="13" presetID="1" presetClass="entr" presetSubtype="0" fill="hold" grpId="0" nodeType="withEffect">
                                   <p:stCondLst>
                                     <p:cond delay="0"/>
                                   </p:stCondLst>
                                   <p:childTnLst>
                                     <p:set>
                                       <p:cBhvr>
-                                        <p:cTn id="16" dur="1" fill="hold">
+                                        <p:cTn id="14" dur="1" fill="hold">
                                           <p:stCondLst>
                                             <p:cond delay="0"/>
                                           </p:stCondLst>
@@ -32659,33 +32934,15 @@
                                   </p:childTnLst>
                                 </p:cTn>
                               </p:par>
-                            </p:childTnLst>
-                          </p:cTn>
-                        </p:par>
-                      </p:childTnLst>
-                    </p:cTn>
-                  </p:par>
-                  <p:par>
-                    <p:cTn id="17" fill="hold">
-                      <p:stCondLst>
-                        <p:cond delay="indefinite"/>
-                      </p:stCondLst>
-                      <p:childTnLst>
-                        <p:par>
-                          <p:cTn id="18" fill="hold">
-                            <p:stCondLst>
-                              <p:cond delay="0"/>
-                            </p:stCondLst>
-                            <p:childTnLst>
                               <p:par>
-                                <p:cTn id="19" presetID="1" presetClass="entr" presetSubtype="0" fill="hold" grpId="0" nodeType="clickEffect">
+                                <p:cTn id="15" presetID="1" presetClass="entr" presetSubtype="0" fill="hold" grpId="0" nodeType="withEffect">
                                   <p:stCondLst>
                                     <p:cond delay="0"/>
                                   </p:stCondLst>
                                   <p:childTnLst>
                                     <p:set>
                                       <p:cBhvr>
-                                        <p:cTn id="20" dur="1" fill="hold">
+                                        <p:cTn id="16" dur="1" fill="hold">
                                           <p:stCondLst>
                                             <p:cond delay="0"/>
                                           </p:stCondLst>
@@ -32708,33 +32965,15 @@
                                   </p:childTnLst>
                                 </p:cTn>
                               </p:par>
-                            </p:childTnLst>
-                          </p:cTn>
-                        </p:par>
-                      </p:childTnLst>
-                    </p:cTn>
-                  </p:par>
-                  <p:par>
-                    <p:cTn id="21" fill="hold">
-                      <p:stCondLst>
-                        <p:cond delay="indefinite"/>
-                      </p:stCondLst>
-                      <p:childTnLst>
-                        <p:par>
-                          <p:cTn id="22" fill="hold">
-                            <p:stCondLst>
-                              <p:cond delay="0"/>
-                            </p:stCondLst>
-                            <p:childTnLst>
                               <p:par>
-                                <p:cTn id="23" presetID="1" presetClass="entr" presetSubtype="0" fill="hold" grpId="0" nodeType="clickEffect">
+                                <p:cTn id="17" presetID="1" presetClass="entr" presetSubtype="0" fill="hold" grpId="0" nodeType="withEffect">
                                   <p:stCondLst>
                                     <p:cond delay="0"/>
                                   </p:stCondLst>
                                   <p:childTnLst>
                                     <p:set>
                                       <p:cBhvr>
-                                        <p:cTn id="24" dur="1" fill="hold">
+                                        <p:cTn id="18" dur="1" fill="hold">
                                           <p:stCondLst>
                                             <p:cond delay="0"/>
                                           </p:stCondLst>
@@ -34370,43 +34609,7 @@
                 </a:solidFill>
                 <a:latin typeface="Consolas" panose="020B0609020204030204" pitchFamily="49" charset="0"/>
               </a:rPr>
-              <a:t>`Error occurred for request </a:t>
-            </a:r>
-            <a:r>
-              <a:rPr lang="en-US" sz="2000" dirty="0">
-                <a:solidFill>
-                  <a:srgbClr val="0000FF"/>
-                </a:solidFill>
-                <a:latin typeface="Consolas" panose="020B0609020204030204" pitchFamily="49" charset="0"/>
-              </a:rPr>
-              <a:t>${</a:t>
-            </a:r>
-            <a:r>
-              <a:rPr lang="en-US" sz="2000" dirty="0">
-                <a:solidFill>
-                  <a:srgbClr val="000000"/>
-                </a:solidFill>
-                <a:latin typeface="Consolas" panose="020B0609020204030204" pitchFamily="49" charset="0"/>
-              </a:rPr>
-              <a:t>req1</a:t>
-            </a:r>
-            <a:r>
-              <a:rPr lang="en-US" sz="2000" dirty="0">
-                <a:solidFill>
-                  <a:srgbClr val="0000FF"/>
-                </a:solidFill>
-                <a:latin typeface="Consolas" panose="020B0609020204030204" pitchFamily="49" charset="0"/>
-              </a:rPr>
-              <a:t>}</a:t>
-            </a:r>
-            <a:r>
-              <a:rPr lang="en-US" sz="2000" dirty="0">
-                <a:solidFill>
-                  <a:srgbClr val="A31515"/>
-                </a:solidFill>
-                <a:latin typeface="Consolas" panose="020B0609020204030204" pitchFamily="49" charset="0"/>
-              </a:rPr>
-              <a:t>`</a:t>
+              <a:t>`Recovering from failure with 0`</a:t>
             </a:r>
             <a:r>
               <a:rPr lang="en-US" sz="2000" dirty="0">
@@ -34544,8 +34747,8 @@
         </p:nvSpPr>
         <p:spPr>
           <a:xfrm>
-            <a:off x="5961358" y="4105898"/>
-            <a:ext cx="4773698" cy="2250452"/>
+            <a:off x="4336026" y="3925392"/>
+            <a:ext cx="7588733" cy="2609534"/>
           </a:xfrm>
           <a:prstGeom prst="rect">
             <a:avLst/>
@@ -34677,7 +34880,7 @@
                 <a:latin typeface="Verdana" panose="020B0604030504040204" pitchFamily="34" charset="0"/>
                 <a:ea typeface="Verdana" panose="020B0604030504040204" pitchFamily="34" charset="0"/>
               </a:rPr>
-              <a:t>Error occurred for request -32</a:t>
+              <a:t>Request -32 failing because response -22 would be &lt; 0</a:t>
             </a:r>
           </a:p>
           <a:p>
@@ -34690,7 +34893,7 @@
                 <a:latin typeface="Verdana" panose="020B0604030504040204" pitchFamily="34" charset="0"/>
                 <a:ea typeface="Verdana" panose="020B0604030504040204" pitchFamily="34" charset="0"/>
               </a:rPr>
-              <a:t>main done with res = 0        </a:t>
+              <a:t>Recovering from failure with 0</a:t>
             </a:r>
           </a:p>
           <a:p>
@@ -34703,7 +34906,20 @@
                 <a:latin typeface="Verdana" panose="020B0604030504040204" pitchFamily="34" charset="0"/>
                 <a:ea typeface="Verdana" panose="020B0604030504040204" pitchFamily="34" charset="0"/>
               </a:rPr>
-              <a:t>1007.52 msec</a:t>
+              <a:t>main done with res = 0</a:t>
+            </a:r>
+          </a:p>
+          <a:p>
+            <a:pPr algn="l"/>
+            <a:r>
+              <a:rPr lang="en-US" sz="2000" dirty="0">
+                <a:solidFill>
+                  <a:schemeClr val="tx1"/>
+                </a:solidFill>
+                <a:latin typeface="Verdana" panose="020B0604030504040204" pitchFamily="34" charset="0"/>
+                <a:ea typeface="Verdana" panose="020B0604030504040204" pitchFamily="34" charset="0"/>
+              </a:rPr>
+              <a:t>1014.45 msec</a:t>
             </a:r>
           </a:p>
         </p:txBody>
@@ -38683,7 +38899,7 @@
           </a:ln>
           <a:extLst>
             <a:ext uri="{C572A759-6A51-4108-AA02-DFA0A04FC94B}">
-              <ma14:wrappingTextBoxFlag xmlns="" xmlns:m="http://schemas.openxmlformats.org/officeDocument/2006/math" xmlns:a14="http://schemas.microsoft.com/office/drawing/2010/main" xmlns:ma14="http://schemas.microsoft.com/office/mac/drawingml/2011/main" val="1"/>
+              <ma14:wrappingTextBoxFlag xmlns:ma14="http://schemas.microsoft.com/office/mac/drawingml/2011/main" xmlns:a14="http://schemas.microsoft.com/office/drawing/2010/main" xmlns:m="http://schemas.openxmlformats.org/officeDocument/2006/math" xmlns="" val="1"/>
             </a:ext>
           </a:extLst>
         </p:spPr>

--- a/Slides/Module 08 Concurrency.pptx
+++ b/Slides/Module 08 Concurrency.pptx
@@ -4029,7 +4029,7 @@
                 <a:tabLst/>
                 <a:defRPr/>
               </a:pPr>
-              <a:t>8/12/2026</a:t>
+              <a:t>9/25/2026</a:t>
             </a:fld>
             <a:endParaRPr kumimoji="0" lang="en-US" sz="1200" b="0" i="0" u="none" strike="noStrike" kern="1200" cap="none" spc="0" normalizeH="0" baseline="0" noProof="0">
               <a:ln>
@@ -4513,7 +4513,7 @@
                 <a:tabLst/>
                 <a:defRPr/>
               </a:pPr>
-              <a:t>8/12/2026</a:t>
+              <a:t>9/25/2026</a:t>
             </a:fld>
             <a:endParaRPr kumimoji="0" lang="en-US" sz="1200" b="0" i="0" u="none" strike="noStrike" kern="1200" cap="none" spc="0" normalizeH="0" baseline="0" noProof="0">
               <a:ln>
@@ -4871,7 +4871,7 @@
                 <a:tabLst/>
                 <a:defRPr/>
               </a:pPr>
-              <a:t>8/12/2026</a:t>
+              <a:t>9/25/2026</a:t>
             </a:fld>
             <a:endParaRPr kumimoji="0" lang="en-US" sz="1200" b="0" i="0" u="none" strike="noStrike" kern="1200" cap="none" spc="0" normalizeH="0" baseline="0" noProof="0">
               <a:ln>
@@ -5239,7 +5239,7 @@
                 <a:tabLst/>
                 <a:defRPr/>
               </a:pPr>
-              <a:t>8/12/2026</a:t>
+              <a:t>9/25/2026</a:t>
             </a:fld>
             <a:endParaRPr kumimoji="0" lang="en-US" sz="1200" b="0" i="0" u="none" strike="noStrike" kern="1200" cap="none" spc="0" normalizeH="0" baseline="0" noProof="0">
               <a:ln>
@@ -6209,7 +6209,7 @@
                 <a:tabLst/>
                 <a:defRPr/>
               </a:pPr>
-              <a:t>8/12/2026</a:t>
+              <a:t>9/25/2026</a:t>
             </a:fld>
             <a:endParaRPr kumimoji="0" lang="en-US" sz="1200" b="0" i="0" u="none" strike="noStrike" kern="1200" cap="none" spc="0" normalizeH="0" baseline="0" noProof="0">
               <a:ln>
@@ -6635,7 +6635,7 @@
                 <a:tabLst/>
                 <a:defRPr/>
               </a:pPr>
-              <a:t>8/12/2026</a:t>
+              <a:t>9/25/2026</a:t>
             </a:fld>
             <a:endParaRPr kumimoji="0" lang="en-US" sz="1200" b="0" i="0" u="none" strike="noStrike" kern="1200" cap="none" spc="0" normalizeH="0" baseline="0" noProof="0">
               <a:ln>
@@ -6999,7 +6999,7 @@
                 <a:tabLst/>
                 <a:defRPr/>
               </a:pPr>
-              <a:t>8/12/2026</a:t>
+              <a:t>9/25/2026</a:t>
             </a:fld>
             <a:endParaRPr kumimoji="0" lang="en-US" sz="1200" b="0" i="0" u="none" strike="noStrike" kern="1200" cap="none" spc="0" normalizeH="0" baseline="0" noProof="0">
               <a:ln>
@@ -7526,7 +7526,7 @@
                 <a:tabLst/>
                 <a:defRPr/>
               </a:pPr>
-              <a:t>8/12/2026</a:t>
+              <a:t>9/25/2026</a:t>
             </a:fld>
             <a:endParaRPr kumimoji="0" lang="en-US" sz="1200" b="0" i="0" u="none" strike="noStrike" kern="1200" cap="none" spc="0" normalizeH="0" baseline="0" noProof="0">
               <a:ln>
@@ -7987,7 +7987,7 @@
                 <a:tabLst/>
                 <a:defRPr/>
               </a:pPr>
-              <a:t>8/12/2026</a:t>
+              <a:t>9/25/2026</a:t>
             </a:fld>
             <a:endParaRPr kumimoji="0" lang="en-US" sz="1200" b="0" i="0" u="none" strike="noStrike" kern="1200" cap="none" spc="0" normalizeH="0" baseline="0" noProof="0">
               <a:ln>
@@ -8595,7 +8595,7 @@
                 <a:tabLst/>
                 <a:defRPr/>
               </a:pPr>
-              <a:t>8/12/2026</a:t>
+              <a:t>9/25/2026</a:t>
             </a:fld>
             <a:endParaRPr kumimoji="0" lang="en-US" sz="1200" b="0" i="0" u="none" strike="noStrike" kern="1200" cap="none" spc="0" normalizeH="0" baseline="0" noProof="0">
               <a:ln>
@@ -8868,7 +8868,7 @@
                 <a:tabLst/>
                 <a:defRPr/>
               </a:pPr>
-              <a:t>8/12/2026</a:t>
+              <a:t>9/25/2026</a:t>
             </a:fld>
             <a:endParaRPr kumimoji="0" lang="en-US" sz="1200" b="0" i="0" u="none" strike="noStrike" kern="1200" cap="none" spc="0" normalizeH="0" baseline="0" noProof="0">
               <a:ln>
@@ -9339,7 +9339,7 @@
                 <a:tabLst/>
                 <a:defRPr/>
               </a:pPr>
-              <a:t>8/12/2026</a:t>
+              <a:t>9/25/2026</a:t>
             </a:fld>
             <a:endParaRPr kumimoji="0" lang="en-US" sz="1200" b="0" i="0" u="none" strike="noStrike" kern="1200" cap="none" spc="0" normalizeH="0" baseline="0" noProof="0">
               <a:ln>
@@ -9740,7 +9740,7 @@
                 <a:tabLst/>
                 <a:defRPr/>
               </a:pPr>
-              <a:t>8/12/2026</a:t>
+              <a:t>9/25/2026</a:t>
             </a:fld>
             <a:endParaRPr kumimoji="0" lang="en-US" sz="1200" b="0" i="0" u="none" strike="noStrike" kern="1200" cap="none" spc="0" normalizeH="0" baseline="0" noProof="0">
               <a:ln>
@@ -11836,7 +11836,12 @@
             <p:ph idx="1"/>
           </p:nvPr>
         </p:nvSpPr>
-        <p:spPr/>
+        <p:spPr>
+          <a:xfrm>
+            <a:off x="838199" y="1500160"/>
+            <a:ext cx="8663609" cy="4351338"/>
+          </a:xfrm>
+        </p:spPr>
         <p:txBody>
           <a:bodyPr>
             <a:normAutofit/>
@@ -16182,10 +16187,15 @@
             <p:ph idx="1"/>
           </p:nvPr>
         </p:nvSpPr>
-        <p:spPr/>
+        <p:spPr>
+          <a:xfrm>
+            <a:off x="838200" y="1500160"/>
+            <a:ext cx="9061174" cy="4351338"/>
+          </a:xfrm>
+        </p:spPr>
         <p:txBody>
           <a:bodyPr>
-            <a:normAutofit lnSpcReduction="10000"/>
+            <a:normAutofit/>
           </a:bodyPr>
           <a:lstStyle/>
           <a:p>
@@ -43516,7 +43526,7 @@
         <p:spPr>
           <a:xfrm>
             <a:off x="838200" y="1500160"/>
-            <a:ext cx="7977810" cy="4403683"/>
+            <a:ext cx="10065026" cy="4403683"/>
           </a:xfrm>
         </p:spPr>
         <p:txBody>
@@ -43531,7 +43541,7 @@
               </a:lnSpc>
             </a:pPr>
             <a:r>
-              <a:rPr lang="en-US" sz="1800" dirty="0"/>
+              <a:rPr lang="en-US" sz="2000" dirty="0"/>
               <a:t>This is called the "Web API"</a:t>
             </a:r>
           </a:p>
@@ -43542,7 +43552,7 @@
               </a:lnSpc>
             </a:pPr>
             <a:r>
-              <a:rPr lang="en-US" sz="1800" dirty="0"/>
+              <a:rPr lang="en-US" sz="2000" dirty="0"/>
               <a:t>These are things like http requests, I/O operations, or timers.</a:t>
             </a:r>
           </a:p>
@@ -43553,15 +43563,15 @@
               </a:lnSpc>
             </a:pPr>
             <a:r>
-              <a:rPr lang="en-US" sz="1800" dirty="0"/>
+              <a:rPr lang="en-US" sz="2000" dirty="0"/>
               <a:t>Each of these returns a promise that you can </a:t>
             </a:r>
             <a:r>
-              <a:rPr lang="en-US" sz="1800" b="1" dirty="0"/>
+              <a:rPr lang="en-US" sz="2000" b="1" dirty="0"/>
               <a:t>await</a:t>
             </a:r>
             <a:r>
-              <a:rPr lang="en-US" sz="1800" dirty="0"/>
+              <a:rPr lang="en-US" sz="2000" dirty="0"/>
               <a:t>.  The promise runs while it is pending, and produces the response from the http request, or the contents of the file, etc.</a:t>
             </a:r>
           </a:p>
@@ -43572,26 +43582,26 @@
               </a:lnSpc>
             </a:pPr>
             <a:r>
-              <a:rPr lang="en-US" sz="1800" dirty="0"/>
+              <a:rPr lang="en-US" sz="2000" dirty="0"/>
               <a:t>You may use some of these directly, like </a:t>
             </a:r>
             <a:r>
-              <a:rPr lang="en-US" sz="1800" b="1" dirty="0"/>
+              <a:rPr lang="en-US" sz="2000" b="1" dirty="0"/>
               <a:t>fetch</a:t>
             </a:r>
             <a:r>
-              <a:rPr lang="en-US" sz="1800" dirty="0"/>
+              <a:rPr lang="en-US" sz="2000" dirty="0"/>
               <a:t> or </a:t>
             </a:r>
             <a:r>
-              <a:rPr lang="en-US" sz="1800" b="1" dirty="0" err="1"/>
+              <a:rPr lang="en-US" sz="2000" b="1" dirty="0" err="1"/>
               <a:t>setTimeout</a:t>
             </a:r>
             <a:r>
-              <a:rPr lang="en-US" sz="1800" dirty="0"/>
+              <a:rPr lang="en-US" sz="2000" dirty="0"/>
               <a:t>.</a:t>
             </a:r>
-            <a:endParaRPr lang="en-US" sz="1800" b="1" dirty="0"/>
+            <a:endParaRPr lang="en-US" sz="2000" b="1" dirty="0"/>
           </a:p>
           <a:p>
             <a:pPr>
@@ -43600,7 +43610,7 @@
               </a:lnSpc>
             </a:pPr>
             <a:r>
-              <a:rPr lang="en-US" sz="1800" dirty="0"/>
+              <a:rPr lang="en-US" sz="2000" dirty="0"/>
               <a:t>More frequently, you will invoke these using a convenient library, like</a:t>
             </a:r>
           </a:p>
@@ -43612,7 +43622,7 @@
               <a:buNone/>
             </a:pPr>
             <a:r>
-              <a:rPr lang="en-US" sz="1800" b="0" dirty="0">
+              <a:rPr lang="en-US" sz="2000" b="0" dirty="0">
                 <a:solidFill>
                   <a:srgbClr val="0070C1"/>
                 </a:solidFill>
@@ -43622,7 +43632,7 @@
               <a:t>	</a:t>
             </a:r>
             <a:r>
-              <a:rPr lang="en-US" sz="1800" b="0" dirty="0" err="1">
+              <a:rPr lang="en-US" sz="2000" b="0" dirty="0" err="1">
                 <a:solidFill>
                   <a:srgbClr val="0070C1"/>
                 </a:solidFill>
@@ -43632,7 +43642,7 @@
               <a:t>axios</a:t>
             </a:r>
             <a:r>
-              <a:rPr lang="en-US" sz="1800" b="0" dirty="0" err="1">
+              <a:rPr lang="en-US" sz="2000" b="0" dirty="0" err="1">
                 <a:solidFill>
                   <a:srgbClr val="000000"/>
                 </a:solidFill>
@@ -43642,7 +43652,7 @@
               <a:t>.</a:t>
             </a:r>
             <a:r>
-              <a:rPr lang="en-US" sz="1800" b="0" dirty="0" err="1">
+              <a:rPr lang="en-US" sz="2000" b="0" dirty="0" err="1">
                 <a:solidFill>
                   <a:srgbClr val="795E26"/>
                 </a:solidFill>
@@ -43652,7 +43662,7 @@
               <a:t>get</a:t>
             </a:r>
             <a:r>
-              <a:rPr lang="en-US" sz="1800" b="0" dirty="0">
+              <a:rPr lang="en-US" sz="2000" b="0" dirty="0">
                 <a:solidFill>
                   <a:srgbClr val="000000"/>
                 </a:solidFill>
@@ -43662,7 +43672,7 @@
               <a:t>(</a:t>
             </a:r>
             <a:r>
-              <a:rPr lang="en-US" sz="1800" b="0" dirty="0">
+              <a:rPr lang="en-US" sz="2000" b="0" dirty="0">
                 <a:solidFill>
                   <a:srgbClr val="A31515"/>
                 </a:solidFill>
@@ -43672,7 +43682,7 @@
               <a:t>'https://rest-</a:t>
             </a:r>
             <a:r>
-              <a:rPr lang="en-US" sz="1800" b="0" dirty="0" err="1">
+              <a:rPr lang="en-US" sz="2000" b="0" dirty="0" err="1">
                 <a:solidFill>
                   <a:srgbClr val="A31515"/>
                 </a:solidFill>
@@ -43682,7 +43692,7 @@
               <a:t>example.covey.town</a:t>
             </a:r>
             <a:r>
-              <a:rPr lang="en-US" sz="1800" dirty="0">
+              <a:rPr lang="en-US" sz="2000" dirty="0">
                 <a:solidFill>
                   <a:srgbClr val="A31515"/>
                 </a:solidFill>
@@ -43691,7 +43701,7 @@
               <a:t>’</a:t>
             </a:r>
             <a:r>
-              <a:rPr lang="en-US" sz="1800" b="0" dirty="0">
+              <a:rPr lang="en-US" sz="2000" b="0" dirty="0">
                 <a:solidFill>
                   <a:srgbClr val="000000"/>
                 </a:solidFill>
@@ -43709,7 +43719,7 @@
               <a:buNone/>
             </a:pPr>
             <a:r>
-              <a:rPr lang="en-US" sz="1800" dirty="0"/>
+              <a:rPr lang="en-US" sz="2000" dirty="0"/>
               <a:t>  to make an http request, or </a:t>
             </a:r>
           </a:p>
@@ -43721,7 +43731,7 @@
               <a:buNone/>
             </a:pPr>
             <a:r>
-              <a:rPr lang="en-US" sz="1800" b="0" dirty="0">
+              <a:rPr lang="en-US" sz="2000" b="0" dirty="0">
                 <a:solidFill>
                   <a:srgbClr val="267F99"/>
                 </a:solidFill>
@@ -43731,7 +43741,7 @@
               <a:t>	</a:t>
             </a:r>
             <a:r>
-              <a:rPr lang="en-US" sz="1800" b="0" dirty="0" err="1">
+              <a:rPr lang="en-US" sz="2000" b="0" dirty="0" err="1">
                 <a:solidFill>
                   <a:srgbClr val="267F99"/>
                 </a:solidFill>
@@ -43741,7 +43751,7 @@
               <a:t>fs</a:t>
             </a:r>
             <a:r>
-              <a:rPr lang="en-US" sz="1800" b="0" dirty="0" err="1">
+              <a:rPr lang="en-US" sz="2000" b="0" dirty="0" err="1">
                 <a:solidFill>
                   <a:srgbClr val="000000"/>
                 </a:solidFill>
@@ -43751,7 +43761,7 @@
               <a:t>.</a:t>
             </a:r>
             <a:r>
-              <a:rPr lang="en-US" sz="1800" b="0" dirty="0" err="1">
+              <a:rPr lang="en-US" sz="2000" b="0" dirty="0" err="1">
                 <a:solidFill>
                   <a:srgbClr val="795E26"/>
                 </a:solidFill>
@@ -43761,7 +43771,7 @@
               <a:t>readFile</a:t>
             </a:r>
             <a:r>
-              <a:rPr lang="en-US" sz="1800" b="0" dirty="0">
+              <a:rPr lang="en-US" sz="2000" b="0" dirty="0">
                 <a:solidFill>
                   <a:srgbClr val="000000"/>
                 </a:solidFill>
@@ -43771,7 +43781,7 @@
               <a:t>(</a:t>
             </a:r>
             <a:r>
-              <a:rPr lang="en-US" sz="1800" b="0" dirty="0">
+              <a:rPr lang="en-US" sz="2000" b="0" dirty="0">
                 <a:solidFill>
                   <a:srgbClr val="001080"/>
                 </a:solidFill>
@@ -43789,9 +43799,10 @@
               <a:buNone/>
             </a:pPr>
             <a:r>
-              <a:rPr lang="en-US" sz="1800" dirty="0"/>
+              <a:rPr lang="en-US" sz="2000" dirty="0"/>
               <a:t>  to read the contents of a file.</a:t>
             </a:r>
+            <a:endParaRPr lang="en-US" sz="1800" dirty="0"/>
           </a:p>
         </p:txBody>
       </p:sp>
@@ -43910,8 +43921,8 @@
         </p:blipFill>
         <p:spPr>
           <a:xfrm>
-            <a:off x="8610600" y="3879850"/>
-            <a:ext cx="2876117" cy="2476500"/>
+            <a:off x="8610600" y="4333760"/>
+            <a:ext cx="2560983" cy="2205152"/>
           </a:xfrm>
           <a:prstGeom prst="rect">
             <a:avLst/>
@@ -44135,7 +44146,12 @@
             <p:ph idx="1"/>
           </p:nvPr>
         </p:nvSpPr>
-        <p:spPr/>
+        <p:spPr>
+          <a:xfrm>
+            <a:off x="838200" y="1500160"/>
+            <a:ext cx="8812696" cy="4351338"/>
+          </a:xfrm>
+        </p:spPr>
         <p:txBody>
           <a:bodyPr>
             <a:normAutofit/>

--- a/Slides/Module 08 Concurrency.pptx
+++ b/Slides/Module 08 Concurrency.pptx
@@ -4515,7 +4515,7 @@
                 <a:tabLst/>
                 <a:defRPr/>
               </a:pPr>
-              <a:t>9/28/2026</a:t>
+              <a:t>9/29/2026</a:t>
             </a:fld>
             <a:endParaRPr kumimoji="0" lang="en-US" sz="1200" b="0" i="0" u="none" strike="noStrike" kern="1200" cap="none" spc="0" normalizeH="0" baseline="0" noProof="0">
               <a:ln>
@@ -4999,7 +4999,7 @@
                 <a:tabLst/>
                 <a:defRPr/>
               </a:pPr>
-              <a:t>9/28/2026</a:t>
+              <a:t>9/29/2026</a:t>
             </a:fld>
             <a:endParaRPr kumimoji="0" lang="en-US" sz="1200" b="0" i="0" u="none" strike="noStrike" kern="1200" cap="none" spc="0" normalizeH="0" baseline="0" noProof="0">
               <a:ln>
@@ -5357,7 +5357,7 @@
                 <a:tabLst/>
                 <a:defRPr/>
               </a:pPr>
-              <a:t>9/28/2026</a:t>
+              <a:t>9/29/2026</a:t>
             </a:fld>
             <a:endParaRPr kumimoji="0" lang="en-US" sz="1200" b="0" i="0" u="none" strike="noStrike" kern="1200" cap="none" spc="0" normalizeH="0" baseline="0" noProof="0">
               <a:ln>
@@ -5725,7 +5725,7 @@
                 <a:tabLst/>
                 <a:defRPr/>
               </a:pPr>
-              <a:t>9/28/2026</a:t>
+              <a:t>9/29/2026</a:t>
             </a:fld>
             <a:endParaRPr kumimoji="0" lang="en-US" sz="1200" b="0" i="0" u="none" strike="noStrike" kern="1200" cap="none" spc="0" normalizeH="0" baseline="0" noProof="0">
               <a:ln>
@@ -6695,7 +6695,7 @@
                 <a:tabLst/>
                 <a:defRPr/>
               </a:pPr>
-              <a:t>9/28/2026</a:t>
+              <a:t>9/29/2026</a:t>
             </a:fld>
             <a:endParaRPr kumimoji="0" lang="en-US" sz="1200" b="0" i="0" u="none" strike="noStrike" kern="1200" cap="none" spc="0" normalizeH="0" baseline="0" noProof="0">
               <a:ln>
@@ -7121,7 +7121,7 @@
                 <a:tabLst/>
                 <a:defRPr/>
               </a:pPr>
-              <a:t>9/28/2026</a:t>
+              <a:t>9/29/2026</a:t>
             </a:fld>
             <a:endParaRPr kumimoji="0" lang="en-US" sz="1200" b="0" i="0" u="none" strike="noStrike" kern="1200" cap="none" spc="0" normalizeH="0" baseline="0" noProof="0">
               <a:ln>
@@ -7485,7 +7485,7 @@
                 <a:tabLst/>
                 <a:defRPr/>
               </a:pPr>
-              <a:t>9/28/2026</a:t>
+              <a:t>9/29/2026</a:t>
             </a:fld>
             <a:endParaRPr kumimoji="0" lang="en-US" sz="1200" b="0" i="0" u="none" strike="noStrike" kern="1200" cap="none" spc="0" normalizeH="0" baseline="0" noProof="0">
               <a:ln>
@@ -8012,7 +8012,7 @@
                 <a:tabLst/>
                 <a:defRPr/>
               </a:pPr>
-              <a:t>9/28/2026</a:t>
+              <a:t>9/29/2026</a:t>
             </a:fld>
             <a:endParaRPr kumimoji="0" lang="en-US" sz="1200" b="0" i="0" u="none" strike="noStrike" kern="1200" cap="none" spc="0" normalizeH="0" baseline="0" noProof="0">
               <a:ln>
@@ -8473,7 +8473,7 @@
                 <a:tabLst/>
                 <a:defRPr/>
               </a:pPr>
-              <a:t>9/28/2026</a:t>
+              <a:t>9/29/2026</a:t>
             </a:fld>
             <a:endParaRPr kumimoji="0" lang="en-US" sz="1200" b="0" i="0" u="none" strike="noStrike" kern="1200" cap="none" spc="0" normalizeH="0" baseline="0" noProof="0">
               <a:ln>
@@ -9081,7 +9081,7 @@
                 <a:tabLst/>
                 <a:defRPr/>
               </a:pPr>
-              <a:t>9/28/2026</a:t>
+              <a:t>9/29/2026</a:t>
             </a:fld>
             <a:endParaRPr kumimoji="0" lang="en-US" sz="1200" b="0" i="0" u="none" strike="noStrike" kern="1200" cap="none" spc="0" normalizeH="0" baseline="0" noProof="0">
               <a:ln>
@@ -9354,7 +9354,7 @@
                 <a:tabLst/>
                 <a:defRPr/>
               </a:pPr>
-              <a:t>9/28/2026</a:t>
+              <a:t>9/29/2026</a:t>
             </a:fld>
             <a:endParaRPr kumimoji="0" lang="en-US" sz="1200" b="0" i="0" u="none" strike="noStrike" kern="1200" cap="none" spc="0" normalizeH="0" baseline="0" noProof="0">
               <a:ln>
@@ -9825,7 +9825,7 @@
                 <a:tabLst/>
                 <a:defRPr/>
               </a:pPr>
-              <a:t>9/28/2026</a:t>
+              <a:t>9/29/2026</a:t>
             </a:fld>
             <a:endParaRPr kumimoji="0" lang="en-US" sz="1200" b="0" i="0" u="none" strike="noStrike" kern="1200" cap="none" spc="0" normalizeH="0" baseline="0" noProof="0">
               <a:ln>
@@ -10226,7 +10226,7 @@
                 <a:tabLst/>
                 <a:defRPr/>
               </a:pPr>
-              <a:t>9/28/2026</a:t>
+              <a:t>9/29/2026</a:t>
             </a:fld>
             <a:endParaRPr kumimoji="0" lang="en-US" sz="1200" b="0" i="0" u="none" strike="noStrike" kern="1200" cap="none" spc="0" normalizeH="0" baseline="0" noProof="0">
               <a:ln>
@@ -17905,7 +17905,7 @@
         </p:nvSpPr>
         <p:spPr>
           <a:xfrm>
-            <a:off x="9704965" y="3391944"/>
+            <a:off x="4649570" y="3360619"/>
             <a:ext cx="1910079" cy="200407"/>
           </a:xfrm>
           <a:prstGeom prst="roundRect">
@@ -18942,7 +18942,7 @@
                             </p:stCondLst>
                             <p:childTnLst>
                               <p:par>
-                                <p:cTn id="41" presetID="2" presetClass="entr" presetSubtype="8" fill="hold" grpId="1" nodeType="clickEffect">
+                                <p:cTn id="41" presetID="2" presetClass="entr" presetSubtype="1" fill="hold" grpId="1" nodeType="clickEffect">
                                   <p:stCondLst>
                                     <p:cond delay="0"/>
                                   </p:stCondLst>
@@ -18967,7 +18967,7 @@
                                     </p:set>
                                     <p:anim calcmode="lin" valueType="num">
                                       <p:cBhvr additive="base">
-                                        <p:cTn id="43" dur="500" fill="hold"/>
+                                        <p:cTn id="43" dur="1000" fill="hold"/>
                                         <p:tgtEl>
                                           <p:spTgt spid="12"/>
                                         </p:tgtEl>
@@ -18978,7 +18978,7 @@
                                       <p:tavLst>
                                         <p:tav tm="0">
                                           <p:val>
-                                            <p:strVal val="0-#ppt_w/2"/>
+                                            <p:strVal val="#ppt_x"/>
                                           </p:val>
                                         </p:tav>
                                         <p:tav tm="100000">
@@ -18990,7 +18990,7 @@
                                     </p:anim>
                                     <p:anim calcmode="lin" valueType="num">
                                       <p:cBhvr additive="base">
-                                        <p:cTn id="44" dur="500" fill="hold"/>
+                                        <p:cTn id="44" dur="1000" fill="hold"/>
                                         <p:tgtEl>
                                           <p:spTgt spid="12"/>
                                         </p:tgtEl>
@@ -19001,7 +19001,7 @@
                                       <p:tavLst>
                                         <p:tav tm="0">
                                           <p:val>
-                                            <p:strVal val="#ppt_y"/>
+                                            <p:strVal val="0-#ppt_h/2"/>
                                           </p:val>
                                         </p:tav>
                                         <p:tav tm="100000">
@@ -19033,14 +19033,54 @@
                             </p:stCondLst>
                             <p:childTnLst>
                               <p:par>
-                                <p:cTn id="47" presetID="2" presetClass="entr" presetSubtype="2" fill="hold" grpId="0" nodeType="clickEffect">
+                                <p:cTn id="47" presetID="63" presetClass="path" presetSubtype="0" accel="50000" decel="50000" fill="hold" grpId="2" nodeType="clickEffect">
+                                  <p:stCondLst>
+                                    <p:cond delay="0"/>
+                                  </p:stCondLst>
+                                  <p:childTnLst>
+                                    <p:animMotion origin="layout" path="M 4.58333E-6 3.7037E-7 L 0.41471 -0.00463 " pathEditMode="relative" rAng="0" ptsTypes="AA">
+                                      <p:cBhvr>
+                                        <p:cTn id="48" dur="2000" fill="hold"/>
+                                        <p:tgtEl>
+                                          <p:spTgt spid="12"/>
+                                        </p:tgtEl>
+                                        <p:attrNameLst>
+                                          <p:attrName>ppt_x</p:attrName>
+                                          <p:attrName>ppt_y</p:attrName>
+                                        </p:attrNameLst>
+                                      </p:cBhvr>
+                                      <p:rCtr x="20729" y="-231"/>
+                                    </p:animMotion>
+                                  </p:childTnLst>
+                                </p:cTn>
+                              </p:par>
+                            </p:childTnLst>
+                          </p:cTn>
+                        </p:par>
+                      </p:childTnLst>
+                    </p:cTn>
+                  </p:par>
+                  <p:par>
+                    <p:cTn id="49" fill="hold">
+                      <p:stCondLst>
+                        <p:cond delay="indefinite"/>
+                      </p:stCondLst>
+                      <p:childTnLst>
+                        <p:par>
+                          <p:cTn id="50" fill="hold">
+                            <p:stCondLst>
+                              <p:cond delay="0"/>
+                            </p:stCondLst>
+                            <p:childTnLst>
+                              <p:par>
+                                <p:cTn id="51" presetID="2" presetClass="entr" presetSubtype="2" fill="hold" grpId="0" nodeType="clickEffect">
                                   <p:stCondLst>
                                     <p:cond delay="0"/>
                                   </p:stCondLst>
                                   <p:childTnLst>
                                     <p:set>
                                       <p:cBhvr>
-                                        <p:cTn id="48" dur="1" fill="hold">
+                                        <p:cTn id="52" dur="1" fill="hold">
                                           <p:stCondLst>
                                             <p:cond delay="0"/>
                                           </p:stCondLst>
@@ -19058,7 +19098,7 @@
                                     </p:set>
                                     <p:anim calcmode="lin" valueType="num">
                                       <p:cBhvr additive="base">
-                                        <p:cTn id="49" dur="500" fill="hold"/>
+                                        <p:cTn id="53" dur="500" fill="hold"/>
                                         <p:tgtEl>
                                           <p:spTgt spid="15"/>
                                         </p:tgtEl>
@@ -19081,7 +19121,7 @@
                                     </p:anim>
                                     <p:anim calcmode="lin" valueType="num">
                                       <p:cBhvr additive="base">
-                                        <p:cTn id="50" dur="500" fill="hold"/>
+                                        <p:cTn id="54" dur="500" fill="hold"/>
                                         <p:tgtEl>
                                           <p:spTgt spid="15"/>
                                         </p:tgtEl>
@@ -19112,26 +19152,26 @@
                     </p:cTn>
                   </p:par>
                   <p:par>
-                    <p:cTn id="51" fill="hold">
+                    <p:cTn id="55" fill="hold">
                       <p:stCondLst>
                         <p:cond delay="indefinite"/>
                       </p:stCondLst>
                       <p:childTnLst>
                         <p:par>
-                          <p:cTn id="52" fill="hold">
+                          <p:cTn id="56" fill="hold">
                             <p:stCondLst>
                               <p:cond delay="0"/>
                             </p:stCondLst>
                             <p:childTnLst>
                               <p:par>
-                                <p:cTn id="53" presetID="2" presetClass="exit" presetSubtype="1" fill="hold" grpId="1" nodeType="clickEffect">
+                                <p:cTn id="57" presetID="2" presetClass="exit" presetSubtype="1" fill="hold" grpId="1" nodeType="clickEffect">
                                   <p:stCondLst>
                                     <p:cond delay="0"/>
                                   </p:stCondLst>
                                   <p:childTnLst>
                                     <p:anim calcmode="lin" valueType="num">
                                       <p:cBhvr additive="base">
-                                        <p:cTn id="54" dur="1000"/>
+                                        <p:cTn id="58" dur="1000"/>
                                         <p:tgtEl>
                                           <p:spTgt spid="10"/>
                                         </p:tgtEl>
@@ -19154,7 +19194,7 @@
                                     </p:anim>
                                     <p:anim calcmode="lin" valueType="num">
                                       <p:cBhvr additive="base">
-                                        <p:cTn id="55" dur="1000"/>
+                                        <p:cTn id="59" dur="1000"/>
                                         <p:tgtEl>
                                           <p:spTgt spid="10"/>
                                         </p:tgtEl>
@@ -19177,7 +19217,7 @@
                                     </p:anim>
                                     <p:set>
                                       <p:cBhvr>
-                                        <p:cTn id="56" dur="1" fill="hold">
+                                        <p:cTn id="60" dur="1" fill="hold">
                                           <p:stCondLst>
                                             <p:cond delay="999"/>
                                           </p:stCondLst>
@@ -19203,61 +19243,26 @@
                     </p:cTn>
                   </p:par>
                   <p:par>
-                    <p:cTn id="57" fill="hold">
+                    <p:cTn id="61" fill="hold">
                       <p:stCondLst>
                         <p:cond delay="indefinite"/>
                       </p:stCondLst>
                       <p:childTnLst>
                         <p:par>
-                          <p:cTn id="58" fill="hold">
+                          <p:cTn id="62" fill="hold">
                             <p:stCondLst>
                               <p:cond delay="0"/>
                             </p:stCondLst>
                             <p:childTnLst>
                               <p:par>
-                                <p:cTn id="59" presetID="10" presetClass="exit" presetSubtype="0" fill="hold" grpId="0" nodeType="clickEffect">
-                                  <p:stCondLst>
-                                    <p:cond delay="0"/>
-                                  </p:stCondLst>
-                                  <p:childTnLst>
-                                    <p:animEffect transition="out" filter="fade">
-                                      <p:cBhvr>
-                                        <p:cTn id="60" dur="500"/>
-                                        <p:tgtEl>
-                                          <p:spTgt spid="12"/>
-                                        </p:tgtEl>
-                                      </p:cBhvr>
-                                    </p:animEffect>
-                                    <p:set>
-                                      <p:cBhvr>
-                                        <p:cTn id="61" dur="1" fill="hold">
-                                          <p:stCondLst>
-                                            <p:cond delay="499"/>
-                                          </p:stCondLst>
-                                        </p:cTn>
-                                        <p:tgtEl>
-                                          <p:spTgt spid="12"/>
-                                        </p:tgtEl>
-                                        <p:attrNameLst>
-                                          <p:attrName>style.visibility</p:attrName>
-                                        </p:attrNameLst>
-                                      </p:cBhvr>
-                                      <p:to>
-                                        <p:strVal val="hidden"/>
-                                      </p:to>
-                                    </p:set>
-                                  </p:childTnLst>
-                                </p:cTn>
-                              </p:par>
-                              <p:par>
-                                <p:cTn id="62" presetID="1" presetClass="entr" presetSubtype="0" fill="hold" grpId="0" nodeType="withEffect">
+                                <p:cTn id="63" presetID="1" presetClass="entr" presetSubtype="0" fill="hold" grpId="0" nodeType="clickEffect">
                                   <p:stCondLst>
                                     <p:cond delay="0"/>
                                   </p:stCondLst>
                                   <p:childTnLst>
                                     <p:set>
                                       <p:cBhvr>
-                                        <p:cTn id="63" dur="1" fill="hold">
+                                        <p:cTn id="64" dur="1" fill="hold">
                                           <p:stCondLst>
                                             <p:cond delay="0"/>
                                           </p:stCondLst>
@@ -19276,6 +19281,41 @@
                                   </p:childTnLst>
                                 </p:cTn>
                               </p:par>
+                              <p:par>
+                                <p:cTn id="65" presetID="10" presetClass="exit" presetSubtype="0" fill="hold" grpId="0" nodeType="withEffect">
+                                  <p:stCondLst>
+                                    <p:cond delay="0"/>
+                                  </p:stCondLst>
+                                  <p:childTnLst>
+                                    <p:animEffect transition="out" filter="fade">
+                                      <p:cBhvr>
+                                        <p:cTn id="66" dur="1000"/>
+                                        <p:tgtEl>
+                                          <p:spTgt spid="12"/>
+                                        </p:tgtEl>
+                                      </p:cBhvr>
+                                    </p:animEffect>
+                                    <p:set>
+                                      <p:cBhvr>
+                                        <p:cTn id="67" dur="1" fill="hold">
+                                          <p:stCondLst>
+                                            <p:cond delay="999"/>
+                                          </p:stCondLst>
+                                        </p:cTn>
+                                        <p:tgtEl>
+                                          <p:spTgt spid="12"/>
+                                        </p:tgtEl>
+                                        <p:attrNameLst>
+                                          <p:attrName>style.visibility</p:attrName>
+                                        </p:attrNameLst>
+                                      </p:cBhvr>
+                                      <p:to>
+                                        <p:strVal val="hidden"/>
+                                      </p:to>
+                                    </p:set>
+                                  </p:childTnLst>
+                                </p:cTn>
+                              </p:par>
                             </p:childTnLst>
                           </p:cTn>
                         </p:par>
@@ -19283,26 +19323,26 @@
                     </p:cTn>
                   </p:par>
                   <p:par>
-                    <p:cTn id="64" fill="hold">
+                    <p:cTn id="68" fill="hold">
                       <p:stCondLst>
                         <p:cond delay="indefinite"/>
                       </p:stCondLst>
                       <p:childTnLst>
                         <p:par>
-                          <p:cTn id="65" fill="hold">
+                          <p:cTn id="69" fill="hold">
                             <p:stCondLst>
                               <p:cond delay="0"/>
                             </p:stCondLst>
                             <p:childTnLst>
                               <p:par>
-                                <p:cTn id="66" presetID="2" presetClass="entr" presetSubtype="1" fill="hold" grpId="0" nodeType="clickEffect">
+                                <p:cTn id="70" presetID="2" presetClass="entr" presetSubtype="1" fill="hold" grpId="0" nodeType="clickEffect">
                                   <p:stCondLst>
                                     <p:cond delay="0"/>
                                   </p:stCondLst>
                                   <p:childTnLst>
                                     <p:set>
                                       <p:cBhvr>
-                                        <p:cTn id="67" dur="1" fill="hold">
+                                        <p:cTn id="71" dur="1" fill="hold">
                                           <p:stCondLst>
                                             <p:cond delay="0"/>
                                           </p:stCondLst>
@@ -19320,7 +19360,7 @@
                                     </p:set>
                                     <p:anim calcmode="lin" valueType="num">
                                       <p:cBhvr additive="base">
-                                        <p:cTn id="68" dur="500" fill="hold"/>
+                                        <p:cTn id="72" dur="500" fill="hold"/>
                                         <p:tgtEl>
                                           <p:spTgt spid="7"/>
                                         </p:tgtEl>
@@ -19343,7 +19383,7 @@
                                     </p:anim>
                                     <p:anim calcmode="lin" valueType="num">
                                       <p:cBhvr additive="base">
-                                        <p:cTn id="69" dur="500" fill="hold"/>
+                                        <p:cTn id="73" dur="500" fill="hold"/>
                                         <p:tgtEl>
                                           <p:spTgt spid="7"/>
                                         </p:tgtEl>
@@ -19374,26 +19414,26 @@
                     </p:cTn>
                   </p:par>
                   <p:par>
-                    <p:cTn id="70" fill="hold">
+                    <p:cTn id="74" fill="hold">
                       <p:stCondLst>
                         <p:cond delay="indefinite"/>
                       </p:stCondLst>
                       <p:childTnLst>
                         <p:par>
-                          <p:cTn id="71" fill="hold">
+                          <p:cTn id="75" fill="hold">
                             <p:stCondLst>
                               <p:cond delay="0"/>
                             </p:stCondLst>
                             <p:childTnLst>
                               <p:par>
-                                <p:cTn id="72" presetID="2" presetClass="exit" presetSubtype="1" fill="hold" grpId="1" nodeType="clickEffect">
+                                <p:cTn id="76" presetID="2" presetClass="exit" presetSubtype="1" fill="hold" grpId="1" nodeType="clickEffect">
                                   <p:stCondLst>
                                     <p:cond delay="0"/>
                                   </p:stCondLst>
                                   <p:childTnLst>
                                     <p:anim calcmode="lin" valueType="num">
                                       <p:cBhvr additive="base">
-                                        <p:cTn id="73" dur="500"/>
+                                        <p:cTn id="77" dur="500"/>
                                         <p:tgtEl>
                                           <p:spTgt spid="7"/>
                                         </p:tgtEl>
@@ -19416,7 +19456,7 @@
                                     </p:anim>
                                     <p:anim calcmode="lin" valueType="num">
                                       <p:cBhvr additive="base">
-                                        <p:cTn id="74" dur="500"/>
+                                        <p:cTn id="78" dur="500"/>
                                         <p:tgtEl>
                                           <p:spTgt spid="7"/>
                                         </p:tgtEl>
@@ -19439,58 +19479,13 @@
                                     </p:anim>
                                     <p:set>
                                       <p:cBhvr>
-                                        <p:cTn id="75" dur="1" fill="hold">
+                                        <p:cTn id="79" dur="1" fill="hold">
                                           <p:stCondLst>
                                             <p:cond delay="499"/>
                                           </p:stCondLst>
                                         </p:cTn>
                                         <p:tgtEl>
                                           <p:spTgt spid="7"/>
-                                        </p:tgtEl>
-                                        <p:attrNameLst>
-                                          <p:attrName>style.visibility</p:attrName>
-                                        </p:attrNameLst>
-                                      </p:cBhvr>
-                                      <p:to>
-                                        <p:strVal val="hidden"/>
-                                      </p:to>
-                                    </p:set>
-                                  </p:childTnLst>
-                                </p:cTn>
-                              </p:par>
-                            </p:childTnLst>
-                          </p:cTn>
-                        </p:par>
-                      </p:childTnLst>
-                    </p:cTn>
-                  </p:par>
-                  <p:par>
-                    <p:cTn id="76" fill="hold">
-                      <p:stCondLst>
-                        <p:cond delay="indefinite"/>
-                      </p:stCondLst>
-                      <p:childTnLst>
-                        <p:par>
-                          <p:cTn id="77" fill="hold">
-                            <p:stCondLst>
-                              <p:cond delay="0"/>
-                            </p:stCondLst>
-                            <p:childTnLst>
-                              <p:par>
-                                <p:cTn id="78" presetID="1" presetClass="exit" presetSubtype="0" fill="hold" grpId="1" nodeType="clickEffect">
-                                  <p:stCondLst>
-                                    <p:cond delay="0"/>
-                                  </p:stCondLst>
-                                  <p:childTnLst>
-                                    <p:set>
-                                      <p:cBhvr>
-                                        <p:cTn id="79" dur="1" fill="hold">
-                                          <p:stCondLst>
-                                            <p:cond delay="0"/>
-                                          </p:stCondLst>
-                                        </p:cTn>
-                                        <p:tgtEl>
-                                          <p:spTgt spid="8"/>
                                         </p:tgtEl>
                                         <p:attrNameLst>
                                           <p:attrName>style.visibility</p:attrName>
@@ -19522,7 +19517,7 @@
                             </p:stCondLst>
                             <p:childTnLst>
                               <p:par>
-                                <p:cTn id="82" presetID="1" presetClass="entr" presetSubtype="0" fill="hold" grpId="0" nodeType="clickEffect">
+                                <p:cTn id="82" presetID="1" presetClass="exit" presetSubtype="0" fill="hold" grpId="1" nodeType="clickEffect">
                                   <p:stCondLst>
                                     <p:cond delay="0"/>
                                   </p:stCondLst>
@@ -19530,6 +19525,51 @@
                                     <p:set>
                                       <p:cBhvr>
                                         <p:cTn id="83" dur="1" fill="hold">
+                                          <p:stCondLst>
+                                            <p:cond delay="0"/>
+                                          </p:stCondLst>
+                                        </p:cTn>
+                                        <p:tgtEl>
+                                          <p:spTgt spid="8"/>
+                                        </p:tgtEl>
+                                        <p:attrNameLst>
+                                          <p:attrName>style.visibility</p:attrName>
+                                        </p:attrNameLst>
+                                      </p:cBhvr>
+                                      <p:to>
+                                        <p:strVal val="hidden"/>
+                                      </p:to>
+                                    </p:set>
+                                  </p:childTnLst>
+                                </p:cTn>
+                              </p:par>
+                            </p:childTnLst>
+                          </p:cTn>
+                        </p:par>
+                      </p:childTnLst>
+                    </p:cTn>
+                  </p:par>
+                  <p:par>
+                    <p:cTn id="84" fill="hold">
+                      <p:stCondLst>
+                        <p:cond delay="indefinite"/>
+                      </p:stCondLst>
+                      <p:childTnLst>
+                        <p:par>
+                          <p:cTn id="85" fill="hold">
+                            <p:stCondLst>
+                              <p:cond delay="0"/>
+                            </p:stCondLst>
+                            <p:childTnLst>
+                              <p:par>
+                                <p:cTn id="86" presetID="1" presetClass="entr" presetSubtype="0" fill="hold" grpId="0" nodeType="clickEffect">
+                                  <p:stCondLst>
+                                    <p:cond delay="0"/>
+                                  </p:stCondLst>
+                                  <p:childTnLst>
+                                    <p:set>
+                                      <p:cBhvr>
+                                        <p:cTn id="87" dur="1" fill="hold">
                                           <p:stCondLst>
                                             <p:cond delay="0"/>
                                           </p:stCondLst>
@@ -19586,6 +19626,7 @@
       <p:bldP spid="11" grpId="1" animBg="1"/>
       <p:bldP spid="12" grpId="0" animBg="1"/>
       <p:bldP spid="12" grpId="1" animBg="1"/>
+      <p:bldP spid="12" grpId="2" animBg="1"/>
       <p:bldP spid="14" grpId="0" animBg="1"/>
       <p:bldP spid="15" grpId="0" animBg="1"/>
       <p:bldP spid="7" grpId="0" animBg="1"/>
@@ -28228,7 +28269,7 @@
         <p:spPr>
           <a:xfrm>
             <a:off x="376990" y="1528172"/>
-            <a:ext cx="9285371" cy="4805290"/>
+            <a:ext cx="9285371" cy="4662110"/>
           </a:xfrm>
           <a:prstGeom prst="rect">
             <a:avLst/>
@@ -28374,13 +28415,46 @@
               </a:lnSpc>
               <a:buNone/>
             </a:pPr>
-            <a:endParaRPr lang="en-US" sz="1600" b="0" dirty="0">
-              <a:solidFill>
-                <a:srgbClr val="000000"/>
-              </a:solidFill>
-              <a:effectLst/>
-              <a:latin typeface="Consolas" panose="020B0609020204030204" pitchFamily="49" charset="0"/>
-            </a:endParaRPr>
+            <a:r>
+              <a:rPr lang="en-US" sz="2000" b="0" dirty="0">
+                <a:solidFill>
+                  <a:srgbClr val="0000FF"/>
+                </a:solidFill>
+                <a:effectLst/>
+                <a:latin typeface="Consolas" panose="020B0609020204030204" pitchFamily="49" charset="0"/>
+              </a:rPr>
+              <a:t>async</a:t>
+            </a:r>
+            <a:r>
+              <a:rPr lang="en-US" sz="2000" b="0" dirty="0">
+                <a:solidFill>
+                  <a:srgbClr val="000000"/>
+                </a:solidFill>
+                <a:effectLst/>
+                <a:latin typeface="Consolas" panose="020B0609020204030204" pitchFamily="49" charset="0"/>
+              </a:rPr>
+              <a:t> </a:t>
+            </a:r>
+            <a:r>
+              <a:rPr lang="en-US" sz="2000" b="0" dirty="0">
+                <a:solidFill>
+                  <a:srgbClr val="0000FF"/>
+                </a:solidFill>
+                <a:effectLst/>
+                <a:latin typeface="Consolas" panose="020B0609020204030204" pitchFamily="49" charset="0"/>
+              </a:rPr>
+              <a:t>function</a:t>
+            </a:r>
+            <a:r>
+              <a:rPr lang="en-US" sz="2000" b="0" dirty="0">
+                <a:solidFill>
+                  <a:srgbClr val="000000"/>
+                </a:solidFill>
+                <a:effectLst/>
+                <a:latin typeface="Consolas" panose="020B0609020204030204" pitchFamily="49" charset="0"/>
+              </a:rPr>
+              <a:t> main() {</a:t>
+            </a:r>
           </a:p>
           <a:p>
             <a:pPr algn="l">
@@ -28390,42 +28464,35 @@
               <a:buNone/>
             </a:pPr>
             <a:r>
-              <a:rPr lang="en-US" sz="1600" b="0" dirty="0">
-                <a:solidFill>
-                  <a:srgbClr val="008000"/>
-                </a:solidFill>
-                <a:effectLst/>
-                <a:latin typeface="Consolas" panose="020B0609020204030204" pitchFamily="49" charset="0"/>
-              </a:rPr>
-              <a:t>// Since </a:t>
-            </a:r>
-            <a:r>
-              <a:rPr lang="en-US" sz="1600" b="0" dirty="0" err="1">
-                <a:solidFill>
-                  <a:srgbClr val="008000"/>
-                </a:solidFill>
-                <a:effectLst/>
-                <a:latin typeface="Consolas" panose="020B0609020204030204" pitchFamily="49" charset="0"/>
-              </a:rPr>
-              <a:t>realRequest</a:t>
-            </a:r>
-            <a:r>
-              <a:rPr lang="en-US" sz="1600" b="0" dirty="0">
-                <a:solidFill>
-                  <a:srgbClr val="008000"/>
-                </a:solidFill>
-                <a:effectLst/>
-                <a:latin typeface="Consolas" panose="020B0609020204030204" pitchFamily="49" charset="0"/>
-              </a:rPr>
-              <a:t> takes a variable amount of time, the results may return</a:t>
-            </a:r>
-            <a:endParaRPr lang="en-US" sz="1600" b="0" dirty="0">
-              <a:solidFill>
-                <a:srgbClr val="000000"/>
-              </a:solidFill>
-              <a:effectLst/>
-              <a:latin typeface="Consolas" panose="020B0609020204030204" pitchFamily="49" charset="0"/>
-            </a:endParaRPr>
+              <a:rPr lang="en-US" sz="2000" b="0" dirty="0">
+                <a:solidFill>
+                  <a:srgbClr val="000000"/>
+                </a:solidFill>
+                <a:effectLst/>
+                <a:latin typeface="Consolas" panose="020B0609020204030204" pitchFamily="49" charset="0"/>
+              </a:rPr>
+              <a:t>  console.log(</a:t>
+            </a:r>
+            <a:r>
+              <a:rPr lang="en-US" sz="2000" b="0" dirty="0">
+                <a:solidFill>
+                  <a:srgbClr val="A31515"/>
+                </a:solidFill>
+                <a:effectLst/>
+                <a:latin typeface="Consolas" panose="020B0609020204030204" pitchFamily="49" charset="0"/>
+              </a:rPr>
+              <a:t>'starting main'</a:t>
+            </a:r>
+            <a:r>
+              <a:rPr lang="en-US" sz="2000" b="0" dirty="0">
+                <a:solidFill>
+                  <a:srgbClr val="000000"/>
+                </a:solidFill>
+                <a:effectLst/>
+                <a:latin typeface="Consolas" panose="020B0609020204030204" pitchFamily="49" charset="0"/>
+              </a:rPr>
+              <a:t>);</a:t>
+            </a:r>
           </a:p>
           <a:p>
             <a:pPr algn="l">
@@ -28435,22 +28502,75 @@
               <a:buNone/>
             </a:pPr>
             <a:r>
-              <a:rPr lang="en-US" sz="1600" b="0" dirty="0">
-                <a:solidFill>
-                  <a:srgbClr val="008000"/>
-                </a:solidFill>
-                <a:effectLst/>
-                <a:latin typeface="Consolas" panose="020B0609020204030204" pitchFamily="49" charset="0"/>
-              </a:rPr>
-              <a:t>// out of order.</a:t>
-            </a:r>
-            <a:endParaRPr lang="en-US" sz="1600" b="0" dirty="0">
-              <a:solidFill>
-                <a:srgbClr val="000000"/>
-              </a:solidFill>
-              <a:effectLst/>
-              <a:latin typeface="Consolas" panose="020B0609020204030204" pitchFamily="49" charset="0"/>
-            </a:endParaRPr>
+              <a:rPr lang="en-US" sz="2000" b="0" dirty="0">
+                <a:solidFill>
+                  <a:srgbClr val="000000"/>
+                </a:solidFill>
+                <a:effectLst/>
+                <a:latin typeface="Consolas" panose="020B0609020204030204" pitchFamily="49" charset="0"/>
+              </a:rPr>
+              <a:t>  </a:t>
+            </a:r>
+            <a:r>
+              <a:rPr lang="en-US" sz="2000" b="0" dirty="0">
+                <a:solidFill>
+                  <a:srgbClr val="0000FF"/>
+                </a:solidFill>
+                <a:effectLst/>
+                <a:latin typeface="Consolas" panose="020B0609020204030204" pitchFamily="49" charset="0"/>
+              </a:rPr>
+              <a:t>const</a:t>
+            </a:r>
+            <a:r>
+              <a:rPr lang="en-US" sz="2000" b="0" dirty="0">
+                <a:solidFill>
+                  <a:srgbClr val="000000"/>
+                </a:solidFill>
+                <a:effectLst/>
+                <a:latin typeface="Consolas" panose="020B0609020204030204" pitchFamily="49" charset="0"/>
+              </a:rPr>
+              <a:t> promises = [</a:t>
+            </a:r>
+            <a:r>
+              <a:rPr lang="en-US" sz="2000" b="0" dirty="0" err="1">
+                <a:solidFill>
+                  <a:srgbClr val="000000"/>
+                </a:solidFill>
+                <a:effectLst/>
+                <a:latin typeface="Consolas" panose="020B0609020204030204" pitchFamily="49" charset="0"/>
+              </a:rPr>
+              <a:t>realRequest</a:t>
+            </a:r>
+            <a:r>
+              <a:rPr lang="en-US" sz="2000" b="0" dirty="0">
+                <a:solidFill>
+                  <a:srgbClr val="000000"/>
+                </a:solidFill>
+                <a:effectLst/>
+                <a:latin typeface="Consolas" panose="020B0609020204030204" pitchFamily="49" charset="0"/>
+              </a:rPr>
+              <a:t>(</a:t>
+            </a:r>
+            <a:r>
+              <a:rPr lang="en-US" sz="2000" b="0" dirty="0">
+                <a:solidFill>
+                  <a:srgbClr val="098658"/>
+                </a:solidFill>
+                <a:effectLst/>
+                <a:latin typeface="Consolas" panose="020B0609020204030204" pitchFamily="49" charset="0"/>
+              </a:rPr>
+              <a:t>1</a:t>
+            </a:r>
+            <a:r>
+              <a:rPr lang="en-US" sz="2000" b="0" dirty="0">
+                <a:solidFill>
+                  <a:srgbClr val="000000"/>
+                </a:solidFill>
+                <a:effectLst/>
+                <a:latin typeface="Consolas" panose="020B0609020204030204" pitchFamily="49" charset="0"/>
+              </a:rPr>
+              <a:t>), </a:t>
+            </a:r>
           </a:p>
           <a:p>
             <a:pPr algn="l">
@@ -28460,44 +28580,53 @@
               <a:buNone/>
             </a:pPr>
             <a:r>
-              <a:rPr lang="en-US" sz="1600" b="0" dirty="0">
-                <a:solidFill>
-                  <a:srgbClr val="0000FF"/>
-                </a:solidFill>
-                <a:effectLst/>
-                <a:latin typeface="Consolas" panose="020B0609020204030204" pitchFamily="49" charset="0"/>
-              </a:rPr>
-              <a:t>async</a:t>
-            </a:r>
-            <a:r>
-              <a:rPr lang="en-US" sz="1600" b="0" dirty="0">
+              <a:rPr lang="en-US" sz="2000" dirty="0">
                 <a:solidFill>
                   <a:srgbClr val="000000"/>
                 </a:solidFill>
-                <a:effectLst/>
-                <a:latin typeface="Consolas" panose="020B0609020204030204" pitchFamily="49" charset="0"/>
-              </a:rPr>
-              <a:t> </a:t>
-            </a:r>
-            <a:r>
-              <a:rPr lang="en-US" sz="1600" b="0" dirty="0">
-                <a:solidFill>
-                  <a:srgbClr val="0000FF"/>
-                </a:solidFill>
-                <a:effectLst/>
-                <a:latin typeface="Consolas" panose="020B0609020204030204" pitchFamily="49" charset="0"/>
-              </a:rPr>
-              <a:t>function</a:t>
-            </a:r>
-            <a:r>
-              <a:rPr lang="en-US" sz="1600" b="0" dirty="0">
+                <a:latin typeface="Consolas" panose="020B0609020204030204" pitchFamily="49" charset="0"/>
+              </a:rPr>
+              <a:t>                    </a:t>
+            </a:r>
+            <a:r>
+              <a:rPr lang="en-US" sz="2000" b="0" dirty="0" err="1">
                 <a:solidFill>
                   <a:srgbClr val="000000"/>
                 </a:solidFill>
                 <a:effectLst/>
                 <a:latin typeface="Consolas" panose="020B0609020204030204" pitchFamily="49" charset="0"/>
               </a:rPr>
-              <a:t> main() {</a:t>
+              <a:t>realRequest</a:t>
+            </a:r>
+            <a:r>
+              <a:rPr lang="en-US" sz="2000" b="0" dirty="0">
+                <a:solidFill>
+                  <a:srgbClr val="000000"/>
+                </a:solidFill>
+                <a:effectLst/>
+                <a:latin typeface="Consolas" panose="020B0609020204030204" pitchFamily="49" charset="0"/>
+              </a:rPr>
+              <a:t>(</a:t>
+            </a:r>
+            <a:r>
+              <a:rPr lang="en-US" sz="2000" b="0" dirty="0">
+                <a:solidFill>
+                  <a:srgbClr val="098658"/>
+                </a:solidFill>
+                <a:effectLst/>
+                <a:latin typeface="Consolas" panose="020B0609020204030204" pitchFamily="49" charset="0"/>
+              </a:rPr>
+              <a:t>2</a:t>
+            </a:r>
+            <a:r>
+              <a:rPr lang="en-US" sz="2000" b="0" dirty="0">
+                <a:solidFill>
+                  <a:srgbClr val="000000"/>
+                </a:solidFill>
+                <a:effectLst/>
+                <a:latin typeface="Consolas" panose="020B0609020204030204" pitchFamily="49" charset="0"/>
+              </a:rPr>
+              <a:t>),</a:t>
             </a:r>
           </a:p>
           <a:p>
@@ -28508,34 +28637,63 @@
               <a:buNone/>
             </a:pPr>
             <a:r>
-              <a:rPr lang="en-US" sz="1600" b="0" dirty="0">
+              <a:rPr lang="en-US" sz="2000" dirty="0">
                 <a:solidFill>
                   <a:srgbClr val="000000"/>
                 </a:solidFill>
-                <a:effectLst/>
-                <a:latin typeface="Consolas" panose="020B0609020204030204" pitchFamily="49" charset="0"/>
-              </a:rPr>
-              <a:t>  console.log(</a:t>
-            </a:r>
-            <a:r>
-              <a:rPr lang="en-US" sz="1600" b="0" dirty="0">
-                <a:solidFill>
-                  <a:srgbClr val="A31515"/>
-                </a:solidFill>
-                <a:effectLst/>
-                <a:latin typeface="Consolas" panose="020B0609020204030204" pitchFamily="49" charset="0"/>
-              </a:rPr>
-              <a:t>'starting main'</a:t>
-            </a:r>
-            <a:r>
-              <a:rPr lang="en-US" sz="1600" b="0" dirty="0">
+                <a:latin typeface="Consolas" panose="020B0609020204030204" pitchFamily="49" charset="0"/>
+              </a:rPr>
+              <a:t>                   </a:t>
+            </a:r>
+            <a:r>
+              <a:rPr lang="en-US" sz="2000" b="0" dirty="0">
                 <a:solidFill>
                   <a:srgbClr val="000000"/>
                 </a:solidFill>
                 <a:effectLst/>
                 <a:latin typeface="Consolas" panose="020B0609020204030204" pitchFamily="49" charset="0"/>
               </a:rPr>
-              <a:t>);</a:t>
+              <a:t> </a:t>
+            </a:r>
+            <a:r>
+              <a:rPr lang="en-US" sz="2000" b="0" dirty="0" err="1">
+                <a:solidFill>
+                  <a:srgbClr val="000000"/>
+                </a:solidFill>
+                <a:effectLst/>
+                <a:latin typeface="Consolas" panose="020B0609020204030204" pitchFamily="49" charset="0"/>
+              </a:rPr>
+              <a:t>realRequest</a:t>
+            </a:r>
+            <a:r>
+              <a:rPr lang="en-US" sz="2000" b="0" dirty="0">
+                <a:solidFill>
+                  <a:srgbClr val="000000"/>
+                </a:solidFill>
+                <a:effectLst/>
+                <a:latin typeface="Consolas" panose="020B0609020204030204" pitchFamily="49" charset="0"/>
+              </a:rPr>
+              <a:t>(</a:t>
+            </a:r>
+            <a:r>
+              <a:rPr lang="en-US" sz="2000" b="0" dirty="0">
+                <a:solidFill>
+                  <a:srgbClr val="098658"/>
+                </a:solidFill>
+                <a:effectLst/>
+                <a:latin typeface="Consolas" panose="020B0609020204030204" pitchFamily="49" charset="0"/>
+              </a:rPr>
+              <a:t>3</a:t>
+            </a:r>
+            <a:r>
+              <a:rPr lang="en-US" sz="2000" b="0" dirty="0">
+                <a:solidFill>
+                  <a:srgbClr val="000000"/>
+                </a:solidFill>
+                <a:effectLst/>
+                <a:latin typeface="Consolas" panose="020B0609020204030204" pitchFamily="49" charset="0"/>
+              </a:rPr>
+              <a:t>)];</a:t>
             </a:r>
           </a:p>
           <a:p>
@@ -28546,7 +28704,7 @@
               <a:buNone/>
             </a:pPr>
             <a:r>
-              <a:rPr lang="en-US" sz="1600" b="0" dirty="0">
+              <a:rPr lang="en-US" sz="2000" b="0" dirty="0">
                 <a:solidFill>
                   <a:srgbClr val="000000"/>
                 </a:solidFill>
@@ -28556,7 +28714,7 @@
               <a:t>  </a:t>
             </a:r>
             <a:r>
-              <a:rPr lang="en-US" sz="1600" b="0" dirty="0">
+              <a:rPr lang="en-US" sz="2000" b="0" dirty="0">
                 <a:solidFill>
                   <a:srgbClr val="0000FF"/>
                 </a:solidFill>
@@ -28566,54 +28724,54 @@
               <a:t>const</a:t>
             </a:r>
             <a:r>
-              <a:rPr lang="en-US" sz="1600" b="0" dirty="0">
+              <a:rPr lang="en-US" sz="2000" b="0" dirty="0">
                 <a:solidFill>
                   <a:srgbClr val="000000"/>
                 </a:solidFill>
                 <a:effectLst/>
                 <a:latin typeface="Consolas" panose="020B0609020204030204" pitchFamily="49" charset="0"/>
               </a:rPr>
-              <a:t> promises = [</a:t>
-            </a:r>
-            <a:r>
-              <a:rPr lang="en-US" sz="1600" b="0" dirty="0" err="1">
+              <a:t> results = </a:t>
+            </a:r>
+            <a:r>
+              <a:rPr lang="en-US" sz="2000" b="0" dirty="0">
+                <a:solidFill>
+                  <a:srgbClr val="0000FF"/>
+                </a:solidFill>
+                <a:effectLst/>
+                <a:latin typeface="Consolas" panose="020B0609020204030204" pitchFamily="49" charset="0"/>
+              </a:rPr>
+              <a:t>await</a:t>
+            </a:r>
+            <a:r>
+              <a:rPr lang="en-US" sz="2000" b="0" dirty="0">
                 <a:solidFill>
                   <a:srgbClr val="000000"/>
                 </a:solidFill>
                 <a:effectLst/>
                 <a:latin typeface="Consolas" panose="020B0609020204030204" pitchFamily="49" charset="0"/>
               </a:rPr>
-              <a:t>realRequest</a:t>
-            </a:r>
-            <a:r>
-              <a:rPr lang="en-US" sz="1600" b="0" dirty="0">
+              <a:t> </a:t>
+            </a:r>
+            <a:r>
+              <a:rPr lang="en-US" sz="2000" b="0" dirty="0" err="1">
                 <a:solidFill>
                   <a:srgbClr val="000000"/>
                 </a:solidFill>
                 <a:effectLst/>
                 <a:latin typeface="Consolas" panose="020B0609020204030204" pitchFamily="49" charset="0"/>
               </a:rPr>
-              <a:t>(</a:t>
-            </a:r>
-            <a:r>
-              <a:rPr lang="en-US" sz="1600" b="0" dirty="0">
-                <a:solidFill>
-                  <a:srgbClr val="098658"/>
-                </a:solidFill>
-                <a:effectLst/>
-                <a:latin typeface="Consolas" panose="020B0609020204030204" pitchFamily="49" charset="0"/>
-              </a:rPr>
-              <a:t>1</a:t>
-            </a:r>
-            <a:r>
-              <a:rPr lang="en-US" sz="1600" b="0" dirty="0">
+              <a:t>Promise.all</a:t>
+            </a:r>
+            <a:r>
+              <a:rPr lang="en-US" sz="2000" b="0" dirty="0">
                 <a:solidFill>
                   <a:srgbClr val="000000"/>
                 </a:solidFill>
                 <a:effectLst/>
                 <a:latin typeface="Consolas" panose="020B0609020204030204" pitchFamily="49" charset="0"/>
               </a:rPr>
-              <a:t>), </a:t>
+              <a:t>(promises);</a:t>
             </a:r>
           </a:p>
           <a:p>
@@ -28624,53 +28782,34 @@
               <a:buNone/>
             </a:pPr>
             <a:r>
-              <a:rPr lang="en-US" sz="1600" dirty="0">
+              <a:rPr lang="en-US" sz="2000" b="0" dirty="0">
                 <a:solidFill>
                   <a:srgbClr val="000000"/>
                 </a:solidFill>
-                <a:latin typeface="Consolas" panose="020B0609020204030204" pitchFamily="49" charset="0"/>
-              </a:rPr>
-              <a:t>                    </a:t>
-            </a:r>
-            <a:r>
-              <a:rPr lang="en-US" sz="1600" b="0" dirty="0" err="1">
+                <a:effectLst/>
+                <a:latin typeface="Consolas" panose="020B0609020204030204" pitchFamily="49" charset="0"/>
+              </a:rPr>
+              <a:t>  console.log(</a:t>
+            </a:r>
+            <a:r>
+              <a:rPr lang="en-US" sz="2000" b="0" dirty="0">
+                <a:solidFill>
+                  <a:srgbClr val="A31515"/>
+                </a:solidFill>
+                <a:effectLst/>
+                <a:latin typeface="Consolas" panose="020B0609020204030204" pitchFamily="49" charset="0"/>
+              </a:rPr>
+              <a:t>'results:'</a:t>
+            </a:r>
+            <a:r>
+              <a:rPr lang="en-US" sz="2000" b="0" dirty="0">
                 <a:solidFill>
                   <a:srgbClr val="000000"/>
                 </a:solidFill>
                 <a:effectLst/>
                 <a:latin typeface="Consolas" panose="020B0609020204030204" pitchFamily="49" charset="0"/>
               </a:rPr>
-              <a:t>realRequest</a:t>
-            </a:r>
-            <a:r>
-              <a:rPr lang="en-US" sz="1600" b="0" dirty="0">
-                <a:solidFill>
-                  <a:srgbClr val="000000"/>
-                </a:solidFill>
-                <a:effectLst/>
-                <a:latin typeface="Consolas" panose="020B0609020204030204" pitchFamily="49" charset="0"/>
-              </a:rPr>
-              <a:t>(</a:t>
-            </a:r>
-            <a:r>
-              <a:rPr lang="en-US" sz="1600" b="0" dirty="0">
-                <a:solidFill>
-                  <a:srgbClr val="098658"/>
-                </a:solidFill>
-                <a:effectLst/>
-                <a:latin typeface="Consolas" panose="020B0609020204030204" pitchFamily="49" charset="0"/>
-              </a:rPr>
-              <a:t>2</a:t>
-            </a:r>
-            <a:r>
-              <a:rPr lang="en-US" sz="1600" b="0" dirty="0">
-                <a:solidFill>
-                  <a:srgbClr val="000000"/>
-                </a:solidFill>
-                <a:effectLst/>
-                <a:latin typeface="Consolas" panose="020B0609020204030204" pitchFamily="49" charset="0"/>
-              </a:rPr>
-              <a:t>),</a:t>
+              <a:t>, results);</a:t>
             </a:r>
           </a:p>
           <a:p>
@@ -28681,63 +28820,34 @@
               <a:buNone/>
             </a:pPr>
             <a:r>
-              <a:rPr lang="en-US" sz="1600" dirty="0">
+              <a:rPr lang="en-US" sz="2000" b="0" dirty="0">
                 <a:solidFill>
                   <a:srgbClr val="000000"/>
                 </a:solidFill>
-                <a:latin typeface="Consolas" panose="020B0609020204030204" pitchFamily="49" charset="0"/>
-              </a:rPr>
-              <a:t>                   </a:t>
-            </a:r>
-            <a:r>
-              <a:rPr lang="en-US" sz="1600" b="0" dirty="0">
+                <a:effectLst/>
+                <a:latin typeface="Consolas" panose="020B0609020204030204" pitchFamily="49" charset="0"/>
+              </a:rPr>
+              <a:t>  console.log(</a:t>
+            </a:r>
+            <a:r>
+              <a:rPr lang="en-US" sz="2000" b="0" dirty="0">
+                <a:solidFill>
+                  <a:srgbClr val="A31515"/>
+                </a:solidFill>
+                <a:effectLst/>
+                <a:latin typeface="Consolas" panose="020B0609020204030204" pitchFamily="49" charset="0"/>
+              </a:rPr>
+              <a:t>'main done'</a:t>
+            </a:r>
+            <a:r>
+              <a:rPr lang="en-US" sz="2000" b="0" dirty="0">
                 <a:solidFill>
                   <a:srgbClr val="000000"/>
                 </a:solidFill>
                 <a:effectLst/>
                 <a:latin typeface="Consolas" panose="020B0609020204030204" pitchFamily="49" charset="0"/>
               </a:rPr>
-              <a:t> </a:t>
-            </a:r>
-            <a:r>
-              <a:rPr lang="en-US" sz="1600" b="0" dirty="0" err="1">
-                <a:solidFill>
-                  <a:srgbClr val="000000"/>
-                </a:solidFill>
-                <a:effectLst/>
-                <a:latin typeface="Consolas" panose="020B0609020204030204" pitchFamily="49" charset="0"/>
-              </a:rPr>
-              <a:t>realRequest</a:t>
-            </a:r>
-            <a:r>
-              <a:rPr lang="en-US" sz="1600" b="0" dirty="0">
-                <a:solidFill>
-                  <a:srgbClr val="000000"/>
-                </a:solidFill>
-                <a:effectLst/>
-                <a:latin typeface="Consolas" panose="020B0609020204030204" pitchFamily="49" charset="0"/>
-              </a:rPr>
-              <a:t>(</a:t>
-            </a:r>
-            <a:r>
-              <a:rPr lang="en-US" sz="1600" b="0" dirty="0">
-                <a:solidFill>
-                  <a:srgbClr val="098658"/>
-                </a:solidFill>
-                <a:effectLst/>
-                <a:latin typeface="Consolas" panose="020B0609020204030204" pitchFamily="49" charset="0"/>
-              </a:rPr>
-              <a:t>3</a:t>
-            </a:r>
-            <a:r>
-              <a:rPr lang="en-US" sz="1600" b="0" dirty="0">
-                <a:solidFill>
-                  <a:srgbClr val="000000"/>
-                </a:solidFill>
-                <a:effectLst/>
-                <a:latin typeface="Consolas" panose="020B0609020204030204" pitchFamily="49" charset="0"/>
-              </a:rPr>
-              <a:t>)];</a:t>
+              <a:t>);</a:t>
             </a:r>
           </a:p>
           <a:p>
@@ -28748,74 +28858,14 @@
               <a:buNone/>
             </a:pPr>
             <a:r>
-              <a:rPr lang="en-US" sz="1600" b="0" dirty="0">
+              <a:rPr lang="en-US" sz="2000" b="0" dirty="0">
                 <a:solidFill>
                   <a:srgbClr val="000000"/>
                 </a:solidFill>
                 <a:effectLst/>
                 <a:latin typeface="Consolas" panose="020B0609020204030204" pitchFamily="49" charset="0"/>
               </a:rPr>
-              <a:t>  </a:t>
-            </a:r>
-            <a:r>
-              <a:rPr lang="en-US" sz="1600" b="0" dirty="0">
-                <a:solidFill>
-                  <a:srgbClr val="0000FF"/>
-                </a:solidFill>
-                <a:effectLst/>
-                <a:latin typeface="Consolas" panose="020B0609020204030204" pitchFamily="49" charset="0"/>
-              </a:rPr>
-              <a:t>const</a:t>
-            </a:r>
-            <a:r>
-              <a:rPr lang="en-US" sz="1600" b="0" dirty="0">
-                <a:solidFill>
-                  <a:srgbClr val="000000"/>
-                </a:solidFill>
-                <a:effectLst/>
-                <a:latin typeface="Consolas" panose="020B0609020204030204" pitchFamily="49" charset="0"/>
-              </a:rPr>
-              <a:t> results = </a:t>
-            </a:r>
-            <a:r>
-              <a:rPr lang="en-US" sz="1600" b="0" dirty="0">
-                <a:solidFill>
-                  <a:srgbClr val="0000FF"/>
-                </a:solidFill>
-                <a:effectLst/>
-                <a:latin typeface="Consolas" panose="020B0609020204030204" pitchFamily="49" charset="0"/>
-              </a:rPr>
-              <a:t>await</a:t>
-            </a:r>
-            <a:r>
-              <a:rPr lang="en-US" sz="1600" b="0" dirty="0">
-                <a:solidFill>
-                  <a:srgbClr val="000000"/>
-                </a:solidFill>
-                <a:effectLst/>
-                <a:latin typeface="Consolas" panose="020B0609020204030204" pitchFamily="49" charset="0"/>
-              </a:rPr>
-              <a:t> </a:t>
-            </a:r>
-            <a:r>
-              <a:rPr lang="en-US" sz="1600" b="0" dirty="0" err="1">
-                <a:solidFill>
-                  <a:srgbClr val="000000"/>
-                </a:solidFill>
-                <a:effectLst/>
-                <a:latin typeface="Consolas" panose="020B0609020204030204" pitchFamily="49" charset="0"/>
-              </a:rPr>
-              <a:t>Promise.all</a:t>
-            </a:r>
-            <a:r>
-              <a:rPr lang="en-US" sz="1600" b="0" dirty="0">
-                <a:solidFill>
-                  <a:srgbClr val="000000"/>
-                </a:solidFill>
-                <a:effectLst/>
-                <a:latin typeface="Consolas" panose="020B0609020204030204" pitchFamily="49" charset="0"/>
-              </a:rPr>
-              <a:t>(promises);</a:t>
+              <a:t>}</a:t>
             </a:r>
           </a:p>
           <a:p>
@@ -28826,131 +28876,37 @@
               <a:buNone/>
             </a:pPr>
             <a:r>
-              <a:rPr lang="en-US" sz="1600" b="0" dirty="0">
+              <a:rPr lang="en-US" sz="2000" b="0" dirty="0">
+                <a:solidFill>
+                  <a:srgbClr val="0000FF"/>
+                </a:solidFill>
+                <a:effectLst/>
+                <a:latin typeface="Consolas" panose="020B0609020204030204" pitchFamily="49" charset="0"/>
+              </a:rPr>
+              <a:t>await</a:t>
+            </a:r>
+            <a:r>
+              <a:rPr lang="en-US" sz="2000" b="0" dirty="0">
                 <a:solidFill>
                   <a:srgbClr val="000000"/>
                 </a:solidFill>
                 <a:effectLst/>
                 <a:latin typeface="Consolas" panose="020B0609020204030204" pitchFamily="49" charset="0"/>
               </a:rPr>
-              <a:t>  console.log(</a:t>
-            </a:r>
-            <a:r>
-              <a:rPr lang="en-US" sz="1600" b="0" dirty="0">
-                <a:solidFill>
-                  <a:srgbClr val="A31515"/>
-                </a:solidFill>
-                <a:effectLst/>
-                <a:latin typeface="Consolas" panose="020B0609020204030204" pitchFamily="49" charset="0"/>
-              </a:rPr>
-              <a:t>'results:'</a:t>
-            </a:r>
-            <a:r>
-              <a:rPr lang="en-US" sz="1600" b="0" dirty="0">
+              <a:t> </a:t>
+            </a:r>
+            <a:r>
+              <a:rPr lang="en-US" sz="2000" b="0" dirty="0" err="1">
                 <a:solidFill>
                   <a:srgbClr val="000000"/>
                 </a:solidFill>
                 <a:effectLst/>
                 <a:latin typeface="Consolas" panose="020B0609020204030204" pitchFamily="49" charset="0"/>
               </a:rPr>
-              <a:t>, results);</a:t>
-            </a:r>
-          </a:p>
-          <a:p>
-            <a:pPr algn="l">
-              <a:lnSpc>
-                <a:spcPct val="113095"/>
-              </a:lnSpc>
-              <a:buNone/>
-            </a:pPr>
-            <a:r>
-              <a:rPr lang="en-US" sz="1600" b="0" dirty="0">
-                <a:solidFill>
-                  <a:srgbClr val="000000"/>
-                </a:solidFill>
-                <a:effectLst/>
-                <a:latin typeface="Consolas" panose="020B0609020204030204" pitchFamily="49" charset="0"/>
-              </a:rPr>
-              <a:t>  console.log(</a:t>
-            </a:r>
-            <a:r>
-              <a:rPr lang="en-US" sz="1600" b="0" dirty="0">
-                <a:solidFill>
-                  <a:srgbClr val="A31515"/>
-                </a:solidFill>
-                <a:effectLst/>
-                <a:latin typeface="Consolas" panose="020B0609020204030204" pitchFamily="49" charset="0"/>
-              </a:rPr>
-              <a:t>'main done'</a:t>
-            </a:r>
-            <a:r>
-              <a:rPr lang="en-US" sz="1600" b="0" dirty="0">
-                <a:solidFill>
-                  <a:srgbClr val="000000"/>
-                </a:solidFill>
-                <a:effectLst/>
-                <a:latin typeface="Consolas" panose="020B0609020204030204" pitchFamily="49" charset="0"/>
-              </a:rPr>
-              <a:t>);</a:t>
-            </a:r>
-          </a:p>
-          <a:p>
-            <a:pPr algn="l">
-              <a:lnSpc>
-                <a:spcPct val="113095"/>
-              </a:lnSpc>
-              <a:buNone/>
-            </a:pPr>
-            <a:r>
-              <a:rPr lang="en-US" sz="1600" b="0" dirty="0">
-                <a:solidFill>
-                  <a:srgbClr val="000000"/>
-                </a:solidFill>
-                <a:effectLst/>
-                <a:latin typeface="Consolas" panose="020B0609020204030204" pitchFamily="49" charset="0"/>
-              </a:rPr>
-              <a:t>}</a:t>
-            </a:r>
-          </a:p>
-          <a:p>
-            <a:pPr algn="l">
-              <a:lnSpc>
-                <a:spcPct val="113095"/>
-              </a:lnSpc>
-              <a:buNone/>
-            </a:pPr>
-            <a:r>
-              <a:rPr lang="en-US" sz="1600" b="0" dirty="0">
-                <a:solidFill>
-                  <a:srgbClr val="0000FF"/>
-                </a:solidFill>
-                <a:effectLst/>
-                <a:latin typeface="Consolas" panose="020B0609020204030204" pitchFamily="49" charset="0"/>
-              </a:rPr>
-              <a:t>await</a:t>
-            </a:r>
-            <a:r>
-              <a:rPr lang="en-US" sz="1600" b="0" dirty="0">
-                <a:solidFill>
-                  <a:srgbClr val="000000"/>
-                </a:solidFill>
-                <a:effectLst/>
-                <a:latin typeface="Consolas" panose="020B0609020204030204" pitchFamily="49" charset="0"/>
-              </a:rPr>
-              <a:t> </a:t>
-            </a:r>
-            <a:r>
-              <a:rPr lang="en-US" sz="1600" b="0" dirty="0" err="1">
-                <a:solidFill>
-                  <a:srgbClr val="000000"/>
-                </a:solidFill>
-                <a:effectLst/>
-                <a:latin typeface="Consolas" panose="020B0609020204030204" pitchFamily="49" charset="0"/>
-              </a:rPr>
               <a:t>timeIt</a:t>
             </a:r>
             <a:r>
-              <a:rPr lang="en-US" sz="1600" b="0" dirty="0">
+              <a:rPr lang="en-US" sz="2000" b="0" dirty="0">
                 <a:solidFill>
                   <a:srgbClr val="000000"/>
                 </a:solidFill>
@@ -29107,7 +29063,7 @@
             <a:r>
               <a:rPr lang="en-US" sz="2000" dirty="0">
                 <a:solidFill>
-                  <a:schemeClr val="tx1"/>
+                  <a:srgbClr val="FF0000"/>
                 </a:solidFill>
                 <a:latin typeface="Verdana" panose="020B0604030504040204" pitchFamily="34" charset="0"/>
                 <a:ea typeface="Verdana" panose="020B0604030504040204" pitchFamily="34" charset="0"/>
@@ -29120,7 +29076,7 @@
             <a:r>
               <a:rPr lang="en-US" sz="2000" dirty="0">
                 <a:solidFill>
-                  <a:schemeClr val="tx1"/>
+                  <a:srgbClr val="FF0000"/>
                 </a:solidFill>
                 <a:latin typeface="Verdana" panose="020B0604030504040204" pitchFamily="34" charset="0"/>
                 <a:ea typeface="Verdana" panose="020B0604030504040204" pitchFamily="34" charset="0"/>
@@ -29133,7 +29089,7 @@
             <a:r>
               <a:rPr lang="en-US" sz="2000" dirty="0">
                 <a:solidFill>
-                  <a:schemeClr val="tx1"/>
+                  <a:srgbClr val="FF0000"/>
                 </a:solidFill>
                 <a:latin typeface="Verdana" panose="020B0604030504040204" pitchFamily="34" charset="0"/>
                 <a:ea typeface="Verdana" panose="020B0604030504040204" pitchFamily="34" charset="0"/>
@@ -29196,8 +29152,8 @@
         </p:nvSpPr>
         <p:spPr>
           <a:xfrm>
-            <a:off x="6388877" y="276507"/>
-            <a:ext cx="5589882" cy="601981"/>
+            <a:off x="6388877" y="13460"/>
+            <a:ext cx="5589882" cy="324743"/>
           </a:xfrm>
           <a:prstGeom prst="roundRect">
             <a:avLst/>
@@ -29481,39 +29437,26 @@
                                   </p:childTnLst>
                                 </p:cTn>
                               </p:par>
+                            </p:childTnLst>
+                          </p:cTn>
+                        </p:par>
+                      </p:childTnLst>
+                    </p:cTn>
+                  </p:par>
+                  <p:par>
+                    <p:cTn id="17" fill="hold">
+                      <p:stCondLst>
+                        <p:cond delay="indefinite"/>
+                      </p:stCondLst>
+                      <p:childTnLst>
+                        <p:par>
+                          <p:cTn id="18" fill="hold">
+                            <p:stCondLst>
+                              <p:cond delay="0"/>
+                            </p:stCondLst>
+                            <p:childTnLst>
                               <p:par>
-                                <p:cTn id="17" presetID="1" presetClass="entr" presetSubtype="0" fill="hold" grpId="0" nodeType="withEffect">
-                                  <p:stCondLst>
-                                    <p:cond delay="0"/>
-                                  </p:stCondLst>
-                                  <p:childTnLst>
-                                    <p:set>
-                                      <p:cBhvr>
-                                        <p:cTn id="18" dur="1" fill="hold">
-                                          <p:stCondLst>
-                                            <p:cond delay="0"/>
-                                          </p:stCondLst>
-                                        </p:cTn>
-                                        <p:tgtEl>
-                                          <p:spTgt spid="6">
-                                            <p:txEl>
-                                              <p:pRg st="5" end="5"/>
-                                            </p:txEl>
-                                          </p:spTgt>
-                                        </p:tgtEl>
-                                        <p:attrNameLst>
-                                          <p:attrName>style.visibility</p:attrName>
-                                        </p:attrNameLst>
-                                      </p:cBhvr>
-                                      <p:to>
-                                        <p:strVal val="visible"/>
-                                      </p:to>
-                                    </p:set>
-                                  </p:childTnLst>
-                                </p:cTn>
-                              </p:par>
-                              <p:par>
-                                <p:cTn id="19" presetID="1" presetClass="entr" presetSubtype="0" fill="hold" grpId="0" nodeType="withEffect">
+                                <p:cTn id="19" presetID="1" presetClass="entr" presetSubtype="0" fill="hold" grpId="0" nodeType="clickEffect">
                                   <p:stCondLst>
                                     <p:cond delay="0"/>
                                   </p:stCondLst>
@@ -29528,7 +29471,7 @@
                                         <p:tgtEl>
                                           <p:spTgt spid="6">
                                             <p:txEl>
-                                              <p:pRg st="6" end="6"/>
+                                              <p:pRg st="5" end="5"/>
                                             </p:txEl>
                                           </p:spTgt>
                                         </p:tgtEl>
@@ -29559,7 +29502,7 @@
                                         <p:tgtEl>
                                           <p:spTgt spid="6">
                                             <p:txEl>
-                                              <p:pRg st="7" end="7"/>
+                                              <p:pRg st="6" end="6"/>
                                             </p:txEl>
                                           </p:spTgt>
                                         </p:tgtEl>
@@ -29590,6 +29533,55 @@
                                         <p:tgtEl>
                                           <p:spTgt spid="6">
                                             <p:txEl>
+                                              <p:pRg st="7" end="7"/>
+                                            </p:txEl>
+                                          </p:spTgt>
+                                        </p:tgtEl>
+                                        <p:attrNameLst>
+                                          <p:attrName>style.visibility</p:attrName>
+                                        </p:attrNameLst>
+                                      </p:cBhvr>
+                                      <p:to>
+                                        <p:strVal val="visible"/>
+                                      </p:to>
+                                    </p:set>
+                                  </p:childTnLst>
+                                </p:cTn>
+                              </p:par>
+                            </p:childTnLst>
+                          </p:cTn>
+                        </p:par>
+                      </p:childTnLst>
+                    </p:cTn>
+                  </p:par>
+                  <p:par>
+                    <p:cTn id="25" fill="hold">
+                      <p:stCondLst>
+                        <p:cond delay="indefinite"/>
+                      </p:stCondLst>
+                      <p:childTnLst>
+                        <p:par>
+                          <p:cTn id="26" fill="hold">
+                            <p:stCondLst>
+                              <p:cond delay="0"/>
+                            </p:stCondLst>
+                            <p:childTnLst>
+                              <p:par>
+                                <p:cTn id="27" presetID="1" presetClass="entr" presetSubtype="0" fill="hold" grpId="0" nodeType="clickEffect">
+                                  <p:stCondLst>
+                                    <p:cond delay="0"/>
+                                  </p:stCondLst>
+                                  <p:childTnLst>
+                                    <p:set>
+                                      <p:cBhvr>
+                                        <p:cTn id="28" dur="1" fill="hold">
+                                          <p:stCondLst>
+                                            <p:cond delay="0"/>
+                                          </p:stCondLst>
+                                        </p:cTn>
+                                        <p:tgtEl>
+                                          <p:spTgt spid="6">
+                                            <p:txEl>
                                               <p:pRg st="8" end="8"/>
                                             </p:txEl>
                                           </p:spTgt>
@@ -29606,14 +29598,14 @@
                                 </p:cTn>
                               </p:par>
                               <p:par>
-                                <p:cTn id="25" presetID="1" presetClass="entr" presetSubtype="0" fill="hold" grpId="0" nodeType="withEffect">
+                                <p:cTn id="29" presetID="1" presetClass="entr" presetSubtype="0" fill="hold" grpId="0" nodeType="withEffect">
                                   <p:stCondLst>
                                     <p:cond delay="0"/>
                                   </p:stCondLst>
                                   <p:childTnLst>
                                     <p:set>
                                       <p:cBhvr>
-                                        <p:cTn id="26" dur="1" fill="hold">
+                                        <p:cTn id="30" dur="1" fill="hold">
                                           <p:stCondLst>
                                             <p:cond delay="0"/>
                                           </p:stCondLst>
@@ -29637,14 +29629,14 @@
                                 </p:cTn>
                               </p:par>
                               <p:par>
-                                <p:cTn id="27" presetID="1" presetClass="entr" presetSubtype="0" fill="hold" grpId="0" nodeType="withEffect">
+                                <p:cTn id="31" presetID="1" presetClass="entr" presetSubtype="0" fill="hold" grpId="0" nodeType="withEffect">
                                   <p:stCondLst>
                                     <p:cond delay="0"/>
                                   </p:stCondLst>
                                   <p:childTnLst>
                                     <p:set>
                                       <p:cBhvr>
-                                        <p:cTn id="28" dur="1" fill="hold">
+                                        <p:cTn id="32" dur="1" fill="hold">
                                           <p:stCondLst>
                                             <p:cond delay="0"/>
                                           </p:stCondLst>
@@ -31344,12 +31336,12 @@
             <a:r>
               <a:rPr lang="en-US" sz="2000" dirty="0">
                 <a:solidFill>
-                  <a:schemeClr val="tx1"/>
+                  <a:srgbClr val="FF0000"/>
                 </a:solidFill>
                 <a:latin typeface="Verdana" panose="020B0604030504040204" pitchFamily="34" charset="0"/>
                 <a:ea typeface="Verdana" panose="020B0604030504040204" pitchFamily="34" charset="0"/>
               </a:rPr>
-              <a:t>237 msec</a:t>
+              <a:t>3024 msec</a:t>
             </a:r>
           </a:p>
         </p:txBody>
@@ -31368,8 +31360,8 @@
         </p:nvSpPr>
         <p:spPr>
           <a:xfrm>
-            <a:off x="10674302" y="3966210"/>
-            <a:ext cx="1398428" cy="786357"/>
+            <a:off x="10549119" y="3966210"/>
+            <a:ext cx="1642882" cy="365125"/>
           </a:xfrm>
           <a:prstGeom prst="rect">
             <a:avLst/>
@@ -31396,12 +31388,14 @@
           <a:p>
             <a:pPr algn="l"/>
             <a:r>
-              <a:rPr lang="en-US" sz="2800" dirty="0">
-                <a:solidFill>
-                  <a:schemeClr val="tx1"/>
-                </a:solidFill>
-              </a:rPr>
-              <a:t>34 msec</a:t>
+              <a:rPr lang="en-US" sz="2000" dirty="0">
+                <a:solidFill>
+                  <a:srgbClr val="FF0000"/>
+                </a:solidFill>
+                <a:latin typeface="Verdana" panose="020B0604030504040204" pitchFamily="34" charset="0"/>
+                <a:ea typeface="Verdana" panose="020B0604030504040204" pitchFamily="34" charset="0"/>
+              </a:rPr>
+              <a:t>1018 msec</a:t>
             </a:r>
           </a:p>
         </p:txBody>
@@ -42859,7 +42853,7 @@
 </file>
 
 <file path=ppt/slides/slide36.xml><?xml version="1.0" encoding="utf-8"?>
-<p:sld xmlns:a="http://schemas.openxmlformats.org/drawingml/2006/main" xmlns:r="http://schemas.openxmlformats.org/officeDocument/2006/relationships" xmlns:p="http://schemas.openxmlformats.org/presentationml/2006/main">
+<p:sld xmlns:a="http://schemas.openxmlformats.org/drawingml/2006/main" xmlns:r="http://schemas.openxmlformats.org/officeDocument/2006/relationships" xmlns:p="http://schemas.openxmlformats.org/presentationml/2006/main" show="0">
   <p:cSld>
     <p:spTree>
       <p:nvGrpSpPr>

--- a/Slides/Module 08 Concurrency.pptx
+++ b/Slides/Module 08 Concurrency.pptx
@@ -34,8 +34,8 @@
     <p:sldId id="679" r:id="rId25"/>
     <p:sldId id="781" r:id="rId26"/>
     <p:sldId id="788" r:id="rId27"/>
-    <p:sldId id="680" r:id="rId28"/>
-    <p:sldId id="662" r:id="rId29"/>
+    <p:sldId id="662" r:id="rId28"/>
+    <p:sldId id="680" r:id="rId29"/>
     <p:sldId id="681" r:id="rId30"/>
     <p:sldId id="682" r:id="rId31"/>
     <p:sldId id="689" r:id="rId32"/>
@@ -379,8 +379,8 @@
             <p14:sldId id="679"/>
             <p14:sldId id="781"/>
             <p14:sldId id="788"/>
+            <p14:sldId id="662"/>
             <p14:sldId id="680"/>
-            <p14:sldId id="662"/>
             <p14:sldId id="681"/>
             <p14:sldId id="682"/>
             <p14:sldId id="689"/>
@@ -2821,20 +2821,23 @@
           <a:bodyPr/>
           <a:lstStyle/>
           <a:p>
+            <a:endParaRPr lang="en-US" dirty="0"/>
+          </a:p>
+          <a:p>
+            <a:endParaRPr lang="en-US" dirty="0"/>
+          </a:p>
+          <a:p>
             <a:r>
               <a:rPr lang="en-US" dirty="0"/>
-              <a:t>Note that these requests started 1,then 2,then 3, but returned in order 2, then 3, then 1.</a:t>
-            </a:r>
-          </a:p>
-          <a:p>
-            <a:endParaRPr lang="en-US" dirty="0"/>
+              <a:t>In both cases, there is at most one active promise (in green) at any time!  But the concurrent version "masks latency with concurrency", as we said way back on slide 1.</a:t>
+            </a:r>
           </a:p>
         </p:txBody>
       </p:sp>
     </p:spTree>
     <p:extLst>
       <p:ext uri="{BB962C8B-B14F-4D97-AF65-F5344CB8AC3E}">
-        <p14:creationId xmlns:p14="http://schemas.microsoft.com/office/powerpoint/2010/main" val="4120986723"/>
+        <p14:creationId xmlns:p14="http://schemas.microsoft.com/office/powerpoint/2010/main" val="502165979"/>
       </p:ext>
     </p:extLst>
   </p:cSld>
@@ -2888,23 +2891,20 @@
           <a:bodyPr/>
           <a:lstStyle/>
           <a:p>
+            <a:r>
+              <a:rPr lang="en-US" dirty="0"/>
+              <a:t>Note that these requests started 1,then 2,then 3, but returned in order 2, then 3, then 1.</a:t>
+            </a:r>
+          </a:p>
+          <a:p>
             <a:endParaRPr lang="en-US" dirty="0"/>
-          </a:p>
-          <a:p>
-            <a:endParaRPr lang="en-US" dirty="0"/>
-          </a:p>
-          <a:p>
-            <a:r>
-              <a:rPr lang="en-US" dirty="0"/>
-              <a:t>In both cases, there is at most one active promise (in green) at any time!  But the concurrent version "masks latency with concurrency", as we said way back on slide 1.</a:t>
-            </a:r>
           </a:p>
         </p:txBody>
       </p:sp>
     </p:spTree>
     <p:extLst>
       <p:ext uri="{BB962C8B-B14F-4D97-AF65-F5344CB8AC3E}">
-        <p14:creationId xmlns:p14="http://schemas.microsoft.com/office/powerpoint/2010/main" val="502165979"/>
+        <p14:creationId xmlns:p14="http://schemas.microsoft.com/office/powerpoint/2010/main" val="4120986723"/>
       </p:ext>
     </p:extLst>
   </p:cSld>
@@ -4515,7 +4515,7 @@
                 <a:tabLst/>
                 <a:defRPr/>
               </a:pPr>
-              <a:t>9/29/2026</a:t>
+              <a:t>9/30/2026</a:t>
             </a:fld>
             <a:endParaRPr kumimoji="0" lang="en-US" sz="1200" b="0" i="0" u="none" strike="noStrike" kern="1200" cap="none" spc="0" normalizeH="0" baseline="0" noProof="0">
               <a:ln>
@@ -4999,7 +4999,7 @@
                 <a:tabLst/>
                 <a:defRPr/>
               </a:pPr>
-              <a:t>9/29/2026</a:t>
+              <a:t>9/30/2026</a:t>
             </a:fld>
             <a:endParaRPr kumimoji="0" lang="en-US" sz="1200" b="0" i="0" u="none" strike="noStrike" kern="1200" cap="none" spc="0" normalizeH="0" baseline="0" noProof="0">
               <a:ln>
@@ -5357,7 +5357,7 @@
                 <a:tabLst/>
                 <a:defRPr/>
               </a:pPr>
-              <a:t>9/29/2026</a:t>
+              <a:t>9/30/2026</a:t>
             </a:fld>
             <a:endParaRPr kumimoji="0" lang="en-US" sz="1200" b="0" i="0" u="none" strike="noStrike" kern="1200" cap="none" spc="0" normalizeH="0" baseline="0" noProof="0">
               <a:ln>
@@ -5725,7 +5725,7 @@
                 <a:tabLst/>
                 <a:defRPr/>
               </a:pPr>
-              <a:t>9/29/2026</a:t>
+              <a:t>9/30/2026</a:t>
             </a:fld>
             <a:endParaRPr kumimoji="0" lang="en-US" sz="1200" b="0" i="0" u="none" strike="noStrike" kern="1200" cap="none" spc="0" normalizeH="0" baseline="0" noProof="0">
               <a:ln>
@@ -6695,7 +6695,7 @@
                 <a:tabLst/>
                 <a:defRPr/>
               </a:pPr>
-              <a:t>9/29/2026</a:t>
+              <a:t>9/30/2026</a:t>
             </a:fld>
             <a:endParaRPr kumimoji="0" lang="en-US" sz="1200" b="0" i="0" u="none" strike="noStrike" kern="1200" cap="none" spc="0" normalizeH="0" baseline="0" noProof="0">
               <a:ln>
@@ -7121,7 +7121,7 @@
                 <a:tabLst/>
                 <a:defRPr/>
               </a:pPr>
-              <a:t>9/29/2026</a:t>
+              <a:t>9/30/2026</a:t>
             </a:fld>
             <a:endParaRPr kumimoji="0" lang="en-US" sz="1200" b="0" i="0" u="none" strike="noStrike" kern="1200" cap="none" spc="0" normalizeH="0" baseline="0" noProof="0">
               <a:ln>
@@ -7485,7 +7485,7 @@
                 <a:tabLst/>
                 <a:defRPr/>
               </a:pPr>
-              <a:t>9/29/2026</a:t>
+              <a:t>9/30/2026</a:t>
             </a:fld>
             <a:endParaRPr kumimoji="0" lang="en-US" sz="1200" b="0" i="0" u="none" strike="noStrike" kern="1200" cap="none" spc="0" normalizeH="0" baseline="0" noProof="0">
               <a:ln>
@@ -8012,7 +8012,7 @@
                 <a:tabLst/>
                 <a:defRPr/>
               </a:pPr>
-              <a:t>9/29/2026</a:t>
+              <a:t>9/30/2026</a:t>
             </a:fld>
             <a:endParaRPr kumimoji="0" lang="en-US" sz="1200" b="0" i="0" u="none" strike="noStrike" kern="1200" cap="none" spc="0" normalizeH="0" baseline="0" noProof="0">
               <a:ln>
@@ -8473,7 +8473,7 @@
                 <a:tabLst/>
                 <a:defRPr/>
               </a:pPr>
-              <a:t>9/29/2026</a:t>
+              <a:t>9/30/2026</a:t>
             </a:fld>
             <a:endParaRPr kumimoji="0" lang="en-US" sz="1200" b="0" i="0" u="none" strike="noStrike" kern="1200" cap="none" spc="0" normalizeH="0" baseline="0" noProof="0">
               <a:ln>
@@ -9081,7 +9081,7 @@
                 <a:tabLst/>
                 <a:defRPr/>
               </a:pPr>
-              <a:t>9/29/2026</a:t>
+              <a:t>9/30/2026</a:t>
             </a:fld>
             <a:endParaRPr kumimoji="0" lang="en-US" sz="1200" b="0" i="0" u="none" strike="noStrike" kern="1200" cap="none" spc="0" normalizeH="0" baseline="0" noProof="0">
               <a:ln>
@@ -9354,7 +9354,7 @@
                 <a:tabLst/>
                 <a:defRPr/>
               </a:pPr>
-              <a:t>9/29/2026</a:t>
+              <a:t>9/30/2026</a:t>
             </a:fld>
             <a:endParaRPr kumimoji="0" lang="en-US" sz="1200" b="0" i="0" u="none" strike="noStrike" kern="1200" cap="none" spc="0" normalizeH="0" baseline="0" noProof="0">
               <a:ln>
@@ -9825,7 +9825,7 @@
                 <a:tabLst/>
                 <a:defRPr/>
               </a:pPr>
-              <a:t>9/29/2026</a:t>
+              <a:t>9/30/2026</a:t>
             </a:fld>
             <a:endParaRPr kumimoji="0" lang="en-US" sz="1200" b="0" i="0" u="none" strike="noStrike" kern="1200" cap="none" spc="0" normalizeH="0" baseline="0" noProof="0">
               <a:ln>
@@ -10226,7 +10226,7 @@
                 <a:tabLst/>
                 <a:defRPr/>
               </a:pPr>
-              <a:t>9/29/2026</a:t>
+              <a:t>9/30/2026</a:t>
             </a:fld>
             <a:endParaRPr kumimoji="0" lang="en-US" sz="1200" b="0" i="0" u="none" strike="noStrike" kern="1200" cap="none" spc="0" normalizeH="0" baseline="0" noProof="0">
               <a:ln>
@@ -28132,6 +28132,2465 @@
           <p:cNvPr id="2" name="Title 1">
             <a:extLst>
               <a:ext uri="{FF2B5EF4-FFF2-40B4-BE49-F238E27FC236}">
+                <a16:creationId xmlns:a16="http://schemas.microsoft.com/office/drawing/2014/main" id="{24904872-A5AA-7EF3-C717-33099E420CC7}"/>
+              </a:ext>
+            </a:extLst>
+          </p:cNvPr>
+          <p:cNvSpPr>
+            <a:spLocks noGrp="1"/>
+          </p:cNvSpPr>
+          <p:nvPr>
+            <p:ph type="title"/>
+          </p:nvPr>
+        </p:nvSpPr>
+        <p:spPr/>
+        <p:txBody>
+          <a:bodyPr/>
+          <a:lstStyle/>
+          <a:p>
+            <a:r>
+              <a:rPr lang="en-US" dirty="0"/>
+              <a:t>Why is that? </a:t>
+            </a:r>
+            <a:br>
+              <a:rPr lang="en-US" dirty="0"/>
+            </a:br>
+            <a:r>
+              <a:rPr lang="en-US" dirty="0"/>
+              <a:t>Visualizing </a:t>
+            </a:r>
+            <a:r>
+              <a:rPr lang="en-US" dirty="0" err="1"/>
+              <a:t>Promise.all</a:t>
+            </a:r>
+            <a:endParaRPr lang="en-US" dirty="0"/>
+          </a:p>
+        </p:txBody>
+      </p:sp>
+      <p:sp>
+        <p:nvSpPr>
+          <p:cNvPr id="3" name="Slide Number Placeholder 2">
+            <a:extLst>
+              <a:ext uri="{FF2B5EF4-FFF2-40B4-BE49-F238E27FC236}">
+                <a16:creationId xmlns:a16="http://schemas.microsoft.com/office/drawing/2014/main" id="{1E27C171-D5EA-DE88-E683-2C6A1DB367BC}"/>
+              </a:ext>
+            </a:extLst>
+          </p:cNvPr>
+          <p:cNvSpPr>
+            <a:spLocks noGrp="1"/>
+          </p:cNvSpPr>
+          <p:nvPr>
+            <p:ph type="sldNum" sz="quarter" idx="12"/>
+          </p:nvPr>
+        </p:nvSpPr>
+        <p:spPr/>
+        <p:txBody>
+          <a:bodyPr/>
+          <a:lstStyle/>
+          <a:p>
+            <a:pPr marL="0" marR="0" lvl="0" indent="0" algn="r" defTabSz="914400" rtl="0" eaLnBrk="1" fontAlgn="auto" latinLnBrk="0" hangingPunct="1">
+              <a:lnSpc>
+                <a:spcPct val="100000"/>
+              </a:lnSpc>
+              <a:spcBef>
+                <a:spcPts val="0"/>
+              </a:spcBef>
+              <a:spcAft>
+                <a:spcPts val="0"/>
+              </a:spcAft>
+              <a:buClrTx/>
+              <a:buSzTx/>
+              <a:buFontTx/>
+              <a:buNone/>
+              <a:tabLst/>
+              <a:defRPr/>
+            </a:pPr>
+            <a:fld id="{20F37917-FD3A-4669-9018-DA04BCDD3D75}" type="slidenum">
+              <a:rPr kumimoji="0" lang="en-US" sz="1200" b="0" i="0" u="none" strike="noStrike" kern="1200" cap="none" spc="0" normalizeH="0" baseline="0" noProof="0" smtClean="0">
+                <a:ln>
+                  <a:noFill/>
+                </a:ln>
+                <a:solidFill>
+                  <a:prstClr val="black">
+                    <a:tint val="75000"/>
+                  </a:prstClr>
+                </a:solidFill>
+                <a:effectLst/>
+                <a:uLnTx/>
+                <a:uFillTx/>
+                <a:latin typeface="Calibri" panose="020F0502020204030204"/>
+                <a:ea typeface="+mn-ea"/>
+                <a:cs typeface="+mn-cs"/>
+              </a:rPr>
+              <a:pPr marL="0" marR="0" lvl="0" indent="0" algn="r" defTabSz="914400" rtl="0" eaLnBrk="1" fontAlgn="auto" latinLnBrk="0" hangingPunct="1">
+                <a:lnSpc>
+                  <a:spcPct val="100000"/>
+                </a:lnSpc>
+                <a:spcBef>
+                  <a:spcPts val="0"/>
+                </a:spcBef>
+                <a:spcAft>
+                  <a:spcPts val="0"/>
+                </a:spcAft>
+                <a:buClrTx/>
+                <a:buSzTx/>
+                <a:buFontTx/>
+                <a:buNone/>
+                <a:tabLst/>
+                <a:defRPr/>
+              </a:pPr>
+              <a:t>27</a:t>
+            </a:fld>
+            <a:endParaRPr kumimoji="0" lang="en-US" sz="1200" b="0" i="0" u="none" strike="noStrike" kern="1200" cap="none" spc="0" normalizeH="0" baseline="0" noProof="0">
+              <a:ln>
+                <a:noFill/>
+              </a:ln>
+              <a:solidFill>
+                <a:prstClr val="black">
+                  <a:tint val="75000"/>
+                </a:prstClr>
+              </a:solidFill>
+              <a:effectLst/>
+              <a:uLnTx/>
+              <a:uFillTx/>
+              <a:latin typeface="Calibri" panose="020F0502020204030204"/>
+              <a:ea typeface="+mn-ea"/>
+              <a:cs typeface="+mn-cs"/>
+            </a:endParaRPr>
+          </a:p>
+        </p:txBody>
+      </p:sp>
+      <p:grpSp>
+        <p:nvGrpSpPr>
+          <p:cNvPr id="82" name="Group 81">
+            <a:extLst>
+              <a:ext uri="{FF2B5EF4-FFF2-40B4-BE49-F238E27FC236}">
+                <a16:creationId xmlns:a16="http://schemas.microsoft.com/office/drawing/2014/main" id="{5C09B819-646C-1BF0-CDF8-9C3635361FB2}"/>
+              </a:ext>
+            </a:extLst>
+          </p:cNvPr>
+          <p:cNvGrpSpPr/>
+          <p:nvPr/>
+        </p:nvGrpSpPr>
+        <p:grpSpPr>
+          <a:xfrm>
+            <a:off x="517429" y="4904201"/>
+            <a:ext cx="5080647" cy="1388452"/>
+            <a:chOff x="728956" y="4248728"/>
+            <a:chExt cx="5080647" cy="1388452"/>
+          </a:xfrm>
+        </p:grpSpPr>
+        <p:grpSp>
+          <p:nvGrpSpPr>
+            <p:cNvPr id="49" name="Group 48">
+              <a:extLst>
+                <a:ext uri="{FF2B5EF4-FFF2-40B4-BE49-F238E27FC236}">
+                  <a16:creationId xmlns:a16="http://schemas.microsoft.com/office/drawing/2014/main" id="{0F03F2D4-9D9D-5A5B-2FB0-BA0B2E9644A6}"/>
+                </a:ext>
+              </a:extLst>
+            </p:cNvPr>
+            <p:cNvGrpSpPr/>
+            <p:nvPr/>
+          </p:nvGrpSpPr>
+          <p:grpSpPr>
+            <a:xfrm>
+              <a:off x="1063637" y="5148440"/>
+              <a:ext cx="4745966" cy="488740"/>
+              <a:chOff x="-648299" y="2326848"/>
+              <a:chExt cx="4745966" cy="488740"/>
+            </a:xfrm>
+          </p:grpSpPr>
+          <p:sp>
+            <p:nvSpPr>
+              <p:cNvPr id="50" name="Rectangle 49">
+                <a:extLst>
+                  <a:ext uri="{FF2B5EF4-FFF2-40B4-BE49-F238E27FC236}">
+                    <a16:creationId xmlns:a16="http://schemas.microsoft.com/office/drawing/2014/main" id="{CFC40432-958C-952B-6872-3370A26A793F}"/>
+                  </a:ext>
+                </a:extLst>
+              </p:cNvPr>
+              <p:cNvSpPr/>
+              <p:nvPr/>
+            </p:nvSpPr>
+            <p:spPr>
+              <a:xfrm>
+                <a:off x="-648299" y="2326848"/>
+                <a:ext cx="1234440" cy="468628"/>
+              </a:xfrm>
+              <a:prstGeom prst="rect">
+                <a:avLst/>
+              </a:prstGeom>
+              <a:ln/>
+            </p:spPr>
+            <p:style>
+              <a:lnRef idx="1">
+                <a:schemeClr val="accent6"/>
+              </a:lnRef>
+              <a:fillRef idx="2">
+                <a:schemeClr val="accent6"/>
+              </a:fillRef>
+              <a:effectRef idx="1">
+                <a:schemeClr val="accent6"/>
+              </a:effectRef>
+              <a:fontRef idx="minor">
+                <a:schemeClr val="dk1"/>
+              </a:fontRef>
+            </p:style>
+            <p:txBody>
+              <a:bodyPr rtlCol="0" anchor="ctr"/>
+              <a:lstStyle/>
+              <a:p>
+                <a:r>
+                  <a:rPr lang="en-US" sz="2000" dirty="0">
+                    <a:solidFill>
+                      <a:schemeClr val="tx1"/>
+                    </a:solidFill>
+                  </a:rPr>
+                  <a:t>send</a:t>
+                </a:r>
+              </a:p>
+            </p:txBody>
+          </p:sp>
+          <p:sp>
+            <p:nvSpPr>
+              <p:cNvPr id="51" name="Rectangle 50">
+                <a:extLst>
+                  <a:ext uri="{FF2B5EF4-FFF2-40B4-BE49-F238E27FC236}">
+                    <a16:creationId xmlns:a16="http://schemas.microsoft.com/office/drawing/2014/main" id="{2307C3DA-FED1-E2EA-9531-AEE61B0DD710}"/>
+                  </a:ext>
+                </a:extLst>
+              </p:cNvPr>
+              <p:cNvSpPr/>
+              <p:nvPr/>
+            </p:nvSpPr>
+            <p:spPr>
+              <a:xfrm>
+                <a:off x="2863227" y="2346960"/>
+                <a:ext cx="1234440" cy="468628"/>
+              </a:xfrm>
+              <a:prstGeom prst="rect">
+                <a:avLst/>
+              </a:prstGeom>
+              <a:ln/>
+            </p:spPr>
+            <p:style>
+              <a:lnRef idx="1">
+                <a:schemeClr val="accent6"/>
+              </a:lnRef>
+              <a:fillRef idx="2">
+                <a:schemeClr val="accent6"/>
+              </a:fillRef>
+              <a:effectRef idx="1">
+                <a:schemeClr val="accent6"/>
+              </a:effectRef>
+              <a:fontRef idx="minor">
+                <a:schemeClr val="dk1"/>
+              </a:fontRef>
+            </p:style>
+            <p:txBody>
+              <a:bodyPr rtlCol="0" anchor="ctr"/>
+              <a:lstStyle/>
+              <a:p>
+                <a:r>
+                  <a:rPr lang="en-US" sz="2000" dirty="0">
+                    <a:solidFill>
+                      <a:schemeClr val="tx1"/>
+                    </a:solidFill>
+                  </a:rPr>
+                  <a:t>receive</a:t>
+                </a:r>
+              </a:p>
+            </p:txBody>
+          </p:sp>
+          <p:sp>
+            <p:nvSpPr>
+              <p:cNvPr id="52" name="Rectangle 51">
+                <a:extLst>
+                  <a:ext uri="{FF2B5EF4-FFF2-40B4-BE49-F238E27FC236}">
+                    <a16:creationId xmlns:a16="http://schemas.microsoft.com/office/drawing/2014/main" id="{BC3D1DA1-8838-02F1-198E-80213880467B}"/>
+                  </a:ext>
+                </a:extLst>
+              </p:cNvPr>
+              <p:cNvSpPr/>
+              <p:nvPr/>
+            </p:nvSpPr>
+            <p:spPr>
+              <a:xfrm>
+                <a:off x="586141" y="2333371"/>
+                <a:ext cx="2255186" cy="468628"/>
+              </a:xfrm>
+              <a:prstGeom prst="rect">
+                <a:avLst/>
+              </a:prstGeom>
+              <a:solidFill>
+                <a:srgbClr val="FFFF00"/>
+              </a:solidFill>
+              <a:ln>
+                <a:solidFill>
+                  <a:srgbClr val="0070C0"/>
+                </a:solidFill>
+              </a:ln>
+            </p:spPr>
+            <p:style>
+              <a:lnRef idx="2">
+                <a:schemeClr val="accent1">
+                  <a:shade val="50000"/>
+                </a:schemeClr>
+              </a:lnRef>
+              <a:fillRef idx="1">
+                <a:schemeClr val="accent1"/>
+              </a:fillRef>
+              <a:effectRef idx="0">
+                <a:schemeClr val="accent1"/>
+              </a:effectRef>
+              <a:fontRef idx="minor">
+                <a:schemeClr val="lt1"/>
+              </a:fontRef>
+            </p:style>
+            <p:txBody>
+              <a:bodyPr rtlCol="0" anchor="ctr"/>
+              <a:lstStyle/>
+              <a:p>
+                <a:r>
+                  <a:rPr lang="en-US" sz="2000" dirty="0">
+                    <a:solidFill>
+                      <a:schemeClr val="tx1"/>
+                    </a:solidFill>
+                  </a:rPr>
+                  <a:t>wait</a:t>
+                </a:r>
+              </a:p>
+            </p:txBody>
+          </p:sp>
+        </p:grpSp>
+        <p:grpSp>
+          <p:nvGrpSpPr>
+            <p:cNvPr id="53" name="Group 52">
+              <a:extLst>
+                <a:ext uri="{FF2B5EF4-FFF2-40B4-BE49-F238E27FC236}">
+                  <a16:creationId xmlns:a16="http://schemas.microsoft.com/office/drawing/2014/main" id="{B0F02838-D0F8-BD56-D733-FEDFE2B23448}"/>
+                </a:ext>
+              </a:extLst>
+            </p:cNvPr>
+            <p:cNvGrpSpPr/>
+            <p:nvPr/>
+          </p:nvGrpSpPr>
+          <p:grpSpPr>
+            <a:xfrm>
+              <a:off x="880134" y="4710833"/>
+              <a:ext cx="4822166" cy="494722"/>
+              <a:chOff x="575334" y="4406033"/>
+              <a:chExt cx="4822166" cy="494722"/>
+            </a:xfrm>
+          </p:grpSpPr>
+          <p:sp>
+            <p:nvSpPr>
+              <p:cNvPr id="54" name="Rectangle 53">
+                <a:extLst>
+                  <a:ext uri="{FF2B5EF4-FFF2-40B4-BE49-F238E27FC236}">
+                    <a16:creationId xmlns:a16="http://schemas.microsoft.com/office/drawing/2014/main" id="{08972302-CCB6-9709-0572-0B9CCE455266}"/>
+                  </a:ext>
+                </a:extLst>
+              </p:cNvPr>
+              <p:cNvSpPr/>
+              <p:nvPr/>
+            </p:nvSpPr>
+            <p:spPr>
+              <a:xfrm>
+                <a:off x="575334" y="4425604"/>
+                <a:ext cx="1320800" cy="442534"/>
+              </a:xfrm>
+              <a:prstGeom prst="rect">
+                <a:avLst/>
+              </a:prstGeom>
+              <a:ln/>
+            </p:spPr>
+            <p:style>
+              <a:lnRef idx="1">
+                <a:schemeClr val="accent6"/>
+              </a:lnRef>
+              <a:fillRef idx="2">
+                <a:schemeClr val="accent6"/>
+              </a:fillRef>
+              <a:effectRef idx="1">
+                <a:schemeClr val="accent6"/>
+              </a:effectRef>
+              <a:fontRef idx="minor">
+                <a:schemeClr val="dk1"/>
+              </a:fontRef>
+            </p:style>
+            <p:txBody>
+              <a:bodyPr rtlCol="0" anchor="ctr"/>
+              <a:lstStyle/>
+              <a:p>
+                <a:r>
+                  <a:rPr lang="en-US" sz="2000" dirty="0">
+                    <a:solidFill>
+                      <a:schemeClr val="tx1"/>
+                    </a:solidFill>
+                  </a:rPr>
+                  <a:t>send</a:t>
+                </a:r>
+              </a:p>
+            </p:txBody>
+          </p:sp>
+          <p:sp>
+            <p:nvSpPr>
+              <p:cNvPr id="55" name="Rectangle 54">
+                <a:extLst>
+                  <a:ext uri="{FF2B5EF4-FFF2-40B4-BE49-F238E27FC236}">
+                    <a16:creationId xmlns:a16="http://schemas.microsoft.com/office/drawing/2014/main" id="{FE22DEE2-3309-56DA-BA98-74B2D7C89158}"/>
+                  </a:ext>
+                </a:extLst>
+              </p:cNvPr>
+              <p:cNvSpPr/>
+              <p:nvPr/>
+            </p:nvSpPr>
+            <p:spPr>
+              <a:xfrm>
+                <a:off x="4163060" y="4432127"/>
+                <a:ext cx="1234440" cy="468628"/>
+              </a:xfrm>
+              <a:prstGeom prst="rect">
+                <a:avLst/>
+              </a:prstGeom>
+              <a:ln/>
+            </p:spPr>
+            <p:style>
+              <a:lnRef idx="1">
+                <a:schemeClr val="accent6"/>
+              </a:lnRef>
+              <a:fillRef idx="2">
+                <a:schemeClr val="accent6"/>
+              </a:fillRef>
+              <a:effectRef idx="1">
+                <a:schemeClr val="accent6"/>
+              </a:effectRef>
+              <a:fontRef idx="minor">
+                <a:schemeClr val="dk1"/>
+              </a:fontRef>
+            </p:style>
+            <p:txBody>
+              <a:bodyPr rtlCol="0" anchor="ctr"/>
+              <a:lstStyle/>
+              <a:p>
+                <a:r>
+                  <a:rPr lang="en-US" sz="2000" dirty="0">
+                    <a:solidFill>
+                      <a:schemeClr val="tx1"/>
+                    </a:solidFill>
+                  </a:rPr>
+                  <a:t>receive</a:t>
+                </a:r>
+              </a:p>
+            </p:txBody>
+          </p:sp>
+          <p:sp>
+            <p:nvSpPr>
+              <p:cNvPr id="56" name="Rectangle 55">
+                <a:extLst>
+                  <a:ext uri="{FF2B5EF4-FFF2-40B4-BE49-F238E27FC236}">
+                    <a16:creationId xmlns:a16="http://schemas.microsoft.com/office/drawing/2014/main" id="{16D55FBC-F6C0-31BD-82FE-3A4A3C3A33FA}"/>
+                  </a:ext>
+                </a:extLst>
+              </p:cNvPr>
+              <p:cNvSpPr/>
+              <p:nvPr/>
+            </p:nvSpPr>
+            <p:spPr>
+              <a:xfrm>
+                <a:off x="1896134" y="4406033"/>
+                <a:ext cx="2251662" cy="468628"/>
+              </a:xfrm>
+              <a:prstGeom prst="rect">
+                <a:avLst/>
+              </a:prstGeom>
+              <a:solidFill>
+                <a:srgbClr val="FFFF00"/>
+              </a:solidFill>
+              <a:ln>
+                <a:solidFill>
+                  <a:srgbClr val="0070C0"/>
+                </a:solidFill>
+              </a:ln>
+            </p:spPr>
+            <p:style>
+              <a:lnRef idx="2">
+                <a:schemeClr val="accent1">
+                  <a:shade val="50000"/>
+                </a:schemeClr>
+              </a:lnRef>
+              <a:fillRef idx="1">
+                <a:schemeClr val="accent1"/>
+              </a:fillRef>
+              <a:effectRef idx="0">
+                <a:schemeClr val="accent1"/>
+              </a:effectRef>
+              <a:fontRef idx="minor">
+                <a:schemeClr val="lt1"/>
+              </a:fontRef>
+            </p:style>
+            <p:txBody>
+              <a:bodyPr rtlCol="0" anchor="ctr"/>
+              <a:lstStyle/>
+              <a:p>
+                <a:r>
+                  <a:rPr lang="en-US" sz="2000" dirty="0">
+                    <a:solidFill>
+                      <a:schemeClr val="tx1"/>
+                    </a:solidFill>
+                  </a:rPr>
+                  <a:t>wait</a:t>
+                </a:r>
+              </a:p>
+            </p:txBody>
+          </p:sp>
+        </p:grpSp>
+        <p:grpSp>
+          <p:nvGrpSpPr>
+            <p:cNvPr id="65" name="Group 64">
+              <a:extLst>
+                <a:ext uri="{FF2B5EF4-FFF2-40B4-BE49-F238E27FC236}">
+                  <a16:creationId xmlns:a16="http://schemas.microsoft.com/office/drawing/2014/main" id="{A600B712-6C6F-51EA-917A-D5B4819DF697}"/>
+                </a:ext>
+              </a:extLst>
+            </p:cNvPr>
+            <p:cNvGrpSpPr/>
+            <p:nvPr/>
+          </p:nvGrpSpPr>
+          <p:grpSpPr>
+            <a:xfrm>
+              <a:off x="728956" y="4248728"/>
+              <a:ext cx="4831080" cy="481674"/>
+              <a:chOff x="1485900" y="2364394"/>
+              <a:chExt cx="4831080" cy="481674"/>
+            </a:xfrm>
+          </p:grpSpPr>
+          <p:sp>
+            <p:nvSpPr>
+              <p:cNvPr id="66" name="Rectangle 65">
+                <a:extLst>
+                  <a:ext uri="{FF2B5EF4-FFF2-40B4-BE49-F238E27FC236}">
+                    <a16:creationId xmlns:a16="http://schemas.microsoft.com/office/drawing/2014/main" id="{862DB715-0EBB-54B0-AFD9-9ECA6240CD8C}"/>
+                  </a:ext>
+                </a:extLst>
+              </p:cNvPr>
+              <p:cNvSpPr/>
+              <p:nvPr/>
+            </p:nvSpPr>
+            <p:spPr>
+              <a:xfrm>
+                <a:off x="1485900" y="2377440"/>
+                <a:ext cx="1234440" cy="468628"/>
+              </a:xfrm>
+              <a:prstGeom prst="rect">
+                <a:avLst/>
+              </a:prstGeom>
+              <a:ln/>
+            </p:spPr>
+            <p:style>
+              <a:lnRef idx="1">
+                <a:schemeClr val="accent6"/>
+              </a:lnRef>
+              <a:fillRef idx="2">
+                <a:schemeClr val="accent6"/>
+              </a:fillRef>
+              <a:effectRef idx="1">
+                <a:schemeClr val="accent6"/>
+              </a:effectRef>
+              <a:fontRef idx="minor">
+                <a:schemeClr val="dk1"/>
+              </a:fontRef>
+            </p:style>
+            <p:txBody>
+              <a:bodyPr rtlCol="0" anchor="ctr"/>
+              <a:lstStyle/>
+              <a:p>
+                <a:r>
+                  <a:rPr lang="en-US" sz="2000" dirty="0">
+                    <a:solidFill>
+                      <a:schemeClr val="tx1"/>
+                    </a:solidFill>
+                  </a:rPr>
+                  <a:t>send</a:t>
+                </a:r>
+              </a:p>
+            </p:txBody>
+          </p:sp>
+          <p:sp>
+            <p:nvSpPr>
+              <p:cNvPr id="67" name="Rectangle 66">
+                <a:extLst>
+                  <a:ext uri="{FF2B5EF4-FFF2-40B4-BE49-F238E27FC236}">
+                    <a16:creationId xmlns:a16="http://schemas.microsoft.com/office/drawing/2014/main" id="{D1E2B88A-0509-42E4-DF5D-AECD08D1DB35}"/>
+                  </a:ext>
+                </a:extLst>
+              </p:cNvPr>
+              <p:cNvSpPr/>
+              <p:nvPr/>
+            </p:nvSpPr>
+            <p:spPr>
+              <a:xfrm>
+                <a:off x="5082540" y="2364394"/>
+                <a:ext cx="1234440" cy="468628"/>
+              </a:xfrm>
+              <a:prstGeom prst="rect">
+                <a:avLst/>
+              </a:prstGeom>
+              <a:ln/>
+            </p:spPr>
+            <p:style>
+              <a:lnRef idx="1">
+                <a:schemeClr val="accent6"/>
+              </a:lnRef>
+              <a:fillRef idx="2">
+                <a:schemeClr val="accent6"/>
+              </a:fillRef>
+              <a:effectRef idx="1">
+                <a:schemeClr val="accent6"/>
+              </a:effectRef>
+              <a:fontRef idx="minor">
+                <a:schemeClr val="dk1"/>
+              </a:fontRef>
+            </p:style>
+            <p:txBody>
+              <a:bodyPr rtlCol="0" anchor="ctr"/>
+              <a:lstStyle/>
+              <a:p>
+                <a:r>
+                  <a:rPr lang="en-US" sz="2000" dirty="0">
+                    <a:solidFill>
+                      <a:schemeClr val="tx1"/>
+                    </a:solidFill>
+                  </a:rPr>
+                  <a:t>receive</a:t>
+                </a:r>
+              </a:p>
+            </p:txBody>
+          </p:sp>
+          <p:sp>
+            <p:nvSpPr>
+              <p:cNvPr id="68" name="Rectangle 67">
+                <a:extLst>
+                  <a:ext uri="{FF2B5EF4-FFF2-40B4-BE49-F238E27FC236}">
+                    <a16:creationId xmlns:a16="http://schemas.microsoft.com/office/drawing/2014/main" id="{6DB95BA2-2788-85B7-A0E1-A4F9F29D5EF4}"/>
+                  </a:ext>
+                </a:extLst>
+              </p:cNvPr>
+              <p:cNvSpPr/>
+              <p:nvPr/>
+            </p:nvSpPr>
+            <p:spPr>
+              <a:xfrm>
+                <a:off x="2720340" y="2377440"/>
+                <a:ext cx="2338022" cy="468628"/>
+              </a:xfrm>
+              <a:prstGeom prst="rect">
+                <a:avLst/>
+              </a:prstGeom>
+              <a:solidFill>
+                <a:srgbClr val="FFFF00"/>
+              </a:solidFill>
+              <a:ln>
+                <a:solidFill>
+                  <a:srgbClr val="0070C0"/>
+                </a:solidFill>
+              </a:ln>
+            </p:spPr>
+            <p:style>
+              <a:lnRef idx="2">
+                <a:schemeClr val="accent1">
+                  <a:shade val="50000"/>
+                </a:schemeClr>
+              </a:lnRef>
+              <a:fillRef idx="1">
+                <a:schemeClr val="accent1"/>
+              </a:fillRef>
+              <a:effectRef idx="0">
+                <a:schemeClr val="accent1"/>
+              </a:effectRef>
+              <a:fontRef idx="minor">
+                <a:schemeClr val="lt1"/>
+              </a:fontRef>
+            </p:style>
+            <p:txBody>
+              <a:bodyPr rtlCol="0" anchor="ctr"/>
+              <a:lstStyle/>
+              <a:p>
+                <a:r>
+                  <a:rPr lang="en-US" sz="2000" dirty="0">
+                    <a:solidFill>
+                      <a:schemeClr val="tx1"/>
+                    </a:solidFill>
+                  </a:rPr>
+                  <a:t>wait</a:t>
+                </a:r>
+              </a:p>
+            </p:txBody>
+          </p:sp>
+        </p:grpSp>
+      </p:grpSp>
+      <p:grpSp>
+        <p:nvGrpSpPr>
+          <p:cNvPr id="86" name="Group 85">
+            <a:extLst>
+              <a:ext uri="{FF2B5EF4-FFF2-40B4-BE49-F238E27FC236}">
+                <a16:creationId xmlns:a16="http://schemas.microsoft.com/office/drawing/2014/main" id="{5176B963-A4DF-0123-9888-C475085E882C}"/>
+              </a:ext>
+            </a:extLst>
+          </p:cNvPr>
+          <p:cNvGrpSpPr/>
+          <p:nvPr/>
+        </p:nvGrpSpPr>
+        <p:grpSpPr>
+          <a:xfrm>
+            <a:off x="204422" y="2825268"/>
+            <a:ext cx="11603265" cy="429918"/>
+            <a:chOff x="275566" y="2038843"/>
+            <a:chExt cx="13845540" cy="475151"/>
+          </a:xfrm>
+        </p:grpSpPr>
+        <p:grpSp>
+          <p:nvGrpSpPr>
+            <p:cNvPr id="70" name="Group 69">
+              <a:extLst>
+                <a:ext uri="{FF2B5EF4-FFF2-40B4-BE49-F238E27FC236}">
+                  <a16:creationId xmlns:a16="http://schemas.microsoft.com/office/drawing/2014/main" id="{E0C733AD-12E5-5746-0B25-760C18C4E98F}"/>
+                </a:ext>
+              </a:extLst>
+            </p:cNvPr>
+            <p:cNvGrpSpPr/>
+            <p:nvPr/>
+          </p:nvGrpSpPr>
+          <p:grpSpPr>
+            <a:xfrm>
+              <a:off x="275566" y="2038843"/>
+              <a:ext cx="4610100" cy="468628"/>
+              <a:chOff x="1485900" y="2377440"/>
+              <a:chExt cx="4610100" cy="468628"/>
+            </a:xfrm>
+          </p:grpSpPr>
+          <p:sp>
+            <p:nvSpPr>
+              <p:cNvPr id="71" name="Rectangle 70">
+                <a:extLst>
+                  <a:ext uri="{FF2B5EF4-FFF2-40B4-BE49-F238E27FC236}">
+                    <a16:creationId xmlns:a16="http://schemas.microsoft.com/office/drawing/2014/main" id="{85B21E4C-FD23-F42D-3BAD-EF62DF4A932B}"/>
+                  </a:ext>
+                </a:extLst>
+              </p:cNvPr>
+              <p:cNvSpPr/>
+              <p:nvPr/>
+            </p:nvSpPr>
+            <p:spPr>
+              <a:xfrm>
+                <a:off x="1485900" y="2377440"/>
+                <a:ext cx="1234440" cy="468628"/>
+              </a:xfrm>
+              <a:prstGeom prst="rect">
+                <a:avLst/>
+              </a:prstGeom>
+              <a:ln/>
+            </p:spPr>
+            <p:style>
+              <a:lnRef idx="1">
+                <a:schemeClr val="accent6"/>
+              </a:lnRef>
+              <a:fillRef idx="2">
+                <a:schemeClr val="accent6"/>
+              </a:fillRef>
+              <a:effectRef idx="1">
+                <a:schemeClr val="accent6"/>
+              </a:effectRef>
+              <a:fontRef idx="minor">
+                <a:schemeClr val="dk1"/>
+              </a:fontRef>
+            </p:style>
+            <p:txBody>
+              <a:bodyPr rtlCol="0" anchor="ctr"/>
+              <a:lstStyle/>
+              <a:p>
+                <a:r>
+                  <a:rPr lang="en-US" sz="2000" dirty="0">
+                    <a:solidFill>
+                      <a:schemeClr val="tx1"/>
+                    </a:solidFill>
+                  </a:rPr>
+                  <a:t>send</a:t>
+                </a:r>
+              </a:p>
+            </p:txBody>
+          </p:sp>
+          <p:sp>
+            <p:nvSpPr>
+              <p:cNvPr id="72" name="Rectangle 71">
+                <a:extLst>
+                  <a:ext uri="{FF2B5EF4-FFF2-40B4-BE49-F238E27FC236}">
+                    <a16:creationId xmlns:a16="http://schemas.microsoft.com/office/drawing/2014/main" id="{BD9EEAB6-370C-9AD5-7988-28FA7420DCB8}"/>
+                  </a:ext>
+                </a:extLst>
+              </p:cNvPr>
+              <p:cNvSpPr/>
+              <p:nvPr/>
+            </p:nvSpPr>
+            <p:spPr>
+              <a:xfrm>
+                <a:off x="4861560" y="2377440"/>
+                <a:ext cx="1234440" cy="468628"/>
+              </a:xfrm>
+              <a:prstGeom prst="rect">
+                <a:avLst/>
+              </a:prstGeom>
+              <a:ln/>
+            </p:spPr>
+            <p:style>
+              <a:lnRef idx="1">
+                <a:schemeClr val="accent6"/>
+              </a:lnRef>
+              <a:fillRef idx="2">
+                <a:schemeClr val="accent6"/>
+              </a:fillRef>
+              <a:effectRef idx="1">
+                <a:schemeClr val="accent6"/>
+              </a:effectRef>
+              <a:fontRef idx="minor">
+                <a:schemeClr val="dk1"/>
+              </a:fontRef>
+            </p:style>
+            <p:txBody>
+              <a:bodyPr rtlCol="0" anchor="ctr"/>
+              <a:lstStyle/>
+              <a:p>
+                <a:r>
+                  <a:rPr lang="en-US" sz="2000" dirty="0">
+                    <a:solidFill>
+                      <a:schemeClr val="tx1"/>
+                    </a:solidFill>
+                  </a:rPr>
+                  <a:t>receive</a:t>
+                </a:r>
+              </a:p>
+            </p:txBody>
+          </p:sp>
+          <p:sp>
+            <p:nvSpPr>
+              <p:cNvPr id="73" name="Rectangle 72">
+                <a:extLst>
+                  <a:ext uri="{FF2B5EF4-FFF2-40B4-BE49-F238E27FC236}">
+                    <a16:creationId xmlns:a16="http://schemas.microsoft.com/office/drawing/2014/main" id="{C65B9EA3-31C4-ADF8-50E0-A1A1094B5F0B}"/>
+                  </a:ext>
+                </a:extLst>
+              </p:cNvPr>
+              <p:cNvSpPr/>
+              <p:nvPr/>
+            </p:nvSpPr>
+            <p:spPr>
+              <a:xfrm>
+                <a:off x="2720340" y="2377440"/>
+                <a:ext cx="2141220" cy="468628"/>
+              </a:xfrm>
+              <a:prstGeom prst="rect">
+                <a:avLst/>
+              </a:prstGeom>
+              <a:solidFill>
+                <a:srgbClr val="FFFF00"/>
+              </a:solidFill>
+              <a:ln>
+                <a:solidFill>
+                  <a:srgbClr val="0070C0"/>
+                </a:solidFill>
+              </a:ln>
+            </p:spPr>
+            <p:style>
+              <a:lnRef idx="2">
+                <a:schemeClr val="accent1">
+                  <a:shade val="50000"/>
+                </a:schemeClr>
+              </a:lnRef>
+              <a:fillRef idx="1">
+                <a:schemeClr val="accent1"/>
+              </a:fillRef>
+              <a:effectRef idx="0">
+                <a:schemeClr val="accent1"/>
+              </a:effectRef>
+              <a:fontRef idx="minor">
+                <a:schemeClr val="lt1"/>
+              </a:fontRef>
+            </p:style>
+            <p:txBody>
+              <a:bodyPr rtlCol="0" anchor="ctr"/>
+              <a:lstStyle/>
+              <a:p>
+                <a:r>
+                  <a:rPr lang="en-US" sz="2000" dirty="0">
+                    <a:solidFill>
+                      <a:schemeClr val="tx1"/>
+                    </a:solidFill>
+                  </a:rPr>
+                  <a:t>wait</a:t>
+                </a:r>
+              </a:p>
+            </p:txBody>
+          </p:sp>
+        </p:grpSp>
+        <p:grpSp>
+          <p:nvGrpSpPr>
+            <p:cNvPr id="74" name="Group 73">
+              <a:extLst>
+                <a:ext uri="{FF2B5EF4-FFF2-40B4-BE49-F238E27FC236}">
+                  <a16:creationId xmlns:a16="http://schemas.microsoft.com/office/drawing/2014/main" id="{180C92F6-CD87-BB94-A89C-06FD23E46891}"/>
+                </a:ext>
+              </a:extLst>
+            </p:cNvPr>
+            <p:cNvGrpSpPr/>
+            <p:nvPr/>
+          </p:nvGrpSpPr>
+          <p:grpSpPr>
+            <a:xfrm>
+              <a:off x="4885666" y="2038843"/>
+              <a:ext cx="4610100" cy="468628"/>
+              <a:chOff x="1485900" y="2332079"/>
+              <a:chExt cx="4610100" cy="468628"/>
+            </a:xfrm>
+          </p:grpSpPr>
+          <p:sp>
+            <p:nvSpPr>
+              <p:cNvPr id="75" name="Rectangle 74">
+                <a:extLst>
+                  <a:ext uri="{FF2B5EF4-FFF2-40B4-BE49-F238E27FC236}">
+                    <a16:creationId xmlns:a16="http://schemas.microsoft.com/office/drawing/2014/main" id="{983D0E3A-D112-0196-149D-C9315AEC3E70}"/>
+                  </a:ext>
+                </a:extLst>
+              </p:cNvPr>
+              <p:cNvSpPr/>
+              <p:nvPr/>
+            </p:nvSpPr>
+            <p:spPr>
+              <a:xfrm>
+                <a:off x="1485900" y="2332079"/>
+                <a:ext cx="1234440" cy="468628"/>
+              </a:xfrm>
+              <a:prstGeom prst="rect">
+                <a:avLst/>
+              </a:prstGeom>
+              <a:ln/>
+            </p:spPr>
+            <p:style>
+              <a:lnRef idx="1">
+                <a:schemeClr val="accent6"/>
+              </a:lnRef>
+              <a:fillRef idx="2">
+                <a:schemeClr val="accent6"/>
+              </a:fillRef>
+              <a:effectRef idx="1">
+                <a:schemeClr val="accent6"/>
+              </a:effectRef>
+              <a:fontRef idx="minor">
+                <a:schemeClr val="dk1"/>
+              </a:fontRef>
+            </p:style>
+            <p:txBody>
+              <a:bodyPr rtlCol="0" anchor="ctr"/>
+              <a:lstStyle/>
+              <a:p>
+                <a:r>
+                  <a:rPr lang="en-US" sz="2000" dirty="0">
+                    <a:solidFill>
+                      <a:schemeClr val="tx1"/>
+                    </a:solidFill>
+                  </a:rPr>
+                  <a:t>send</a:t>
+                </a:r>
+              </a:p>
+            </p:txBody>
+          </p:sp>
+          <p:sp>
+            <p:nvSpPr>
+              <p:cNvPr id="76" name="Rectangle 75">
+                <a:extLst>
+                  <a:ext uri="{FF2B5EF4-FFF2-40B4-BE49-F238E27FC236}">
+                    <a16:creationId xmlns:a16="http://schemas.microsoft.com/office/drawing/2014/main" id="{6B2979F7-47F3-CFFE-95CB-75E0CEB0E6D7}"/>
+                  </a:ext>
+                </a:extLst>
+              </p:cNvPr>
+              <p:cNvSpPr/>
+              <p:nvPr/>
+            </p:nvSpPr>
+            <p:spPr>
+              <a:xfrm>
+                <a:off x="4861560" y="2332079"/>
+                <a:ext cx="1234440" cy="468628"/>
+              </a:xfrm>
+              <a:prstGeom prst="rect">
+                <a:avLst/>
+              </a:prstGeom>
+              <a:ln/>
+            </p:spPr>
+            <p:style>
+              <a:lnRef idx="1">
+                <a:schemeClr val="accent6"/>
+              </a:lnRef>
+              <a:fillRef idx="2">
+                <a:schemeClr val="accent6"/>
+              </a:fillRef>
+              <a:effectRef idx="1">
+                <a:schemeClr val="accent6"/>
+              </a:effectRef>
+              <a:fontRef idx="minor">
+                <a:schemeClr val="dk1"/>
+              </a:fontRef>
+            </p:style>
+            <p:txBody>
+              <a:bodyPr rtlCol="0" anchor="ctr"/>
+              <a:lstStyle/>
+              <a:p>
+                <a:r>
+                  <a:rPr lang="en-US" sz="2000" dirty="0">
+                    <a:solidFill>
+                      <a:schemeClr val="tx1"/>
+                    </a:solidFill>
+                  </a:rPr>
+                  <a:t>receive</a:t>
+                </a:r>
+              </a:p>
+            </p:txBody>
+          </p:sp>
+          <p:sp>
+            <p:nvSpPr>
+              <p:cNvPr id="77" name="Rectangle 76">
+                <a:extLst>
+                  <a:ext uri="{FF2B5EF4-FFF2-40B4-BE49-F238E27FC236}">
+                    <a16:creationId xmlns:a16="http://schemas.microsoft.com/office/drawing/2014/main" id="{D03FA558-2930-6B67-F8D3-BF32899EC7CC}"/>
+                  </a:ext>
+                </a:extLst>
+              </p:cNvPr>
+              <p:cNvSpPr/>
+              <p:nvPr/>
+            </p:nvSpPr>
+            <p:spPr>
+              <a:xfrm>
+                <a:off x="2720340" y="2332079"/>
+                <a:ext cx="2141220" cy="468628"/>
+              </a:xfrm>
+              <a:prstGeom prst="rect">
+                <a:avLst/>
+              </a:prstGeom>
+              <a:solidFill>
+                <a:srgbClr val="FFFF00"/>
+              </a:solidFill>
+              <a:ln>
+                <a:solidFill>
+                  <a:srgbClr val="0070C0"/>
+                </a:solidFill>
+              </a:ln>
+            </p:spPr>
+            <p:style>
+              <a:lnRef idx="2">
+                <a:schemeClr val="accent1">
+                  <a:shade val="50000"/>
+                </a:schemeClr>
+              </a:lnRef>
+              <a:fillRef idx="1">
+                <a:schemeClr val="accent1"/>
+              </a:fillRef>
+              <a:effectRef idx="0">
+                <a:schemeClr val="accent1"/>
+              </a:effectRef>
+              <a:fontRef idx="minor">
+                <a:schemeClr val="lt1"/>
+              </a:fontRef>
+            </p:style>
+            <p:txBody>
+              <a:bodyPr rtlCol="0" anchor="ctr"/>
+              <a:lstStyle/>
+              <a:p>
+                <a:r>
+                  <a:rPr lang="en-US" sz="2000" dirty="0">
+                    <a:solidFill>
+                      <a:schemeClr val="tx1"/>
+                    </a:solidFill>
+                  </a:rPr>
+                  <a:t>wait</a:t>
+                </a:r>
+              </a:p>
+            </p:txBody>
+          </p:sp>
+        </p:grpSp>
+        <p:grpSp>
+          <p:nvGrpSpPr>
+            <p:cNvPr id="78" name="Group 77">
+              <a:extLst>
+                <a:ext uri="{FF2B5EF4-FFF2-40B4-BE49-F238E27FC236}">
+                  <a16:creationId xmlns:a16="http://schemas.microsoft.com/office/drawing/2014/main" id="{76F58E3A-2CE8-8D4B-3265-99CE2E26F836}"/>
+                </a:ext>
+              </a:extLst>
+            </p:cNvPr>
+            <p:cNvGrpSpPr/>
+            <p:nvPr/>
+          </p:nvGrpSpPr>
+          <p:grpSpPr>
+            <a:xfrm>
+              <a:off x="9511006" y="2045366"/>
+              <a:ext cx="4610100" cy="468628"/>
+              <a:chOff x="1485900" y="2377440"/>
+              <a:chExt cx="4610100" cy="468628"/>
+            </a:xfrm>
+          </p:grpSpPr>
+          <p:sp>
+            <p:nvSpPr>
+              <p:cNvPr id="79" name="Rectangle 78">
+                <a:extLst>
+                  <a:ext uri="{FF2B5EF4-FFF2-40B4-BE49-F238E27FC236}">
+                    <a16:creationId xmlns:a16="http://schemas.microsoft.com/office/drawing/2014/main" id="{07931022-8389-65A1-CE37-D4C119DFD595}"/>
+                  </a:ext>
+                </a:extLst>
+              </p:cNvPr>
+              <p:cNvSpPr/>
+              <p:nvPr/>
+            </p:nvSpPr>
+            <p:spPr>
+              <a:xfrm>
+                <a:off x="1485900" y="2377440"/>
+                <a:ext cx="1234440" cy="468628"/>
+              </a:xfrm>
+              <a:prstGeom prst="rect">
+                <a:avLst/>
+              </a:prstGeom>
+              <a:ln/>
+            </p:spPr>
+            <p:style>
+              <a:lnRef idx="1">
+                <a:schemeClr val="accent6"/>
+              </a:lnRef>
+              <a:fillRef idx="2">
+                <a:schemeClr val="accent6"/>
+              </a:fillRef>
+              <a:effectRef idx="1">
+                <a:schemeClr val="accent6"/>
+              </a:effectRef>
+              <a:fontRef idx="minor">
+                <a:schemeClr val="dk1"/>
+              </a:fontRef>
+            </p:style>
+            <p:txBody>
+              <a:bodyPr rtlCol="0" anchor="ctr"/>
+              <a:lstStyle/>
+              <a:p>
+                <a:r>
+                  <a:rPr lang="en-US" sz="2000" dirty="0">
+                    <a:solidFill>
+                      <a:schemeClr val="tx1"/>
+                    </a:solidFill>
+                  </a:rPr>
+                  <a:t>send</a:t>
+                </a:r>
+              </a:p>
+            </p:txBody>
+          </p:sp>
+          <p:sp>
+            <p:nvSpPr>
+              <p:cNvPr id="80" name="Rectangle 79">
+                <a:extLst>
+                  <a:ext uri="{FF2B5EF4-FFF2-40B4-BE49-F238E27FC236}">
+                    <a16:creationId xmlns:a16="http://schemas.microsoft.com/office/drawing/2014/main" id="{771578F2-CE5B-DF8D-C1CC-D99DFFB94300}"/>
+                  </a:ext>
+                </a:extLst>
+              </p:cNvPr>
+              <p:cNvSpPr/>
+              <p:nvPr/>
+            </p:nvSpPr>
+            <p:spPr>
+              <a:xfrm>
+                <a:off x="4861560" y="2377440"/>
+                <a:ext cx="1234440" cy="468628"/>
+              </a:xfrm>
+              <a:prstGeom prst="rect">
+                <a:avLst/>
+              </a:prstGeom>
+              <a:ln/>
+            </p:spPr>
+            <p:style>
+              <a:lnRef idx="1">
+                <a:schemeClr val="accent6"/>
+              </a:lnRef>
+              <a:fillRef idx="2">
+                <a:schemeClr val="accent6"/>
+              </a:fillRef>
+              <a:effectRef idx="1">
+                <a:schemeClr val="accent6"/>
+              </a:effectRef>
+              <a:fontRef idx="minor">
+                <a:schemeClr val="dk1"/>
+              </a:fontRef>
+            </p:style>
+            <p:txBody>
+              <a:bodyPr rtlCol="0" anchor="ctr"/>
+              <a:lstStyle/>
+              <a:p>
+                <a:r>
+                  <a:rPr lang="en-US" sz="2000" dirty="0">
+                    <a:solidFill>
+                      <a:schemeClr val="tx1"/>
+                    </a:solidFill>
+                  </a:rPr>
+                  <a:t>receive</a:t>
+                </a:r>
+              </a:p>
+            </p:txBody>
+          </p:sp>
+          <p:sp>
+            <p:nvSpPr>
+              <p:cNvPr id="81" name="Rectangle 80">
+                <a:extLst>
+                  <a:ext uri="{FF2B5EF4-FFF2-40B4-BE49-F238E27FC236}">
+                    <a16:creationId xmlns:a16="http://schemas.microsoft.com/office/drawing/2014/main" id="{B780C2A3-31AD-CA5B-7C22-CE977052038C}"/>
+                  </a:ext>
+                </a:extLst>
+              </p:cNvPr>
+              <p:cNvSpPr/>
+              <p:nvPr/>
+            </p:nvSpPr>
+            <p:spPr>
+              <a:xfrm>
+                <a:off x="2720340" y="2377440"/>
+                <a:ext cx="2141220" cy="468628"/>
+              </a:xfrm>
+              <a:prstGeom prst="rect">
+                <a:avLst/>
+              </a:prstGeom>
+              <a:solidFill>
+                <a:srgbClr val="FFFF00"/>
+              </a:solidFill>
+              <a:ln>
+                <a:solidFill>
+                  <a:srgbClr val="0070C0"/>
+                </a:solidFill>
+              </a:ln>
+            </p:spPr>
+            <p:style>
+              <a:lnRef idx="2">
+                <a:schemeClr val="accent1">
+                  <a:shade val="50000"/>
+                </a:schemeClr>
+              </a:lnRef>
+              <a:fillRef idx="1">
+                <a:schemeClr val="accent1"/>
+              </a:fillRef>
+              <a:effectRef idx="0">
+                <a:schemeClr val="accent1"/>
+              </a:effectRef>
+              <a:fontRef idx="minor">
+                <a:schemeClr val="lt1"/>
+              </a:fontRef>
+            </p:style>
+            <p:txBody>
+              <a:bodyPr rtlCol="0" anchor="ctr"/>
+              <a:lstStyle/>
+              <a:p>
+                <a:r>
+                  <a:rPr lang="en-US" sz="2000" dirty="0">
+                    <a:solidFill>
+                      <a:schemeClr val="tx1"/>
+                    </a:solidFill>
+                  </a:rPr>
+                  <a:t>wait</a:t>
+                </a:r>
+              </a:p>
+            </p:txBody>
+          </p:sp>
+        </p:grpSp>
+      </p:grpSp>
+      <p:sp>
+        <p:nvSpPr>
+          <p:cNvPr id="83" name="TextBox 82">
+            <a:extLst>
+              <a:ext uri="{FF2B5EF4-FFF2-40B4-BE49-F238E27FC236}">
+                <a16:creationId xmlns:a16="http://schemas.microsoft.com/office/drawing/2014/main" id="{289CE299-DF50-7F29-AADE-259F205F8158}"/>
+              </a:ext>
+            </a:extLst>
+          </p:cNvPr>
+          <p:cNvSpPr txBox="1"/>
+          <p:nvPr/>
+        </p:nvSpPr>
+        <p:spPr>
+          <a:xfrm>
+            <a:off x="2354508" y="1645677"/>
+            <a:ext cx="3020084" cy="914400"/>
+          </a:xfrm>
+          <a:prstGeom prst="rect">
+            <a:avLst/>
+          </a:prstGeom>
+          <a:noFill/>
+          <a:ln>
+            <a:noFill/>
+          </a:ln>
+        </p:spPr>
+        <p:style>
+          <a:lnRef idx="2">
+            <a:schemeClr val="accent1">
+              <a:shade val="50000"/>
+            </a:schemeClr>
+          </a:lnRef>
+          <a:fillRef idx="1">
+            <a:schemeClr val="accent1"/>
+          </a:fillRef>
+          <a:effectRef idx="0">
+            <a:schemeClr val="accent1"/>
+          </a:effectRef>
+          <a:fontRef idx="minor">
+            <a:schemeClr val="lt1"/>
+          </a:fontRef>
+        </p:style>
+        <p:txBody>
+          <a:bodyPr rot="0" spcFirstLastPara="0" vertOverflow="overflow" horzOverflow="overflow" vert="horz" wrap="none" lIns="91440" tIns="45720" rIns="91440" bIns="45720" numCol="1" spcCol="0" rtlCol="0" fromWordArt="0" anchor="ctr" anchorCtr="0" forceAA="0" compatLnSpc="1">
+            <a:prstTxWarp prst="textNoShape">
+              <a:avLst/>
+            </a:prstTxWarp>
+            <a:noAutofit/>
+          </a:bodyPr>
+          <a:lstStyle/>
+          <a:p>
+            <a:pPr algn="l"/>
+            <a:r>
+              <a:rPr lang="en-US" sz="2400" dirty="0">
+                <a:solidFill>
+                  <a:schemeClr val="tx1"/>
+                </a:solidFill>
+                <a:latin typeface="Verdana" panose="020B0604030504040204" pitchFamily="34" charset="0"/>
+                <a:ea typeface="Verdana" panose="020B0604030504040204" pitchFamily="34" charset="0"/>
+              </a:rPr>
+              <a:t>Sequential (await)</a:t>
+            </a:r>
+          </a:p>
+        </p:txBody>
+      </p:sp>
+      <p:sp>
+        <p:nvSpPr>
+          <p:cNvPr id="84" name="TextBox 83">
+            <a:extLst>
+              <a:ext uri="{FF2B5EF4-FFF2-40B4-BE49-F238E27FC236}">
+                <a16:creationId xmlns:a16="http://schemas.microsoft.com/office/drawing/2014/main" id="{75DA8819-1E1F-21D0-D328-BA212D0F69E0}"/>
+              </a:ext>
+            </a:extLst>
+          </p:cNvPr>
+          <p:cNvSpPr txBox="1"/>
+          <p:nvPr/>
+        </p:nvSpPr>
+        <p:spPr>
+          <a:xfrm>
+            <a:off x="2360810" y="3841707"/>
+            <a:ext cx="3782084" cy="914400"/>
+          </a:xfrm>
+          <a:prstGeom prst="rect">
+            <a:avLst/>
+          </a:prstGeom>
+          <a:noFill/>
+          <a:ln>
+            <a:noFill/>
+          </a:ln>
+        </p:spPr>
+        <p:style>
+          <a:lnRef idx="2">
+            <a:schemeClr val="accent1">
+              <a:shade val="50000"/>
+            </a:schemeClr>
+          </a:lnRef>
+          <a:fillRef idx="1">
+            <a:schemeClr val="accent1"/>
+          </a:fillRef>
+          <a:effectRef idx="0">
+            <a:schemeClr val="accent1"/>
+          </a:effectRef>
+          <a:fontRef idx="minor">
+            <a:schemeClr val="lt1"/>
+          </a:fontRef>
+        </p:style>
+        <p:txBody>
+          <a:bodyPr rot="0" spcFirstLastPara="0" vertOverflow="overflow" horzOverflow="overflow" vert="horz" wrap="none" lIns="91440" tIns="45720" rIns="91440" bIns="45720" numCol="1" spcCol="0" rtlCol="0" fromWordArt="0" anchor="ctr" anchorCtr="0" forceAA="0" compatLnSpc="1">
+            <a:prstTxWarp prst="textNoShape">
+              <a:avLst/>
+            </a:prstTxWarp>
+            <a:noAutofit/>
+          </a:bodyPr>
+          <a:lstStyle/>
+          <a:p>
+            <a:pPr algn="l"/>
+            <a:r>
+              <a:rPr lang="en-US" sz="2400" dirty="0">
+                <a:solidFill>
+                  <a:schemeClr val="tx1"/>
+                </a:solidFill>
+                <a:latin typeface="Verdana" panose="020B0604030504040204" pitchFamily="34" charset="0"/>
+                <a:ea typeface="Verdana" panose="020B0604030504040204" pitchFamily="34" charset="0"/>
+              </a:rPr>
+              <a:t>Concurrent (</a:t>
+            </a:r>
+            <a:r>
+              <a:rPr lang="en-US" sz="2400" dirty="0" err="1">
+                <a:solidFill>
+                  <a:schemeClr val="tx1"/>
+                </a:solidFill>
+                <a:latin typeface="Verdana" panose="020B0604030504040204" pitchFamily="34" charset="0"/>
+                <a:ea typeface="Verdana" panose="020B0604030504040204" pitchFamily="34" charset="0"/>
+              </a:rPr>
+              <a:t>Promise.all</a:t>
+            </a:r>
+            <a:r>
+              <a:rPr lang="en-US" sz="2400" dirty="0">
+                <a:solidFill>
+                  <a:schemeClr val="tx1"/>
+                </a:solidFill>
+                <a:latin typeface="Verdana" panose="020B0604030504040204" pitchFamily="34" charset="0"/>
+                <a:ea typeface="Verdana" panose="020B0604030504040204" pitchFamily="34" charset="0"/>
+              </a:rPr>
+              <a:t>)</a:t>
+            </a:r>
+          </a:p>
+        </p:txBody>
+      </p:sp>
+      <p:sp>
+        <p:nvSpPr>
+          <p:cNvPr id="85" name="TextBox 84">
+            <a:extLst>
+              <a:ext uri="{FF2B5EF4-FFF2-40B4-BE49-F238E27FC236}">
+                <a16:creationId xmlns:a16="http://schemas.microsoft.com/office/drawing/2014/main" id="{F53C8640-347D-C02C-2069-65D5C148A1A9}"/>
+              </a:ext>
+            </a:extLst>
+          </p:cNvPr>
+          <p:cNvSpPr txBox="1"/>
+          <p:nvPr/>
+        </p:nvSpPr>
+        <p:spPr>
+          <a:xfrm>
+            <a:off x="5821608" y="1497583"/>
+            <a:ext cx="3925004" cy="1210588"/>
+          </a:xfrm>
+          <a:prstGeom prst="rect">
+            <a:avLst/>
+          </a:prstGeom>
+          <a:ln/>
+        </p:spPr>
+        <p:style>
+          <a:lnRef idx="2">
+            <a:schemeClr val="dk1"/>
+          </a:lnRef>
+          <a:fillRef idx="1">
+            <a:schemeClr val="lt1"/>
+          </a:fillRef>
+          <a:effectRef idx="0">
+            <a:schemeClr val="dk1"/>
+          </a:effectRef>
+          <a:fontRef idx="minor">
+            <a:schemeClr val="dk1"/>
+          </a:fontRef>
+        </p:style>
+        <p:txBody>
+          <a:bodyPr rot="0" spcFirstLastPara="1" vertOverflow="overflow" horzOverflow="overflow" vert="horz" wrap="square" lIns="50800" tIns="50800" rIns="50800" bIns="50800" numCol="1" spcCol="38100" rtlCol="0" anchor="ctr">
+            <a:spAutoFit/>
+          </a:bodyPr>
+          <a:lstStyle/>
+          <a:p>
+            <a:pPr marL="0" marR="0" indent="0" algn="ctr" defTabSz="2438338" rtl="0" fontAlgn="auto" latinLnBrk="0" hangingPunct="0">
+              <a:lnSpc>
+                <a:spcPct val="100000"/>
+              </a:lnSpc>
+              <a:spcBef>
+                <a:spcPts val="0"/>
+              </a:spcBef>
+              <a:spcAft>
+                <a:spcPts val="0"/>
+              </a:spcAft>
+              <a:buClrTx/>
+              <a:buSzTx/>
+              <a:buFontTx/>
+              <a:buNone/>
+              <a:tabLst/>
+            </a:pPr>
+            <a:r>
+              <a:rPr kumimoji="0" lang="en-US" sz="2400" b="0" i="0" u="none" strike="noStrike" cap="none" spc="0" normalizeH="0" baseline="0" dirty="0">
+                <a:ln>
+                  <a:noFill/>
+                </a:ln>
+                <a:solidFill>
+                  <a:srgbClr val="5E5E5E"/>
+                </a:solidFill>
+                <a:effectLst/>
+                <a:uFillTx/>
+                <a:latin typeface="+mn-lt"/>
+                <a:ea typeface="+mn-ea"/>
+                <a:cs typeface="+mn-cs"/>
+                <a:sym typeface="Helvetica Neue"/>
+              </a:rPr>
+              <a:t>“Don’t make another request until you got the last response back”</a:t>
+            </a:r>
+          </a:p>
+        </p:txBody>
+      </p:sp>
+      <p:sp>
+        <p:nvSpPr>
+          <p:cNvPr id="87" name="TextBox 86">
+            <a:extLst>
+              <a:ext uri="{FF2B5EF4-FFF2-40B4-BE49-F238E27FC236}">
+                <a16:creationId xmlns:a16="http://schemas.microsoft.com/office/drawing/2014/main" id="{5B534789-66A7-D575-0C34-AFB9DCA26C31}"/>
+              </a:ext>
+            </a:extLst>
+          </p:cNvPr>
+          <p:cNvSpPr txBox="1"/>
+          <p:nvPr/>
+        </p:nvSpPr>
+        <p:spPr>
+          <a:xfrm>
+            <a:off x="6563167" y="3693613"/>
+            <a:ext cx="3925004" cy="1210588"/>
+          </a:xfrm>
+          <a:prstGeom prst="rect">
+            <a:avLst/>
+          </a:prstGeom>
+          <a:ln/>
+        </p:spPr>
+        <p:style>
+          <a:lnRef idx="2">
+            <a:schemeClr val="dk1"/>
+          </a:lnRef>
+          <a:fillRef idx="1">
+            <a:schemeClr val="lt1"/>
+          </a:fillRef>
+          <a:effectRef idx="0">
+            <a:schemeClr val="dk1"/>
+          </a:effectRef>
+          <a:fontRef idx="minor">
+            <a:schemeClr val="dk1"/>
+          </a:fontRef>
+        </p:style>
+        <p:txBody>
+          <a:bodyPr rot="0" spcFirstLastPara="1" vertOverflow="overflow" horzOverflow="overflow" vert="horz" wrap="square" lIns="50800" tIns="50800" rIns="50800" bIns="50800" numCol="1" spcCol="38100" rtlCol="0" anchor="ctr">
+            <a:spAutoFit/>
+          </a:bodyPr>
+          <a:lstStyle/>
+          <a:p>
+            <a:pPr marL="0" marR="0" indent="0" algn="ctr" defTabSz="2438338" rtl="0" fontAlgn="auto" latinLnBrk="0" hangingPunct="0">
+              <a:lnSpc>
+                <a:spcPct val="100000"/>
+              </a:lnSpc>
+              <a:spcBef>
+                <a:spcPts val="0"/>
+              </a:spcBef>
+              <a:spcAft>
+                <a:spcPts val="0"/>
+              </a:spcAft>
+              <a:buClrTx/>
+              <a:buSzTx/>
+              <a:buFontTx/>
+              <a:buNone/>
+              <a:tabLst/>
+            </a:pPr>
+            <a:r>
+              <a:rPr kumimoji="0" lang="en-US" sz="2400" b="0" i="0" u="none" strike="noStrike" cap="none" spc="0" normalizeH="0" baseline="0" dirty="0">
+                <a:ln>
+                  <a:noFill/>
+                </a:ln>
+                <a:solidFill>
+                  <a:srgbClr val="5E5E5E"/>
+                </a:solidFill>
+                <a:effectLst/>
+                <a:uFillTx/>
+                <a:latin typeface="+mn-lt"/>
+                <a:ea typeface="+mn-ea"/>
+                <a:cs typeface="+mn-cs"/>
+                <a:sym typeface="Helvetica Neue"/>
+              </a:rPr>
+              <a:t>“Make all of the requests now, then wait for all of the responses”</a:t>
+            </a:r>
+          </a:p>
+        </p:txBody>
+      </p:sp>
+      <p:sp>
+        <p:nvSpPr>
+          <p:cNvPr id="88" name="TextBox 87">
+            <a:extLst>
+              <a:ext uri="{FF2B5EF4-FFF2-40B4-BE49-F238E27FC236}">
+                <a16:creationId xmlns:a16="http://schemas.microsoft.com/office/drawing/2014/main" id="{7BCC99CE-DB71-E9BE-E8B0-BCDD5EE88A98}"/>
+              </a:ext>
+            </a:extLst>
+          </p:cNvPr>
+          <p:cNvSpPr txBox="1"/>
+          <p:nvPr/>
+        </p:nvSpPr>
+        <p:spPr>
+          <a:xfrm>
+            <a:off x="10429848" y="1836861"/>
+            <a:ext cx="1642882" cy="424016"/>
+          </a:xfrm>
+          <a:prstGeom prst="rect">
+            <a:avLst/>
+          </a:prstGeom>
+          <a:ln/>
+        </p:spPr>
+        <p:style>
+          <a:lnRef idx="2">
+            <a:schemeClr val="dk1"/>
+          </a:lnRef>
+          <a:fillRef idx="1">
+            <a:schemeClr val="lt1"/>
+          </a:fillRef>
+          <a:effectRef idx="0">
+            <a:schemeClr val="dk1"/>
+          </a:effectRef>
+          <a:fontRef idx="minor">
+            <a:schemeClr val="dk1"/>
+          </a:fontRef>
+        </p:style>
+        <p:txBody>
+          <a:bodyPr rot="0" spcFirstLastPara="0" vertOverflow="overflow" horzOverflow="overflow" vert="horz" wrap="square" lIns="91440" tIns="45720" rIns="91440" bIns="45720" numCol="1" spcCol="0" rtlCol="0" fromWordArt="0" anchor="ctr" anchorCtr="0" forceAA="0" compatLnSpc="1">
+            <a:prstTxWarp prst="textNoShape">
+              <a:avLst/>
+            </a:prstTxWarp>
+            <a:noAutofit/>
+          </a:bodyPr>
+          <a:lstStyle/>
+          <a:p>
+            <a:pPr algn="l"/>
+            <a:r>
+              <a:rPr lang="en-US" sz="2000" dirty="0">
+                <a:solidFill>
+                  <a:srgbClr val="FF0000"/>
+                </a:solidFill>
+                <a:latin typeface="Verdana" panose="020B0604030504040204" pitchFamily="34" charset="0"/>
+                <a:ea typeface="Verdana" panose="020B0604030504040204" pitchFamily="34" charset="0"/>
+              </a:rPr>
+              <a:t>3024 msec</a:t>
+            </a:r>
+          </a:p>
+        </p:txBody>
+      </p:sp>
+      <p:sp>
+        <p:nvSpPr>
+          <p:cNvPr id="89" name="Rectangle 88">
+            <a:extLst>
+              <a:ext uri="{FF2B5EF4-FFF2-40B4-BE49-F238E27FC236}">
+                <a16:creationId xmlns:a16="http://schemas.microsoft.com/office/drawing/2014/main" id="{77861A10-ABD5-B4EF-DE2A-5996A6E0AF54}"/>
+              </a:ext>
+            </a:extLst>
+          </p:cNvPr>
+          <p:cNvSpPr/>
+          <p:nvPr/>
+        </p:nvSpPr>
+        <p:spPr>
+          <a:xfrm>
+            <a:off x="10549119" y="3966210"/>
+            <a:ext cx="1642882" cy="365125"/>
+          </a:xfrm>
+          <a:prstGeom prst="rect">
+            <a:avLst/>
+          </a:prstGeom>
+          <a:ln/>
+        </p:spPr>
+        <p:style>
+          <a:lnRef idx="2">
+            <a:schemeClr val="dk1"/>
+          </a:lnRef>
+          <a:fillRef idx="1">
+            <a:schemeClr val="lt1"/>
+          </a:fillRef>
+          <a:effectRef idx="0">
+            <a:schemeClr val="dk1"/>
+          </a:effectRef>
+          <a:fontRef idx="minor">
+            <a:schemeClr val="dk1"/>
+          </a:fontRef>
+        </p:style>
+        <p:txBody>
+          <a:bodyPr rtlCol="0" anchor="ctr"/>
+          <a:lstStyle/>
+          <a:p>
+            <a:pPr algn="l"/>
+            <a:r>
+              <a:rPr lang="en-US" sz="2000" dirty="0">
+                <a:solidFill>
+                  <a:srgbClr val="FF0000"/>
+                </a:solidFill>
+                <a:latin typeface="Verdana" panose="020B0604030504040204" pitchFamily="34" charset="0"/>
+                <a:ea typeface="Verdana" panose="020B0604030504040204" pitchFamily="34" charset="0"/>
+              </a:rPr>
+              <a:t>1018 msec</a:t>
+            </a:r>
+          </a:p>
+        </p:txBody>
+      </p:sp>
+      <p:grpSp>
+        <p:nvGrpSpPr>
+          <p:cNvPr id="4" name="Group 3">
+            <a:extLst>
+              <a:ext uri="{FF2B5EF4-FFF2-40B4-BE49-F238E27FC236}">
+                <a16:creationId xmlns:a16="http://schemas.microsoft.com/office/drawing/2014/main" id="{9CF502FF-9449-C12E-99D4-A08648992BE5}"/>
+              </a:ext>
+            </a:extLst>
+          </p:cNvPr>
+          <p:cNvGrpSpPr/>
+          <p:nvPr/>
+        </p:nvGrpSpPr>
+        <p:grpSpPr>
+          <a:xfrm>
+            <a:off x="6451412" y="5079415"/>
+            <a:ext cx="4648390" cy="1364703"/>
+            <a:chOff x="753132" y="4258888"/>
+            <a:chExt cx="4648390" cy="1364703"/>
+          </a:xfrm>
+        </p:grpSpPr>
+        <p:grpSp>
+          <p:nvGrpSpPr>
+            <p:cNvPr id="5" name="Group 4">
+              <a:extLst>
+                <a:ext uri="{FF2B5EF4-FFF2-40B4-BE49-F238E27FC236}">
+                  <a16:creationId xmlns:a16="http://schemas.microsoft.com/office/drawing/2014/main" id="{45A6BC30-CAE2-DBE6-18DC-D80393610BC5}"/>
+                </a:ext>
+              </a:extLst>
+            </p:cNvPr>
+            <p:cNvGrpSpPr/>
+            <p:nvPr/>
+          </p:nvGrpSpPr>
+          <p:grpSpPr>
+            <a:xfrm>
+              <a:off x="753133" y="5148439"/>
+              <a:ext cx="4527917" cy="475152"/>
+              <a:chOff x="-958803" y="2326847"/>
+              <a:chExt cx="4527917" cy="475152"/>
+            </a:xfrm>
+          </p:grpSpPr>
+          <p:sp>
+            <p:nvSpPr>
+              <p:cNvPr id="14" name="Rectangle 13">
+                <a:extLst>
+                  <a:ext uri="{FF2B5EF4-FFF2-40B4-BE49-F238E27FC236}">
+                    <a16:creationId xmlns:a16="http://schemas.microsoft.com/office/drawing/2014/main" id="{77643C05-1C0D-55B0-435D-93610662EB5E}"/>
+                  </a:ext>
+                </a:extLst>
+              </p:cNvPr>
+              <p:cNvSpPr/>
+              <p:nvPr/>
+            </p:nvSpPr>
+            <p:spPr>
+              <a:xfrm>
+                <a:off x="-958803" y="2326847"/>
+                <a:ext cx="1266705" cy="475151"/>
+              </a:xfrm>
+              <a:prstGeom prst="rect">
+                <a:avLst/>
+              </a:prstGeom>
+              <a:ln/>
+            </p:spPr>
+            <p:style>
+              <a:lnRef idx="1">
+                <a:schemeClr val="accent6"/>
+              </a:lnRef>
+              <a:fillRef idx="2">
+                <a:schemeClr val="accent6"/>
+              </a:fillRef>
+              <a:effectRef idx="1">
+                <a:schemeClr val="accent6"/>
+              </a:effectRef>
+              <a:fontRef idx="minor">
+                <a:schemeClr val="dk1"/>
+              </a:fontRef>
+            </p:style>
+            <p:txBody>
+              <a:bodyPr rtlCol="0" anchor="ctr"/>
+              <a:lstStyle/>
+              <a:p>
+                <a:r>
+                  <a:rPr lang="en-US" sz="2000" dirty="0">
+                    <a:solidFill>
+                      <a:schemeClr val="tx1"/>
+                    </a:solidFill>
+                  </a:rPr>
+                  <a:t>send</a:t>
+                </a:r>
+              </a:p>
+            </p:txBody>
+          </p:sp>
+          <p:sp>
+            <p:nvSpPr>
+              <p:cNvPr id="15" name="Rectangle 14">
+                <a:extLst>
+                  <a:ext uri="{FF2B5EF4-FFF2-40B4-BE49-F238E27FC236}">
+                    <a16:creationId xmlns:a16="http://schemas.microsoft.com/office/drawing/2014/main" id="{45878723-B0A2-121E-3870-9B3A52567D5D}"/>
+                  </a:ext>
+                </a:extLst>
+              </p:cNvPr>
+              <p:cNvSpPr/>
+              <p:nvPr/>
+            </p:nvSpPr>
+            <p:spPr>
+              <a:xfrm>
+                <a:off x="2513432" y="2374551"/>
+                <a:ext cx="1055682" cy="420923"/>
+              </a:xfrm>
+              <a:prstGeom prst="rect">
+                <a:avLst/>
+              </a:prstGeom>
+              <a:ln/>
+            </p:spPr>
+            <p:style>
+              <a:lnRef idx="1">
+                <a:schemeClr val="accent6"/>
+              </a:lnRef>
+              <a:fillRef idx="2">
+                <a:schemeClr val="accent6"/>
+              </a:fillRef>
+              <a:effectRef idx="1">
+                <a:schemeClr val="accent6"/>
+              </a:effectRef>
+              <a:fontRef idx="minor">
+                <a:schemeClr val="dk1"/>
+              </a:fontRef>
+            </p:style>
+            <p:txBody>
+              <a:bodyPr rtlCol="0" anchor="ctr"/>
+              <a:lstStyle/>
+              <a:p>
+                <a:r>
+                  <a:rPr lang="en-US" sz="2000" dirty="0">
+                    <a:solidFill>
+                      <a:schemeClr val="tx1"/>
+                    </a:solidFill>
+                  </a:rPr>
+                  <a:t>receive</a:t>
+                </a:r>
+              </a:p>
+            </p:txBody>
+          </p:sp>
+          <p:sp>
+            <p:nvSpPr>
+              <p:cNvPr id="16" name="Rectangle 15">
+                <a:extLst>
+                  <a:ext uri="{FF2B5EF4-FFF2-40B4-BE49-F238E27FC236}">
+                    <a16:creationId xmlns:a16="http://schemas.microsoft.com/office/drawing/2014/main" id="{3A6A3E75-473F-128E-3407-0D00A7F8A088}"/>
+                  </a:ext>
+                </a:extLst>
+              </p:cNvPr>
+              <p:cNvSpPr/>
+              <p:nvPr/>
+            </p:nvSpPr>
+            <p:spPr>
+              <a:xfrm>
+                <a:off x="272125" y="2383963"/>
+                <a:ext cx="2241308" cy="418036"/>
+              </a:xfrm>
+              <a:prstGeom prst="rect">
+                <a:avLst/>
+              </a:prstGeom>
+              <a:solidFill>
+                <a:srgbClr val="FFFF00"/>
+              </a:solidFill>
+              <a:ln>
+                <a:solidFill>
+                  <a:srgbClr val="0070C0"/>
+                </a:solidFill>
+              </a:ln>
+            </p:spPr>
+            <p:style>
+              <a:lnRef idx="2">
+                <a:schemeClr val="accent1">
+                  <a:shade val="50000"/>
+                </a:schemeClr>
+              </a:lnRef>
+              <a:fillRef idx="1">
+                <a:schemeClr val="accent1"/>
+              </a:fillRef>
+              <a:effectRef idx="0">
+                <a:schemeClr val="accent1"/>
+              </a:effectRef>
+              <a:fontRef idx="minor">
+                <a:schemeClr val="lt1"/>
+              </a:fontRef>
+            </p:style>
+            <p:txBody>
+              <a:bodyPr rtlCol="0" anchor="ctr"/>
+              <a:lstStyle/>
+              <a:p>
+                <a:r>
+                  <a:rPr lang="en-US" sz="2000" dirty="0">
+                    <a:solidFill>
+                      <a:schemeClr val="tx1"/>
+                    </a:solidFill>
+                  </a:rPr>
+                  <a:t>wait</a:t>
+                </a:r>
+              </a:p>
+            </p:txBody>
+          </p:sp>
+        </p:grpSp>
+        <p:grpSp>
+          <p:nvGrpSpPr>
+            <p:cNvPr id="6" name="Group 5">
+              <a:extLst>
+                <a:ext uri="{FF2B5EF4-FFF2-40B4-BE49-F238E27FC236}">
+                  <a16:creationId xmlns:a16="http://schemas.microsoft.com/office/drawing/2014/main" id="{034280D1-6221-B6BA-7473-FFBDD58B00E6}"/>
+                </a:ext>
+              </a:extLst>
+            </p:cNvPr>
+            <p:cNvGrpSpPr/>
+            <p:nvPr/>
+          </p:nvGrpSpPr>
+          <p:grpSpPr>
+            <a:xfrm>
+              <a:off x="753133" y="4730403"/>
+              <a:ext cx="3749227" cy="475152"/>
+              <a:chOff x="448333" y="4425603"/>
+              <a:chExt cx="3749227" cy="475152"/>
+            </a:xfrm>
+          </p:grpSpPr>
+          <p:sp>
+            <p:nvSpPr>
+              <p:cNvPr id="11" name="Rectangle 10">
+                <a:extLst>
+                  <a:ext uri="{FF2B5EF4-FFF2-40B4-BE49-F238E27FC236}">
+                    <a16:creationId xmlns:a16="http://schemas.microsoft.com/office/drawing/2014/main" id="{01BE86A7-FE6A-A0AD-A1A6-DB66CD854509}"/>
+                  </a:ext>
+                </a:extLst>
+              </p:cNvPr>
+              <p:cNvSpPr/>
+              <p:nvPr/>
+            </p:nvSpPr>
+            <p:spPr>
+              <a:xfrm>
+                <a:off x="448333" y="4425603"/>
+                <a:ext cx="1230927" cy="475151"/>
+              </a:xfrm>
+              <a:prstGeom prst="rect">
+                <a:avLst/>
+              </a:prstGeom>
+              <a:ln/>
+            </p:spPr>
+            <p:style>
+              <a:lnRef idx="1">
+                <a:schemeClr val="accent6"/>
+              </a:lnRef>
+              <a:fillRef idx="2">
+                <a:schemeClr val="accent6"/>
+              </a:fillRef>
+              <a:effectRef idx="1">
+                <a:schemeClr val="accent6"/>
+              </a:effectRef>
+              <a:fontRef idx="minor">
+                <a:schemeClr val="dk1"/>
+              </a:fontRef>
+            </p:style>
+            <p:txBody>
+              <a:bodyPr rtlCol="0" anchor="ctr"/>
+              <a:lstStyle/>
+              <a:p>
+                <a:r>
+                  <a:rPr lang="en-US" sz="2000" dirty="0">
+                    <a:solidFill>
+                      <a:schemeClr val="tx1"/>
+                    </a:solidFill>
+                  </a:rPr>
+                  <a:t>send</a:t>
+                </a:r>
+              </a:p>
+            </p:txBody>
+          </p:sp>
+          <p:sp>
+            <p:nvSpPr>
+              <p:cNvPr id="12" name="Rectangle 11">
+                <a:extLst>
+                  <a:ext uri="{FF2B5EF4-FFF2-40B4-BE49-F238E27FC236}">
+                    <a16:creationId xmlns:a16="http://schemas.microsoft.com/office/drawing/2014/main" id="{8E90F00D-DE3C-8274-2A04-A4456C94AB74}"/>
+                  </a:ext>
+                </a:extLst>
+              </p:cNvPr>
+              <p:cNvSpPr/>
+              <p:nvPr/>
+            </p:nvSpPr>
+            <p:spPr>
+              <a:xfrm>
+                <a:off x="3141878" y="4432127"/>
+                <a:ext cx="1055682" cy="468628"/>
+              </a:xfrm>
+              <a:prstGeom prst="rect">
+                <a:avLst/>
+              </a:prstGeom>
+              <a:ln/>
+            </p:spPr>
+            <p:style>
+              <a:lnRef idx="1">
+                <a:schemeClr val="accent6"/>
+              </a:lnRef>
+              <a:fillRef idx="2">
+                <a:schemeClr val="accent6"/>
+              </a:fillRef>
+              <a:effectRef idx="1">
+                <a:schemeClr val="accent6"/>
+              </a:effectRef>
+              <a:fontRef idx="minor">
+                <a:schemeClr val="dk1"/>
+              </a:fontRef>
+            </p:style>
+            <p:txBody>
+              <a:bodyPr rtlCol="0" anchor="ctr"/>
+              <a:lstStyle/>
+              <a:p>
+                <a:r>
+                  <a:rPr lang="en-US" sz="2000" dirty="0">
+                    <a:solidFill>
+                      <a:schemeClr val="tx1"/>
+                    </a:solidFill>
+                  </a:rPr>
+                  <a:t>receive</a:t>
+                </a:r>
+              </a:p>
+            </p:txBody>
+          </p:sp>
+          <p:sp>
+            <p:nvSpPr>
+              <p:cNvPr id="13" name="Rectangle 12">
+                <a:extLst>
+                  <a:ext uri="{FF2B5EF4-FFF2-40B4-BE49-F238E27FC236}">
+                    <a16:creationId xmlns:a16="http://schemas.microsoft.com/office/drawing/2014/main" id="{823035FA-8EC1-BF3B-F72D-DF75E7CA6228}"/>
+                  </a:ext>
+                </a:extLst>
+              </p:cNvPr>
+              <p:cNvSpPr/>
+              <p:nvPr/>
+            </p:nvSpPr>
+            <p:spPr>
+              <a:xfrm>
+                <a:off x="1679260" y="4426353"/>
+                <a:ext cx="1451314" cy="468628"/>
+              </a:xfrm>
+              <a:prstGeom prst="rect">
+                <a:avLst/>
+              </a:prstGeom>
+              <a:solidFill>
+                <a:srgbClr val="FFFF00"/>
+              </a:solidFill>
+              <a:ln>
+                <a:solidFill>
+                  <a:srgbClr val="0070C0"/>
+                </a:solidFill>
+              </a:ln>
+            </p:spPr>
+            <p:style>
+              <a:lnRef idx="2">
+                <a:schemeClr val="accent1">
+                  <a:shade val="50000"/>
+                </a:schemeClr>
+              </a:lnRef>
+              <a:fillRef idx="1">
+                <a:schemeClr val="accent1"/>
+              </a:fillRef>
+              <a:effectRef idx="0">
+                <a:schemeClr val="accent1"/>
+              </a:effectRef>
+              <a:fontRef idx="minor">
+                <a:schemeClr val="lt1"/>
+              </a:fontRef>
+            </p:style>
+            <p:txBody>
+              <a:bodyPr rtlCol="0" anchor="ctr"/>
+              <a:lstStyle/>
+              <a:p>
+                <a:r>
+                  <a:rPr lang="en-US" sz="2000" dirty="0">
+                    <a:solidFill>
+                      <a:schemeClr val="tx1"/>
+                    </a:solidFill>
+                  </a:rPr>
+                  <a:t>wait</a:t>
+                </a:r>
+              </a:p>
+            </p:txBody>
+          </p:sp>
+        </p:grpSp>
+        <p:grpSp>
+          <p:nvGrpSpPr>
+            <p:cNvPr id="7" name="Group 6">
+              <a:extLst>
+                <a:ext uri="{FF2B5EF4-FFF2-40B4-BE49-F238E27FC236}">
+                  <a16:creationId xmlns:a16="http://schemas.microsoft.com/office/drawing/2014/main" id="{D91B0986-3B73-D027-0014-935CCA463F7D}"/>
+                </a:ext>
+              </a:extLst>
+            </p:cNvPr>
+            <p:cNvGrpSpPr/>
+            <p:nvPr/>
+          </p:nvGrpSpPr>
+          <p:grpSpPr>
+            <a:xfrm>
+              <a:off x="753132" y="4258888"/>
+              <a:ext cx="4648390" cy="471514"/>
+              <a:chOff x="1510076" y="2374554"/>
+              <a:chExt cx="4648390" cy="471514"/>
+            </a:xfrm>
+          </p:grpSpPr>
+          <p:sp>
+            <p:nvSpPr>
+              <p:cNvPr id="8" name="Rectangle 7">
+                <a:extLst>
+                  <a:ext uri="{FF2B5EF4-FFF2-40B4-BE49-F238E27FC236}">
+                    <a16:creationId xmlns:a16="http://schemas.microsoft.com/office/drawing/2014/main" id="{4132249D-836A-169B-C18E-AAD87E1FEB5F}"/>
+                  </a:ext>
+                </a:extLst>
+              </p:cNvPr>
+              <p:cNvSpPr/>
+              <p:nvPr/>
+            </p:nvSpPr>
+            <p:spPr>
+              <a:xfrm>
+                <a:off x="1510076" y="2377440"/>
+                <a:ext cx="1443244" cy="468628"/>
+              </a:xfrm>
+              <a:prstGeom prst="rect">
+                <a:avLst/>
+              </a:prstGeom>
+              <a:ln/>
+            </p:spPr>
+            <p:style>
+              <a:lnRef idx="1">
+                <a:schemeClr val="accent6"/>
+              </a:lnRef>
+              <a:fillRef idx="2">
+                <a:schemeClr val="accent6"/>
+              </a:fillRef>
+              <a:effectRef idx="1">
+                <a:schemeClr val="accent6"/>
+              </a:effectRef>
+              <a:fontRef idx="minor">
+                <a:schemeClr val="dk1"/>
+              </a:fontRef>
+            </p:style>
+            <p:txBody>
+              <a:bodyPr rtlCol="0" anchor="ctr"/>
+              <a:lstStyle/>
+              <a:p>
+                <a:r>
+                  <a:rPr lang="en-US" sz="2000" dirty="0">
+                    <a:solidFill>
+                      <a:schemeClr val="tx1"/>
+                    </a:solidFill>
+                  </a:rPr>
+                  <a:t>send</a:t>
+                </a:r>
+              </a:p>
+            </p:txBody>
+          </p:sp>
+          <p:sp>
+            <p:nvSpPr>
+              <p:cNvPr id="9" name="Rectangle 8">
+                <a:extLst>
+                  <a:ext uri="{FF2B5EF4-FFF2-40B4-BE49-F238E27FC236}">
+                    <a16:creationId xmlns:a16="http://schemas.microsoft.com/office/drawing/2014/main" id="{B13A1FA0-1AA8-8A40-C3B4-127F7ED8CC99}"/>
+                  </a:ext>
+                </a:extLst>
+              </p:cNvPr>
+              <p:cNvSpPr/>
+              <p:nvPr/>
+            </p:nvSpPr>
+            <p:spPr>
+              <a:xfrm>
+                <a:off x="4691047" y="2374554"/>
+                <a:ext cx="1467419" cy="468628"/>
+              </a:xfrm>
+              <a:prstGeom prst="rect">
+                <a:avLst/>
+              </a:prstGeom>
+              <a:ln/>
+            </p:spPr>
+            <p:style>
+              <a:lnRef idx="1">
+                <a:schemeClr val="accent6"/>
+              </a:lnRef>
+              <a:fillRef idx="2">
+                <a:schemeClr val="accent6"/>
+              </a:fillRef>
+              <a:effectRef idx="1">
+                <a:schemeClr val="accent6"/>
+              </a:effectRef>
+              <a:fontRef idx="minor">
+                <a:schemeClr val="dk1"/>
+              </a:fontRef>
+            </p:style>
+            <p:txBody>
+              <a:bodyPr rtlCol="0" anchor="ctr"/>
+              <a:lstStyle/>
+              <a:p>
+                <a:r>
+                  <a:rPr lang="en-US" sz="2000" dirty="0">
+                    <a:solidFill>
+                      <a:schemeClr val="tx1"/>
+                    </a:solidFill>
+                  </a:rPr>
+                  <a:t>receive</a:t>
+                </a:r>
+              </a:p>
+            </p:txBody>
+          </p:sp>
+          <p:sp>
+            <p:nvSpPr>
+              <p:cNvPr id="10" name="Rectangle 9">
+                <a:extLst>
+                  <a:ext uri="{FF2B5EF4-FFF2-40B4-BE49-F238E27FC236}">
+                    <a16:creationId xmlns:a16="http://schemas.microsoft.com/office/drawing/2014/main" id="{15AA8396-80B1-AAA3-A3B6-110731A02BD2}"/>
+                  </a:ext>
+                </a:extLst>
+              </p:cNvPr>
+              <p:cNvSpPr/>
+              <p:nvPr/>
+            </p:nvSpPr>
+            <p:spPr>
+              <a:xfrm>
+                <a:off x="2741003" y="2377440"/>
+                <a:ext cx="1969661" cy="468628"/>
+              </a:xfrm>
+              <a:prstGeom prst="rect">
+                <a:avLst/>
+              </a:prstGeom>
+              <a:solidFill>
+                <a:srgbClr val="FFFF00"/>
+              </a:solidFill>
+              <a:ln>
+                <a:solidFill>
+                  <a:srgbClr val="0070C0"/>
+                </a:solidFill>
+              </a:ln>
+            </p:spPr>
+            <p:style>
+              <a:lnRef idx="2">
+                <a:schemeClr val="accent1">
+                  <a:shade val="50000"/>
+                </a:schemeClr>
+              </a:lnRef>
+              <a:fillRef idx="1">
+                <a:schemeClr val="accent1"/>
+              </a:fillRef>
+              <a:effectRef idx="0">
+                <a:schemeClr val="accent1"/>
+              </a:effectRef>
+              <a:fontRef idx="minor">
+                <a:schemeClr val="lt1"/>
+              </a:fontRef>
+            </p:style>
+            <p:txBody>
+              <a:bodyPr rtlCol="0" anchor="ctr"/>
+              <a:lstStyle/>
+              <a:p>
+                <a:r>
+                  <a:rPr lang="en-US" sz="2000" dirty="0">
+                    <a:solidFill>
+                      <a:schemeClr val="tx1"/>
+                    </a:solidFill>
+                  </a:rPr>
+                  <a:t>wait</a:t>
+                </a:r>
+              </a:p>
+            </p:txBody>
+          </p:sp>
+        </p:grpSp>
+      </p:grpSp>
+      <p:sp>
+        <p:nvSpPr>
+          <p:cNvPr id="17" name="TextBox 16">
+            <a:extLst>
+              <a:ext uri="{FF2B5EF4-FFF2-40B4-BE49-F238E27FC236}">
+                <a16:creationId xmlns:a16="http://schemas.microsoft.com/office/drawing/2014/main" id="{AB2F4E94-2EAC-FCAC-5DDE-AA96AB7790FD}"/>
+              </a:ext>
+            </a:extLst>
+          </p:cNvPr>
+          <p:cNvSpPr txBox="1"/>
+          <p:nvPr/>
+        </p:nvSpPr>
+        <p:spPr>
+          <a:xfrm>
+            <a:off x="5768075" y="5143939"/>
+            <a:ext cx="423037" cy="914400"/>
+          </a:xfrm>
+          <a:prstGeom prst="rect">
+            <a:avLst/>
+          </a:prstGeom>
+          <a:noFill/>
+          <a:ln>
+            <a:noFill/>
+          </a:ln>
+        </p:spPr>
+        <p:style>
+          <a:lnRef idx="2">
+            <a:schemeClr val="accent1">
+              <a:shade val="50000"/>
+            </a:schemeClr>
+          </a:lnRef>
+          <a:fillRef idx="1">
+            <a:schemeClr val="accent1"/>
+          </a:fillRef>
+          <a:effectRef idx="0">
+            <a:schemeClr val="accent1"/>
+          </a:effectRef>
+          <a:fontRef idx="minor">
+            <a:schemeClr val="lt1"/>
+          </a:fontRef>
+        </p:style>
+        <p:txBody>
+          <a:bodyPr rot="0" spcFirstLastPara="0" vertOverflow="overflow" horzOverflow="overflow" vert="horz" wrap="none" lIns="91440" tIns="45720" rIns="91440" bIns="45720" numCol="1" spcCol="0" rtlCol="0" fromWordArt="0" anchor="ctr" anchorCtr="0" forceAA="0" compatLnSpc="1">
+            <a:prstTxWarp prst="textNoShape">
+              <a:avLst/>
+            </a:prstTxWarp>
+            <a:noAutofit/>
+          </a:bodyPr>
+          <a:lstStyle/>
+          <a:p>
+            <a:pPr algn="l"/>
+            <a:r>
+              <a:rPr lang="en-US" sz="2400" dirty="0">
+                <a:solidFill>
+                  <a:schemeClr val="tx1"/>
+                </a:solidFill>
+                <a:latin typeface="Verdana" panose="020B0604030504040204" pitchFamily="34" charset="0"/>
+                <a:ea typeface="Verdana" panose="020B0604030504040204" pitchFamily="34" charset="0"/>
+              </a:rPr>
+              <a:t>or</a:t>
+            </a:r>
+          </a:p>
+        </p:txBody>
+      </p:sp>
+    </p:spTree>
+    <p:extLst>
+      <p:ext uri="{BB962C8B-B14F-4D97-AF65-F5344CB8AC3E}">
+        <p14:creationId xmlns:p14="http://schemas.microsoft.com/office/powerpoint/2010/main" val="1318073523"/>
+      </p:ext>
+    </p:extLst>
+  </p:cSld>
+  <p:clrMapOvr>
+    <a:masterClrMapping/>
+  </p:clrMapOvr>
+  <p:timing>
+    <p:tnLst>
+      <p:par>
+        <p:cTn id="1" dur="indefinite" restart="never" nodeType="tmRoot">
+          <p:childTnLst>
+            <p:seq concurrent="1" nextAc="seek">
+              <p:cTn id="2" dur="indefinite" nodeType="mainSeq">
+                <p:childTnLst>
+                  <p:par>
+                    <p:cTn id="3" fill="hold">
+                      <p:stCondLst>
+                        <p:cond delay="indefinite"/>
+                      </p:stCondLst>
+                      <p:childTnLst>
+                        <p:par>
+                          <p:cTn id="4" fill="hold">
+                            <p:stCondLst>
+                              <p:cond delay="0"/>
+                            </p:stCondLst>
+                            <p:childTnLst>
+                              <p:par>
+                                <p:cTn id="5" presetID="1" presetClass="entr" presetSubtype="0" fill="hold" nodeType="clickEffect">
+                                  <p:stCondLst>
+                                    <p:cond delay="0"/>
+                                  </p:stCondLst>
+                                  <p:childTnLst>
+                                    <p:set>
+                                      <p:cBhvr>
+                                        <p:cTn id="6" dur="1" fill="hold">
+                                          <p:stCondLst>
+                                            <p:cond delay="0"/>
+                                          </p:stCondLst>
+                                        </p:cTn>
+                                        <p:tgtEl>
+                                          <p:spTgt spid="4"/>
+                                        </p:tgtEl>
+                                        <p:attrNameLst>
+                                          <p:attrName>style.visibility</p:attrName>
+                                        </p:attrNameLst>
+                                      </p:cBhvr>
+                                      <p:to>
+                                        <p:strVal val="visible"/>
+                                      </p:to>
+                                    </p:set>
+                                  </p:childTnLst>
+                                </p:cTn>
+                              </p:par>
+                              <p:par>
+                                <p:cTn id="7" presetID="1" presetClass="entr" presetSubtype="0" fill="hold" grpId="0" nodeType="withEffect">
+                                  <p:stCondLst>
+                                    <p:cond delay="0"/>
+                                  </p:stCondLst>
+                                  <p:childTnLst>
+                                    <p:set>
+                                      <p:cBhvr>
+                                        <p:cTn id="8" dur="1" fill="hold">
+                                          <p:stCondLst>
+                                            <p:cond delay="0"/>
+                                          </p:stCondLst>
+                                        </p:cTn>
+                                        <p:tgtEl>
+                                          <p:spTgt spid="17"/>
+                                        </p:tgtEl>
+                                        <p:attrNameLst>
+                                          <p:attrName>style.visibility</p:attrName>
+                                        </p:attrNameLst>
+                                      </p:cBhvr>
+                                      <p:to>
+                                        <p:strVal val="visible"/>
+                                      </p:to>
+                                    </p:set>
+                                  </p:childTnLst>
+                                </p:cTn>
+                              </p:par>
+                            </p:childTnLst>
+                          </p:cTn>
+                        </p:par>
+                      </p:childTnLst>
+                    </p:cTn>
+                  </p:par>
+                </p:childTnLst>
+              </p:cTn>
+              <p:prevCondLst>
+                <p:cond evt="onPrev" delay="0">
+                  <p:tgtEl>
+                    <p:sldTgt/>
+                  </p:tgtEl>
+                </p:cond>
+              </p:prevCondLst>
+              <p:nextCondLst>
+                <p:cond evt="onNext" delay="0">
+                  <p:tgtEl>
+                    <p:sldTgt/>
+                  </p:tgtEl>
+                </p:cond>
+              </p:nextCondLst>
+            </p:seq>
+          </p:childTnLst>
+        </p:cTn>
+      </p:par>
+    </p:tnLst>
+    <p:bldLst>
+      <p:bldP spid="17" grpId="0"/>
+    </p:bldLst>
+  </p:timing>
+</p:sld>
+</file>
+
+<file path=ppt/slides/slide28.xml><?xml version="1.0" encoding="utf-8"?>
+<p:sld xmlns:a="http://schemas.openxmlformats.org/drawingml/2006/main" xmlns:r="http://schemas.openxmlformats.org/officeDocument/2006/relationships" xmlns:p="http://schemas.openxmlformats.org/presentationml/2006/main">
+  <p:cSld>
+    <p:spTree>
+      <p:nvGrpSpPr>
+        <p:cNvPr id="1" name=""/>
+        <p:cNvGrpSpPr/>
+        <p:nvPr/>
+      </p:nvGrpSpPr>
+      <p:grpSpPr>
+        <a:xfrm>
+          <a:off x="0" y="0"/>
+          <a:ext cx="0" cy="0"/>
+          <a:chOff x="0" y="0"/>
+          <a:chExt cx="0" cy="0"/>
+        </a:xfrm>
+      </p:grpSpPr>
+      <p:sp>
+        <p:nvSpPr>
+          <p:cNvPr id="2" name="Title 1">
+            <a:extLst>
+              <a:ext uri="{FF2B5EF4-FFF2-40B4-BE49-F238E27FC236}">
                 <a16:creationId xmlns:a16="http://schemas.microsoft.com/office/drawing/2014/main" id="{E94838D7-25A5-BD6D-3EB0-27C3E474BB42}"/>
               </a:ext>
             </a:extLst>
@@ -28233,7 +30692,7 @@
                 <a:tabLst/>
                 <a:defRPr/>
               </a:pPr>
-              <a:t>27</a:t>
+              <a:t>28</a:t>
             </a:fld>
             <a:endParaRPr kumimoji="0" lang="en-US" sz="1200" b="0" i="0" u="none" strike="noStrike" kern="1200" cap="none" spc="0" normalizeH="0" baseline="0" noProof="0">
               <a:ln>
@@ -29688,2465 +32147,6 @@
     </p:tnLst>
     <p:bldLst>
       <p:bldP spid="6" grpId="0" uiExpand="1" build="allAtOnce" animBg="1"/>
-    </p:bldLst>
-  </p:timing>
-</p:sld>
-</file>
-
-<file path=ppt/slides/slide28.xml><?xml version="1.0" encoding="utf-8"?>
-<p:sld xmlns:a="http://schemas.openxmlformats.org/drawingml/2006/main" xmlns:r="http://schemas.openxmlformats.org/officeDocument/2006/relationships" xmlns:p="http://schemas.openxmlformats.org/presentationml/2006/main">
-  <p:cSld>
-    <p:spTree>
-      <p:nvGrpSpPr>
-        <p:cNvPr id="1" name=""/>
-        <p:cNvGrpSpPr/>
-        <p:nvPr/>
-      </p:nvGrpSpPr>
-      <p:grpSpPr>
-        <a:xfrm>
-          <a:off x="0" y="0"/>
-          <a:ext cx="0" cy="0"/>
-          <a:chOff x="0" y="0"/>
-          <a:chExt cx="0" cy="0"/>
-        </a:xfrm>
-      </p:grpSpPr>
-      <p:sp>
-        <p:nvSpPr>
-          <p:cNvPr id="2" name="Title 1">
-            <a:extLst>
-              <a:ext uri="{FF2B5EF4-FFF2-40B4-BE49-F238E27FC236}">
-                <a16:creationId xmlns:a16="http://schemas.microsoft.com/office/drawing/2014/main" id="{24904872-A5AA-7EF3-C717-33099E420CC7}"/>
-              </a:ext>
-            </a:extLst>
-          </p:cNvPr>
-          <p:cNvSpPr>
-            <a:spLocks noGrp="1"/>
-          </p:cNvSpPr>
-          <p:nvPr>
-            <p:ph type="title"/>
-          </p:nvPr>
-        </p:nvSpPr>
-        <p:spPr/>
-        <p:txBody>
-          <a:bodyPr/>
-          <a:lstStyle/>
-          <a:p>
-            <a:r>
-              <a:rPr lang="en-US" dirty="0"/>
-              <a:t>Why is that? </a:t>
-            </a:r>
-            <a:br>
-              <a:rPr lang="en-US" dirty="0"/>
-            </a:br>
-            <a:r>
-              <a:rPr lang="en-US" dirty="0"/>
-              <a:t>Visualizing </a:t>
-            </a:r>
-            <a:r>
-              <a:rPr lang="en-US" dirty="0" err="1"/>
-              <a:t>Promise.all</a:t>
-            </a:r>
-            <a:endParaRPr lang="en-US" dirty="0"/>
-          </a:p>
-        </p:txBody>
-      </p:sp>
-      <p:sp>
-        <p:nvSpPr>
-          <p:cNvPr id="3" name="Slide Number Placeholder 2">
-            <a:extLst>
-              <a:ext uri="{FF2B5EF4-FFF2-40B4-BE49-F238E27FC236}">
-                <a16:creationId xmlns:a16="http://schemas.microsoft.com/office/drawing/2014/main" id="{1E27C171-D5EA-DE88-E683-2C6A1DB367BC}"/>
-              </a:ext>
-            </a:extLst>
-          </p:cNvPr>
-          <p:cNvSpPr>
-            <a:spLocks noGrp="1"/>
-          </p:cNvSpPr>
-          <p:nvPr>
-            <p:ph type="sldNum" sz="quarter" idx="12"/>
-          </p:nvPr>
-        </p:nvSpPr>
-        <p:spPr/>
-        <p:txBody>
-          <a:bodyPr/>
-          <a:lstStyle/>
-          <a:p>
-            <a:pPr marL="0" marR="0" lvl="0" indent="0" algn="r" defTabSz="914400" rtl="0" eaLnBrk="1" fontAlgn="auto" latinLnBrk="0" hangingPunct="1">
-              <a:lnSpc>
-                <a:spcPct val="100000"/>
-              </a:lnSpc>
-              <a:spcBef>
-                <a:spcPts val="0"/>
-              </a:spcBef>
-              <a:spcAft>
-                <a:spcPts val="0"/>
-              </a:spcAft>
-              <a:buClrTx/>
-              <a:buSzTx/>
-              <a:buFontTx/>
-              <a:buNone/>
-              <a:tabLst/>
-              <a:defRPr/>
-            </a:pPr>
-            <a:fld id="{20F37917-FD3A-4669-9018-DA04BCDD3D75}" type="slidenum">
-              <a:rPr kumimoji="0" lang="en-US" sz="1200" b="0" i="0" u="none" strike="noStrike" kern="1200" cap="none" spc="0" normalizeH="0" baseline="0" noProof="0" smtClean="0">
-                <a:ln>
-                  <a:noFill/>
-                </a:ln>
-                <a:solidFill>
-                  <a:prstClr val="black">
-                    <a:tint val="75000"/>
-                  </a:prstClr>
-                </a:solidFill>
-                <a:effectLst/>
-                <a:uLnTx/>
-                <a:uFillTx/>
-                <a:latin typeface="Calibri" panose="020F0502020204030204"/>
-                <a:ea typeface="+mn-ea"/>
-                <a:cs typeface="+mn-cs"/>
-              </a:rPr>
-              <a:pPr marL="0" marR="0" lvl="0" indent="0" algn="r" defTabSz="914400" rtl="0" eaLnBrk="1" fontAlgn="auto" latinLnBrk="0" hangingPunct="1">
-                <a:lnSpc>
-                  <a:spcPct val="100000"/>
-                </a:lnSpc>
-                <a:spcBef>
-                  <a:spcPts val="0"/>
-                </a:spcBef>
-                <a:spcAft>
-                  <a:spcPts val="0"/>
-                </a:spcAft>
-                <a:buClrTx/>
-                <a:buSzTx/>
-                <a:buFontTx/>
-                <a:buNone/>
-                <a:tabLst/>
-                <a:defRPr/>
-              </a:pPr>
-              <a:t>28</a:t>
-            </a:fld>
-            <a:endParaRPr kumimoji="0" lang="en-US" sz="1200" b="0" i="0" u="none" strike="noStrike" kern="1200" cap="none" spc="0" normalizeH="0" baseline="0" noProof="0">
-              <a:ln>
-                <a:noFill/>
-              </a:ln>
-              <a:solidFill>
-                <a:prstClr val="black">
-                  <a:tint val="75000"/>
-                </a:prstClr>
-              </a:solidFill>
-              <a:effectLst/>
-              <a:uLnTx/>
-              <a:uFillTx/>
-              <a:latin typeface="Calibri" panose="020F0502020204030204"/>
-              <a:ea typeface="+mn-ea"/>
-              <a:cs typeface="+mn-cs"/>
-            </a:endParaRPr>
-          </a:p>
-        </p:txBody>
-      </p:sp>
-      <p:grpSp>
-        <p:nvGrpSpPr>
-          <p:cNvPr id="82" name="Group 81">
-            <a:extLst>
-              <a:ext uri="{FF2B5EF4-FFF2-40B4-BE49-F238E27FC236}">
-                <a16:creationId xmlns:a16="http://schemas.microsoft.com/office/drawing/2014/main" id="{5C09B819-646C-1BF0-CDF8-9C3635361FB2}"/>
-              </a:ext>
-            </a:extLst>
-          </p:cNvPr>
-          <p:cNvGrpSpPr/>
-          <p:nvPr/>
-        </p:nvGrpSpPr>
-        <p:grpSpPr>
-          <a:xfrm>
-            <a:off x="517429" y="4904201"/>
-            <a:ext cx="5080647" cy="1388452"/>
-            <a:chOff x="728956" y="4248728"/>
-            <a:chExt cx="5080647" cy="1388452"/>
-          </a:xfrm>
-        </p:grpSpPr>
-        <p:grpSp>
-          <p:nvGrpSpPr>
-            <p:cNvPr id="49" name="Group 48">
-              <a:extLst>
-                <a:ext uri="{FF2B5EF4-FFF2-40B4-BE49-F238E27FC236}">
-                  <a16:creationId xmlns:a16="http://schemas.microsoft.com/office/drawing/2014/main" id="{0F03F2D4-9D9D-5A5B-2FB0-BA0B2E9644A6}"/>
-                </a:ext>
-              </a:extLst>
-            </p:cNvPr>
-            <p:cNvGrpSpPr/>
-            <p:nvPr/>
-          </p:nvGrpSpPr>
-          <p:grpSpPr>
-            <a:xfrm>
-              <a:off x="1063637" y="5148440"/>
-              <a:ext cx="4745966" cy="488740"/>
-              <a:chOff x="-648299" y="2326848"/>
-              <a:chExt cx="4745966" cy="488740"/>
-            </a:xfrm>
-          </p:grpSpPr>
-          <p:sp>
-            <p:nvSpPr>
-              <p:cNvPr id="50" name="Rectangle 49">
-                <a:extLst>
-                  <a:ext uri="{FF2B5EF4-FFF2-40B4-BE49-F238E27FC236}">
-                    <a16:creationId xmlns:a16="http://schemas.microsoft.com/office/drawing/2014/main" id="{CFC40432-958C-952B-6872-3370A26A793F}"/>
-                  </a:ext>
-                </a:extLst>
-              </p:cNvPr>
-              <p:cNvSpPr/>
-              <p:nvPr/>
-            </p:nvSpPr>
-            <p:spPr>
-              <a:xfrm>
-                <a:off x="-648299" y="2326848"/>
-                <a:ext cx="1234440" cy="468628"/>
-              </a:xfrm>
-              <a:prstGeom prst="rect">
-                <a:avLst/>
-              </a:prstGeom>
-              <a:ln/>
-            </p:spPr>
-            <p:style>
-              <a:lnRef idx="1">
-                <a:schemeClr val="accent6"/>
-              </a:lnRef>
-              <a:fillRef idx="2">
-                <a:schemeClr val="accent6"/>
-              </a:fillRef>
-              <a:effectRef idx="1">
-                <a:schemeClr val="accent6"/>
-              </a:effectRef>
-              <a:fontRef idx="minor">
-                <a:schemeClr val="dk1"/>
-              </a:fontRef>
-            </p:style>
-            <p:txBody>
-              <a:bodyPr rtlCol="0" anchor="ctr"/>
-              <a:lstStyle/>
-              <a:p>
-                <a:r>
-                  <a:rPr lang="en-US" sz="2000" dirty="0">
-                    <a:solidFill>
-                      <a:schemeClr val="tx1"/>
-                    </a:solidFill>
-                  </a:rPr>
-                  <a:t>send</a:t>
-                </a:r>
-              </a:p>
-            </p:txBody>
-          </p:sp>
-          <p:sp>
-            <p:nvSpPr>
-              <p:cNvPr id="51" name="Rectangle 50">
-                <a:extLst>
-                  <a:ext uri="{FF2B5EF4-FFF2-40B4-BE49-F238E27FC236}">
-                    <a16:creationId xmlns:a16="http://schemas.microsoft.com/office/drawing/2014/main" id="{2307C3DA-FED1-E2EA-9531-AEE61B0DD710}"/>
-                  </a:ext>
-                </a:extLst>
-              </p:cNvPr>
-              <p:cNvSpPr/>
-              <p:nvPr/>
-            </p:nvSpPr>
-            <p:spPr>
-              <a:xfrm>
-                <a:off x="2863227" y="2346960"/>
-                <a:ext cx="1234440" cy="468628"/>
-              </a:xfrm>
-              <a:prstGeom prst="rect">
-                <a:avLst/>
-              </a:prstGeom>
-              <a:ln/>
-            </p:spPr>
-            <p:style>
-              <a:lnRef idx="1">
-                <a:schemeClr val="accent6"/>
-              </a:lnRef>
-              <a:fillRef idx="2">
-                <a:schemeClr val="accent6"/>
-              </a:fillRef>
-              <a:effectRef idx="1">
-                <a:schemeClr val="accent6"/>
-              </a:effectRef>
-              <a:fontRef idx="minor">
-                <a:schemeClr val="dk1"/>
-              </a:fontRef>
-            </p:style>
-            <p:txBody>
-              <a:bodyPr rtlCol="0" anchor="ctr"/>
-              <a:lstStyle/>
-              <a:p>
-                <a:r>
-                  <a:rPr lang="en-US" sz="2000" dirty="0">
-                    <a:solidFill>
-                      <a:schemeClr val="tx1"/>
-                    </a:solidFill>
-                  </a:rPr>
-                  <a:t>receive</a:t>
-                </a:r>
-              </a:p>
-            </p:txBody>
-          </p:sp>
-          <p:sp>
-            <p:nvSpPr>
-              <p:cNvPr id="52" name="Rectangle 51">
-                <a:extLst>
-                  <a:ext uri="{FF2B5EF4-FFF2-40B4-BE49-F238E27FC236}">
-                    <a16:creationId xmlns:a16="http://schemas.microsoft.com/office/drawing/2014/main" id="{BC3D1DA1-8838-02F1-198E-80213880467B}"/>
-                  </a:ext>
-                </a:extLst>
-              </p:cNvPr>
-              <p:cNvSpPr/>
-              <p:nvPr/>
-            </p:nvSpPr>
-            <p:spPr>
-              <a:xfrm>
-                <a:off x="586141" y="2333371"/>
-                <a:ext cx="2255186" cy="468628"/>
-              </a:xfrm>
-              <a:prstGeom prst="rect">
-                <a:avLst/>
-              </a:prstGeom>
-              <a:solidFill>
-                <a:srgbClr val="FFFF00"/>
-              </a:solidFill>
-              <a:ln>
-                <a:solidFill>
-                  <a:srgbClr val="0070C0"/>
-                </a:solidFill>
-              </a:ln>
-            </p:spPr>
-            <p:style>
-              <a:lnRef idx="2">
-                <a:schemeClr val="accent1">
-                  <a:shade val="50000"/>
-                </a:schemeClr>
-              </a:lnRef>
-              <a:fillRef idx="1">
-                <a:schemeClr val="accent1"/>
-              </a:fillRef>
-              <a:effectRef idx="0">
-                <a:schemeClr val="accent1"/>
-              </a:effectRef>
-              <a:fontRef idx="minor">
-                <a:schemeClr val="lt1"/>
-              </a:fontRef>
-            </p:style>
-            <p:txBody>
-              <a:bodyPr rtlCol="0" anchor="ctr"/>
-              <a:lstStyle/>
-              <a:p>
-                <a:r>
-                  <a:rPr lang="en-US" sz="2000" dirty="0">
-                    <a:solidFill>
-                      <a:schemeClr val="tx1"/>
-                    </a:solidFill>
-                  </a:rPr>
-                  <a:t>wait</a:t>
-                </a:r>
-              </a:p>
-            </p:txBody>
-          </p:sp>
-        </p:grpSp>
-        <p:grpSp>
-          <p:nvGrpSpPr>
-            <p:cNvPr id="53" name="Group 52">
-              <a:extLst>
-                <a:ext uri="{FF2B5EF4-FFF2-40B4-BE49-F238E27FC236}">
-                  <a16:creationId xmlns:a16="http://schemas.microsoft.com/office/drawing/2014/main" id="{B0F02838-D0F8-BD56-D733-FEDFE2B23448}"/>
-                </a:ext>
-              </a:extLst>
-            </p:cNvPr>
-            <p:cNvGrpSpPr/>
-            <p:nvPr/>
-          </p:nvGrpSpPr>
-          <p:grpSpPr>
-            <a:xfrm>
-              <a:off x="880134" y="4710833"/>
-              <a:ext cx="4822166" cy="494722"/>
-              <a:chOff x="575334" y="4406033"/>
-              <a:chExt cx="4822166" cy="494722"/>
-            </a:xfrm>
-          </p:grpSpPr>
-          <p:sp>
-            <p:nvSpPr>
-              <p:cNvPr id="54" name="Rectangle 53">
-                <a:extLst>
-                  <a:ext uri="{FF2B5EF4-FFF2-40B4-BE49-F238E27FC236}">
-                    <a16:creationId xmlns:a16="http://schemas.microsoft.com/office/drawing/2014/main" id="{08972302-CCB6-9709-0572-0B9CCE455266}"/>
-                  </a:ext>
-                </a:extLst>
-              </p:cNvPr>
-              <p:cNvSpPr/>
-              <p:nvPr/>
-            </p:nvSpPr>
-            <p:spPr>
-              <a:xfrm>
-                <a:off x="575334" y="4425604"/>
-                <a:ext cx="1320800" cy="442534"/>
-              </a:xfrm>
-              <a:prstGeom prst="rect">
-                <a:avLst/>
-              </a:prstGeom>
-              <a:ln/>
-            </p:spPr>
-            <p:style>
-              <a:lnRef idx="1">
-                <a:schemeClr val="accent6"/>
-              </a:lnRef>
-              <a:fillRef idx="2">
-                <a:schemeClr val="accent6"/>
-              </a:fillRef>
-              <a:effectRef idx="1">
-                <a:schemeClr val="accent6"/>
-              </a:effectRef>
-              <a:fontRef idx="minor">
-                <a:schemeClr val="dk1"/>
-              </a:fontRef>
-            </p:style>
-            <p:txBody>
-              <a:bodyPr rtlCol="0" anchor="ctr"/>
-              <a:lstStyle/>
-              <a:p>
-                <a:r>
-                  <a:rPr lang="en-US" sz="2000" dirty="0">
-                    <a:solidFill>
-                      <a:schemeClr val="tx1"/>
-                    </a:solidFill>
-                  </a:rPr>
-                  <a:t>send</a:t>
-                </a:r>
-              </a:p>
-            </p:txBody>
-          </p:sp>
-          <p:sp>
-            <p:nvSpPr>
-              <p:cNvPr id="55" name="Rectangle 54">
-                <a:extLst>
-                  <a:ext uri="{FF2B5EF4-FFF2-40B4-BE49-F238E27FC236}">
-                    <a16:creationId xmlns:a16="http://schemas.microsoft.com/office/drawing/2014/main" id="{FE22DEE2-3309-56DA-BA98-74B2D7C89158}"/>
-                  </a:ext>
-                </a:extLst>
-              </p:cNvPr>
-              <p:cNvSpPr/>
-              <p:nvPr/>
-            </p:nvSpPr>
-            <p:spPr>
-              <a:xfrm>
-                <a:off x="4163060" y="4432127"/>
-                <a:ext cx="1234440" cy="468628"/>
-              </a:xfrm>
-              <a:prstGeom prst="rect">
-                <a:avLst/>
-              </a:prstGeom>
-              <a:ln/>
-            </p:spPr>
-            <p:style>
-              <a:lnRef idx="1">
-                <a:schemeClr val="accent6"/>
-              </a:lnRef>
-              <a:fillRef idx="2">
-                <a:schemeClr val="accent6"/>
-              </a:fillRef>
-              <a:effectRef idx="1">
-                <a:schemeClr val="accent6"/>
-              </a:effectRef>
-              <a:fontRef idx="minor">
-                <a:schemeClr val="dk1"/>
-              </a:fontRef>
-            </p:style>
-            <p:txBody>
-              <a:bodyPr rtlCol="0" anchor="ctr"/>
-              <a:lstStyle/>
-              <a:p>
-                <a:r>
-                  <a:rPr lang="en-US" sz="2000" dirty="0">
-                    <a:solidFill>
-                      <a:schemeClr val="tx1"/>
-                    </a:solidFill>
-                  </a:rPr>
-                  <a:t>receive</a:t>
-                </a:r>
-              </a:p>
-            </p:txBody>
-          </p:sp>
-          <p:sp>
-            <p:nvSpPr>
-              <p:cNvPr id="56" name="Rectangle 55">
-                <a:extLst>
-                  <a:ext uri="{FF2B5EF4-FFF2-40B4-BE49-F238E27FC236}">
-                    <a16:creationId xmlns:a16="http://schemas.microsoft.com/office/drawing/2014/main" id="{16D55FBC-F6C0-31BD-82FE-3A4A3C3A33FA}"/>
-                  </a:ext>
-                </a:extLst>
-              </p:cNvPr>
-              <p:cNvSpPr/>
-              <p:nvPr/>
-            </p:nvSpPr>
-            <p:spPr>
-              <a:xfrm>
-                <a:off x="1896134" y="4406033"/>
-                <a:ext cx="2251662" cy="468628"/>
-              </a:xfrm>
-              <a:prstGeom prst="rect">
-                <a:avLst/>
-              </a:prstGeom>
-              <a:solidFill>
-                <a:srgbClr val="FFFF00"/>
-              </a:solidFill>
-              <a:ln>
-                <a:solidFill>
-                  <a:srgbClr val="0070C0"/>
-                </a:solidFill>
-              </a:ln>
-            </p:spPr>
-            <p:style>
-              <a:lnRef idx="2">
-                <a:schemeClr val="accent1">
-                  <a:shade val="50000"/>
-                </a:schemeClr>
-              </a:lnRef>
-              <a:fillRef idx="1">
-                <a:schemeClr val="accent1"/>
-              </a:fillRef>
-              <a:effectRef idx="0">
-                <a:schemeClr val="accent1"/>
-              </a:effectRef>
-              <a:fontRef idx="minor">
-                <a:schemeClr val="lt1"/>
-              </a:fontRef>
-            </p:style>
-            <p:txBody>
-              <a:bodyPr rtlCol="0" anchor="ctr"/>
-              <a:lstStyle/>
-              <a:p>
-                <a:r>
-                  <a:rPr lang="en-US" sz="2000" dirty="0">
-                    <a:solidFill>
-                      <a:schemeClr val="tx1"/>
-                    </a:solidFill>
-                  </a:rPr>
-                  <a:t>wait</a:t>
-                </a:r>
-              </a:p>
-            </p:txBody>
-          </p:sp>
-        </p:grpSp>
-        <p:grpSp>
-          <p:nvGrpSpPr>
-            <p:cNvPr id="65" name="Group 64">
-              <a:extLst>
-                <a:ext uri="{FF2B5EF4-FFF2-40B4-BE49-F238E27FC236}">
-                  <a16:creationId xmlns:a16="http://schemas.microsoft.com/office/drawing/2014/main" id="{A600B712-6C6F-51EA-917A-D5B4819DF697}"/>
-                </a:ext>
-              </a:extLst>
-            </p:cNvPr>
-            <p:cNvGrpSpPr/>
-            <p:nvPr/>
-          </p:nvGrpSpPr>
-          <p:grpSpPr>
-            <a:xfrm>
-              <a:off x="728956" y="4248728"/>
-              <a:ext cx="4831080" cy="481674"/>
-              <a:chOff x="1485900" y="2364394"/>
-              <a:chExt cx="4831080" cy="481674"/>
-            </a:xfrm>
-          </p:grpSpPr>
-          <p:sp>
-            <p:nvSpPr>
-              <p:cNvPr id="66" name="Rectangle 65">
-                <a:extLst>
-                  <a:ext uri="{FF2B5EF4-FFF2-40B4-BE49-F238E27FC236}">
-                    <a16:creationId xmlns:a16="http://schemas.microsoft.com/office/drawing/2014/main" id="{862DB715-0EBB-54B0-AFD9-9ECA6240CD8C}"/>
-                  </a:ext>
-                </a:extLst>
-              </p:cNvPr>
-              <p:cNvSpPr/>
-              <p:nvPr/>
-            </p:nvSpPr>
-            <p:spPr>
-              <a:xfrm>
-                <a:off x="1485900" y="2377440"/>
-                <a:ext cx="1234440" cy="468628"/>
-              </a:xfrm>
-              <a:prstGeom prst="rect">
-                <a:avLst/>
-              </a:prstGeom>
-              <a:ln/>
-            </p:spPr>
-            <p:style>
-              <a:lnRef idx="1">
-                <a:schemeClr val="accent6"/>
-              </a:lnRef>
-              <a:fillRef idx="2">
-                <a:schemeClr val="accent6"/>
-              </a:fillRef>
-              <a:effectRef idx="1">
-                <a:schemeClr val="accent6"/>
-              </a:effectRef>
-              <a:fontRef idx="minor">
-                <a:schemeClr val="dk1"/>
-              </a:fontRef>
-            </p:style>
-            <p:txBody>
-              <a:bodyPr rtlCol="0" anchor="ctr"/>
-              <a:lstStyle/>
-              <a:p>
-                <a:r>
-                  <a:rPr lang="en-US" sz="2000" dirty="0">
-                    <a:solidFill>
-                      <a:schemeClr val="tx1"/>
-                    </a:solidFill>
-                  </a:rPr>
-                  <a:t>send</a:t>
-                </a:r>
-              </a:p>
-            </p:txBody>
-          </p:sp>
-          <p:sp>
-            <p:nvSpPr>
-              <p:cNvPr id="67" name="Rectangle 66">
-                <a:extLst>
-                  <a:ext uri="{FF2B5EF4-FFF2-40B4-BE49-F238E27FC236}">
-                    <a16:creationId xmlns:a16="http://schemas.microsoft.com/office/drawing/2014/main" id="{D1E2B88A-0509-42E4-DF5D-AECD08D1DB35}"/>
-                  </a:ext>
-                </a:extLst>
-              </p:cNvPr>
-              <p:cNvSpPr/>
-              <p:nvPr/>
-            </p:nvSpPr>
-            <p:spPr>
-              <a:xfrm>
-                <a:off x="5082540" y="2364394"/>
-                <a:ext cx="1234440" cy="468628"/>
-              </a:xfrm>
-              <a:prstGeom prst="rect">
-                <a:avLst/>
-              </a:prstGeom>
-              <a:ln/>
-            </p:spPr>
-            <p:style>
-              <a:lnRef idx="1">
-                <a:schemeClr val="accent6"/>
-              </a:lnRef>
-              <a:fillRef idx="2">
-                <a:schemeClr val="accent6"/>
-              </a:fillRef>
-              <a:effectRef idx="1">
-                <a:schemeClr val="accent6"/>
-              </a:effectRef>
-              <a:fontRef idx="minor">
-                <a:schemeClr val="dk1"/>
-              </a:fontRef>
-            </p:style>
-            <p:txBody>
-              <a:bodyPr rtlCol="0" anchor="ctr"/>
-              <a:lstStyle/>
-              <a:p>
-                <a:r>
-                  <a:rPr lang="en-US" sz="2000" dirty="0">
-                    <a:solidFill>
-                      <a:schemeClr val="tx1"/>
-                    </a:solidFill>
-                  </a:rPr>
-                  <a:t>receive</a:t>
-                </a:r>
-              </a:p>
-            </p:txBody>
-          </p:sp>
-          <p:sp>
-            <p:nvSpPr>
-              <p:cNvPr id="68" name="Rectangle 67">
-                <a:extLst>
-                  <a:ext uri="{FF2B5EF4-FFF2-40B4-BE49-F238E27FC236}">
-                    <a16:creationId xmlns:a16="http://schemas.microsoft.com/office/drawing/2014/main" id="{6DB95BA2-2788-85B7-A0E1-A4F9F29D5EF4}"/>
-                  </a:ext>
-                </a:extLst>
-              </p:cNvPr>
-              <p:cNvSpPr/>
-              <p:nvPr/>
-            </p:nvSpPr>
-            <p:spPr>
-              <a:xfrm>
-                <a:off x="2720340" y="2377440"/>
-                <a:ext cx="2338022" cy="468628"/>
-              </a:xfrm>
-              <a:prstGeom prst="rect">
-                <a:avLst/>
-              </a:prstGeom>
-              <a:solidFill>
-                <a:srgbClr val="FFFF00"/>
-              </a:solidFill>
-              <a:ln>
-                <a:solidFill>
-                  <a:srgbClr val="0070C0"/>
-                </a:solidFill>
-              </a:ln>
-            </p:spPr>
-            <p:style>
-              <a:lnRef idx="2">
-                <a:schemeClr val="accent1">
-                  <a:shade val="50000"/>
-                </a:schemeClr>
-              </a:lnRef>
-              <a:fillRef idx="1">
-                <a:schemeClr val="accent1"/>
-              </a:fillRef>
-              <a:effectRef idx="0">
-                <a:schemeClr val="accent1"/>
-              </a:effectRef>
-              <a:fontRef idx="minor">
-                <a:schemeClr val="lt1"/>
-              </a:fontRef>
-            </p:style>
-            <p:txBody>
-              <a:bodyPr rtlCol="0" anchor="ctr"/>
-              <a:lstStyle/>
-              <a:p>
-                <a:r>
-                  <a:rPr lang="en-US" sz="2000" dirty="0">
-                    <a:solidFill>
-                      <a:schemeClr val="tx1"/>
-                    </a:solidFill>
-                  </a:rPr>
-                  <a:t>wait</a:t>
-                </a:r>
-              </a:p>
-            </p:txBody>
-          </p:sp>
-        </p:grpSp>
-      </p:grpSp>
-      <p:grpSp>
-        <p:nvGrpSpPr>
-          <p:cNvPr id="86" name="Group 85">
-            <a:extLst>
-              <a:ext uri="{FF2B5EF4-FFF2-40B4-BE49-F238E27FC236}">
-                <a16:creationId xmlns:a16="http://schemas.microsoft.com/office/drawing/2014/main" id="{5176B963-A4DF-0123-9888-C475085E882C}"/>
-              </a:ext>
-            </a:extLst>
-          </p:cNvPr>
-          <p:cNvGrpSpPr/>
-          <p:nvPr/>
-        </p:nvGrpSpPr>
-        <p:grpSpPr>
-          <a:xfrm>
-            <a:off x="204422" y="2825268"/>
-            <a:ext cx="11603265" cy="429918"/>
-            <a:chOff x="275566" y="2038843"/>
-            <a:chExt cx="13845540" cy="475151"/>
-          </a:xfrm>
-        </p:grpSpPr>
-        <p:grpSp>
-          <p:nvGrpSpPr>
-            <p:cNvPr id="70" name="Group 69">
-              <a:extLst>
-                <a:ext uri="{FF2B5EF4-FFF2-40B4-BE49-F238E27FC236}">
-                  <a16:creationId xmlns:a16="http://schemas.microsoft.com/office/drawing/2014/main" id="{E0C733AD-12E5-5746-0B25-760C18C4E98F}"/>
-                </a:ext>
-              </a:extLst>
-            </p:cNvPr>
-            <p:cNvGrpSpPr/>
-            <p:nvPr/>
-          </p:nvGrpSpPr>
-          <p:grpSpPr>
-            <a:xfrm>
-              <a:off x="275566" y="2038843"/>
-              <a:ext cx="4610100" cy="468628"/>
-              <a:chOff x="1485900" y="2377440"/>
-              <a:chExt cx="4610100" cy="468628"/>
-            </a:xfrm>
-          </p:grpSpPr>
-          <p:sp>
-            <p:nvSpPr>
-              <p:cNvPr id="71" name="Rectangle 70">
-                <a:extLst>
-                  <a:ext uri="{FF2B5EF4-FFF2-40B4-BE49-F238E27FC236}">
-                    <a16:creationId xmlns:a16="http://schemas.microsoft.com/office/drawing/2014/main" id="{85B21E4C-FD23-F42D-3BAD-EF62DF4A932B}"/>
-                  </a:ext>
-                </a:extLst>
-              </p:cNvPr>
-              <p:cNvSpPr/>
-              <p:nvPr/>
-            </p:nvSpPr>
-            <p:spPr>
-              <a:xfrm>
-                <a:off x="1485900" y="2377440"/>
-                <a:ext cx="1234440" cy="468628"/>
-              </a:xfrm>
-              <a:prstGeom prst="rect">
-                <a:avLst/>
-              </a:prstGeom>
-              <a:ln/>
-            </p:spPr>
-            <p:style>
-              <a:lnRef idx="1">
-                <a:schemeClr val="accent6"/>
-              </a:lnRef>
-              <a:fillRef idx="2">
-                <a:schemeClr val="accent6"/>
-              </a:fillRef>
-              <a:effectRef idx="1">
-                <a:schemeClr val="accent6"/>
-              </a:effectRef>
-              <a:fontRef idx="minor">
-                <a:schemeClr val="dk1"/>
-              </a:fontRef>
-            </p:style>
-            <p:txBody>
-              <a:bodyPr rtlCol="0" anchor="ctr"/>
-              <a:lstStyle/>
-              <a:p>
-                <a:r>
-                  <a:rPr lang="en-US" sz="2000" dirty="0">
-                    <a:solidFill>
-                      <a:schemeClr val="tx1"/>
-                    </a:solidFill>
-                  </a:rPr>
-                  <a:t>send</a:t>
-                </a:r>
-              </a:p>
-            </p:txBody>
-          </p:sp>
-          <p:sp>
-            <p:nvSpPr>
-              <p:cNvPr id="72" name="Rectangle 71">
-                <a:extLst>
-                  <a:ext uri="{FF2B5EF4-FFF2-40B4-BE49-F238E27FC236}">
-                    <a16:creationId xmlns:a16="http://schemas.microsoft.com/office/drawing/2014/main" id="{BD9EEAB6-370C-9AD5-7988-28FA7420DCB8}"/>
-                  </a:ext>
-                </a:extLst>
-              </p:cNvPr>
-              <p:cNvSpPr/>
-              <p:nvPr/>
-            </p:nvSpPr>
-            <p:spPr>
-              <a:xfrm>
-                <a:off x="4861560" y="2377440"/>
-                <a:ext cx="1234440" cy="468628"/>
-              </a:xfrm>
-              <a:prstGeom prst="rect">
-                <a:avLst/>
-              </a:prstGeom>
-              <a:ln/>
-            </p:spPr>
-            <p:style>
-              <a:lnRef idx="1">
-                <a:schemeClr val="accent6"/>
-              </a:lnRef>
-              <a:fillRef idx="2">
-                <a:schemeClr val="accent6"/>
-              </a:fillRef>
-              <a:effectRef idx="1">
-                <a:schemeClr val="accent6"/>
-              </a:effectRef>
-              <a:fontRef idx="minor">
-                <a:schemeClr val="dk1"/>
-              </a:fontRef>
-            </p:style>
-            <p:txBody>
-              <a:bodyPr rtlCol="0" anchor="ctr"/>
-              <a:lstStyle/>
-              <a:p>
-                <a:r>
-                  <a:rPr lang="en-US" sz="2000" dirty="0">
-                    <a:solidFill>
-                      <a:schemeClr val="tx1"/>
-                    </a:solidFill>
-                  </a:rPr>
-                  <a:t>receive</a:t>
-                </a:r>
-              </a:p>
-            </p:txBody>
-          </p:sp>
-          <p:sp>
-            <p:nvSpPr>
-              <p:cNvPr id="73" name="Rectangle 72">
-                <a:extLst>
-                  <a:ext uri="{FF2B5EF4-FFF2-40B4-BE49-F238E27FC236}">
-                    <a16:creationId xmlns:a16="http://schemas.microsoft.com/office/drawing/2014/main" id="{C65B9EA3-31C4-ADF8-50E0-A1A1094B5F0B}"/>
-                  </a:ext>
-                </a:extLst>
-              </p:cNvPr>
-              <p:cNvSpPr/>
-              <p:nvPr/>
-            </p:nvSpPr>
-            <p:spPr>
-              <a:xfrm>
-                <a:off x="2720340" y="2377440"/>
-                <a:ext cx="2141220" cy="468628"/>
-              </a:xfrm>
-              <a:prstGeom prst="rect">
-                <a:avLst/>
-              </a:prstGeom>
-              <a:solidFill>
-                <a:srgbClr val="FFFF00"/>
-              </a:solidFill>
-              <a:ln>
-                <a:solidFill>
-                  <a:srgbClr val="0070C0"/>
-                </a:solidFill>
-              </a:ln>
-            </p:spPr>
-            <p:style>
-              <a:lnRef idx="2">
-                <a:schemeClr val="accent1">
-                  <a:shade val="50000"/>
-                </a:schemeClr>
-              </a:lnRef>
-              <a:fillRef idx="1">
-                <a:schemeClr val="accent1"/>
-              </a:fillRef>
-              <a:effectRef idx="0">
-                <a:schemeClr val="accent1"/>
-              </a:effectRef>
-              <a:fontRef idx="minor">
-                <a:schemeClr val="lt1"/>
-              </a:fontRef>
-            </p:style>
-            <p:txBody>
-              <a:bodyPr rtlCol="0" anchor="ctr"/>
-              <a:lstStyle/>
-              <a:p>
-                <a:r>
-                  <a:rPr lang="en-US" sz="2000" dirty="0">
-                    <a:solidFill>
-                      <a:schemeClr val="tx1"/>
-                    </a:solidFill>
-                  </a:rPr>
-                  <a:t>wait</a:t>
-                </a:r>
-              </a:p>
-            </p:txBody>
-          </p:sp>
-        </p:grpSp>
-        <p:grpSp>
-          <p:nvGrpSpPr>
-            <p:cNvPr id="74" name="Group 73">
-              <a:extLst>
-                <a:ext uri="{FF2B5EF4-FFF2-40B4-BE49-F238E27FC236}">
-                  <a16:creationId xmlns:a16="http://schemas.microsoft.com/office/drawing/2014/main" id="{180C92F6-CD87-BB94-A89C-06FD23E46891}"/>
-                </a:ext>
-              </a:extLst>
-            </p:cNvPr>
-            <p:cNvGrpSpPr/>
-            <p:nvPr/>
-          </p:nvGrpSpPr>
-          <p:grpSpPr>
-            <a:xfrm>
-              <a:off x="4885666" y="2038843"/>
-              <a:ext cx="4610100" cy="468628"/>
-              <a:chOff x="1485900" y="2332079"/>
-              <a:chExt cx="4610100" cy="468628"/>
-            </a:xfrm>
-          </p:grpSpPr>
-          <p:sp>
-            <p:nvSpPr>
-              <p:cNvPr id="75" name="Rectangle 74">
-                <a:extLst>
-                  <a:ext uri="{FF2B5EF4-FFF2-40B4-BE49-F238E27FC236}">
-                    <a16:creationId xmlns:a16="http://schemas.microsoft.com/office/drawing/2014/main" id="{983D0E3A-D112-0196-149D-C9315AEC3E70}"/>
-                  </a:ext>
-                </a:extLst>
-              </p:cNvPr>
-              <p:cNvSpPr/>
-              <p:nvPr/>
-            </p:nvSpPr>
-            <p:spPr>
-              <a:xfrm>
-                <a:off x="1485900" y="2332079"/>
-                <a:ext cx="1234440" cy="468628"/>
-              </a:xfrm>
-              <a:prstGeom prst="rect">
-                <a:avLst/>
-              </a:prstGeom>
-              <a:ln/>
-            </p:spPr>
-            <p:style>
-              <a:lnRef idx="1">
-                <a:schemeClr val="accent6"/>
-              </a:lnRef>
-              <a:fillRef idx="2">
-                <a:schemeClr val="accent6"/>
-              </a:fillRef>
-              <a:effectRef idx="1">
-                <a:schemeClr val="accent6"/>
-              </a:effectRef>
-              <a:fontRef idx="minor">
-                <a:schemeClr val="dk1"/>
-              </a:fontRef>
-            </p:style>
-            <p:txBody>
-              <a:bodyPr rtlCol="0" anchor="ctr"/>
-              <a:lstStyle/>
-              <a:p>
-                <a:r>
-                  <a:rPr lang="en-US" sz="2000" dirty="0">
-                    <a:solidFill>
-                      <a:schemeClr val="tx1"/>
-                    </a:solidFill>
-                  </a:rPr>
-                  <a:t>send</a:t>
-                </a:r>
-              </a:p>
-            </p:txBody>
-          </p:sp>
-          <p:sp>
-            <p:nvSpPr>
-              <p:cNvPr id="76" name="Rectangle 75">
-                <a:extLst>
-                  <a:ext uri="{FF2B5EF4-FFF2-40B4-BE49-F238E27FC236}">
-                    <a16:creationId xmlns:a16="http://schemas.microsoft.com/office/drawing/2014/main" id="{6B2979F7-47F3-CFFE-95CB-75E0CEB0E6D7}"/>
-                  </a:ext>
-                </a:extLst>
-              </p:cNvPr>
-              <p:cNvSpPr/>
-              <p:nvPr/>
-            </p:nvSpPr>
-            <p:spPr>
-              <a:xfrm>
-                <a:off x="4861560" y="2332079"/>
-                <a:ext cx="1234440" cy="468628"/>
-              </a:xfrm>
-              <a:prstGeom prst="rect">
-                <a:avLst/>
-              </a:prstGeom>
-              <a:ln/>
-            </p:spPr>
-            <p:style>
-              <a:lnRef idx="1">
-                <a:schemeClr val="accent6"/>
-              </a:lnRef>
-              <a:fillRef idx="2">
-                <a:schemeClr val="accent6"/>
-              </a:fillRef>
-              <a:effectRef idx="1">
-                <a:schemeClr val="accent6"/>
-              </a:effectRef>
-              <a:fontRef idx="minor">
-                <a:schemeClr val="dk1"/>
-              </a:fontRef>
-            </p:style>
-            <p:txBody>
-              <a:bodyPr rtlCol="0" anchor="ctr"/>
-              <a:lstStyle/>
-              <a:p>
-                <a:r>
-                  <a:rPr lang="en-US" sz="2000" dirty="0">
-                    <a:solidFill>
-                      <a:schemeClr val="tx1"/>
-                    </a:solidFill>
-                  </a:rPr>
-                  <a:t>receive</a:t>
-                </a:r>
-              </a:p>
-            </p:txBody>
-          </p:sp>
-          <p:sp>
-            <p:nvSpPr>
-              <p:cNvPr id="77" name="Rectangle 76">
-                <a:extLst>
-                  <a:ext uri="{FF2B5EF4-FFF2-40B4-BE49-F238E27FC236}">
-                    <a16:creationId xmlns:a16="http://schemas.microsoft.com/office/drawing/2014/main" id="{D03FA558-2930-6B67-F8D3-BF32899EC7CC}"/>
-                  </a:ext>
-                </a:extLst>
-              </p:cNvPr>
-              <p:cNvSpPr/>
-              <p:nvPr/>
-            </p:nvSpPr>
-            <p:spPr>
-              <a:xfrm>
-                <a:off x="2720340" y="2332079"/>
-                <a:ext cx="2141220" cy="468628"/>
-              </a:xfrm>
-              <a:prstGeom prst="rect">
-                <a:avLst/>
-              </a:prstGeom>
-              <a:solidFill>
-                <a:srgbClr val="FFFF00"/>
-              </a:solidFill>
-              <a:ln>
-                <a:solidFill>
-                  <a:srgbClr val="0070C0"/>
-                </a:solidFill>
-              </a:ln>
-            </p:spPr>
-            <p:style>
-              <a:lnRef idx="2">
-                <a:schemeClr val="accent1">
-                  <a:shade val="50000"/>
-                </a:schemeClr>
-              </a:lnRef>
-              <a:fillRef idx="1">
-                <a:schemeClr val="accent1"/>
-              </a:fillRef>
-              <a:effectRef idx="0">
-                <a:schemeClr val="accent1"/>
-              </a:effectRef>
-              <a:fontRef idx="minor">
-                <a:schemeClr val="lt1"/>
-              </a:fontRef>
-            </p:style>
-            <p:txBody>
-              <a:bodyPr rtlCol="0" anchor="ctr"/>
-              <a:lstStyle/>
-              <a:p>
-                <a:r>
-                  <a:rPr lang="en-US" sz="2000" dirty="0">
-                    <a:solidFill>
-                      <a:schemeClr val="tx1"/>
-                    </a:solidFill>
-                  </a:rPr>
-                  <a:t>wait</a:t>
-                </a:r>
-              </a:p>
-            </p:txBody>
-          </p:sp>
-        </p:grpSp>
-        <p:grpSp>
-          <p:nvGrpSpPr>
-            <p:cNvPr id="78" name="Group 77">
-              <a:extLst>
-                <a:ext uri="{FF2B5EF4-FFF2-40B4-BE49-F238E27FC236}">
-                  <a16:creationId xmlns:a16="http://schemas.microsoft.com/office/drawing/2014/main" id="{76F58E3A-2CE8-8D4B-3265-99CE2E26F836}"/>
-                </a:ext>
-              </a:extLst>
-            </p:cNvPr>
-            <p:cNvGrpSpPr/>
-            <p:nvPr/>
-          </p:nvGrpSpPr>
-          <p:grpSpPr>
-            <a:xfrm>
-              <a:off x="9511006" y="2045366"/>
-              <a:ext cx="4610100" cy="468628"/>
-              <a:chOff x="1485900" y="2377440"/>
-              <a:chExt cx="4610100" cy="468628"/>
-            </a:xfrm>
-          </p:grpSpPr>
-          <p:sp>
-            <p:nvSpPr>
-              <p:cNvPr id="79" name="Rectangle 78">
-                <a:extLst>
-                  <a:ext uri="{FF2B5EF4-FFF2-40B4-BE49-F238E27FC236}">
-                    <a16:creationId xmlns:a16="http://schemas.microsoft.com/office/drawing/2014/main" id="{07931022-8389-65A1-CE37-D4C119DFD595}"/>
-                  </a:ext>
-                </a:extLst>
-              </p:cNvPr>
-              <p:cNvSpPr/>
-              <p:nvPr/>
-            </p:nvSpPr>
-            <p:spPr>
-              <a:xfrm>
-                <a:off x="1485900" y="2377440"/>
-                <a:ext cx="1234440" cy="468628"/>
-              </a:xfrm>
-              <a:prstGeom prst="rect">
-                <a:avLst/>
-              </a:prstGeom>
-              <a:ln/>
-            </p:spPr>
-            <p:style>
-              <a:lnRef idx="1">
-                <a:schemeClr val="accent6"/>
-              </a:lnRef>
-              <a:fillRef idx="2">
-                <a:schemeClr val="accent6"/>
-              </a:fillRef>
-              <a:effectRef idx="1">
-                <a:schemeClr val="accent6"/>
-              </a:effectRef>
-              <a:fontRef idx="minor">
-                <a:schemeClr val="dk1"/>
-              </a:fontRef>
-            </p:style>
-            <p:txBody>
-              <a:bodyPr rtlCol="0" anchor="ctr"/>
-              <a:lstStyle/>
-              <a:p>
-                <a:r>
-                  <a:rPr lang="en-US" sz="2000" dirty="0">
-                    <a:solidFill>
-                      <a:schemeClr val="tx1"/>
-                    </a:solidFill>
-                  </a:rPr>
-                  <a:t>send</a:t>
-                </a:r>
-              </a:p>
-            </p:txBody>
-          </p:sp>
-          <p:sp>
-            <p:nvSpPr>
-              <p:cNvPr id="80" name="Rectangle 79">
-                <a:extLst>
-                  <a:ext uri="{FF2B5EF4-FFF2-40B4-BE49-F238E27FC236}">
-                    <a16:creationId xmlns:a16="http://schemas.microsoft.com/office/drawing/2014/main" id="{771578F2-CE5B-DF8D-C1CC-D99DFFB94300}"/>
-                  </a:ext>
-                </a:extLst>
-              </p:cNvPr>
-              <p:cNvSpPr/>
-              <p:nvPr/>
-            </p:nvSpPr>
-            <p:spPr>
-              <a:xfrm>
-                <a:off x="4861560" y="2377440"/>
-                <a:ext cx="1234440" cy="468628"/>
-              </a:xfrm>
-              <a:prstGeom prst="rect">
-                <a:avLst/>
-              </a:prstGeom>
-              <a:ln/>
-            </p:spPr>
-            <p:style>
-              <a:lnRef idx="1">
-                <a:schemeClr val="accent6"/>
-              </a:lnRef>
-              <a:fillRef idx="2">
-                <a:schemeClr val="accent6"/>
-              </a:fillRef>
-              <a:effectRef idx="1">
-                <a:schemeClr val="accent6"/>
-              </a:effectRef>
-              <a:fontRef idx="minor">
-                <a:schemeClr val="dk1"/>
-              </a:fontRef>
-            </p:style>
-            <p:txBody>
-              <a:bodyPr rtlCol="0" anchor="ctr"/>
-              <a:lstStyle/>
-              <a:p>
-                <a:r>
-                  <a:rPr lang="en-US" sz="2000" dirty="0">
-                    <a:solidFill>
-                      <a:schemeClr val="tx1"/>
-                    </a:solidFill>
-                  </a:rPr>
-                  <a:t>receive</a:t>
-                </a:r>
-              </a:p>
-            </p:txBody>
-          </p:sp>
-          <p:sp>
-            <p:nvSpPr>
-              <p:cNvPr id="81" name="Rectangle 80">
-                <a:extLst>
-                  <a:ext uri="{FF2B5EF4-FFF2-40B4-BE49-F238E27FC236}">
-                    <a16:creationId xmlns:a16="http://schemas.microsoft.com/office/drawing/2014/main" id="{B780C2A3-31AD-CA5B-7C22-CE977052038C}"/>
-                  </a:ext>
-                </a:extLst>
-              </p:cNvPr>
-              <p:cNvSpPr/>
-              <p:nvPr/>
-            </p:nvSpPr>
-            <p:spPr>
-              <a:xfrm>
-                <a:off x="2720340" y="2377440"/>
-                <a:ext cx="2141220" cy="468628"/>
-              </a:xfrm>
-              <a:prstGeom prst="rect">
-                <a:avLst/>
-              </a:prstGeom>
-              <a:solidFill>
-                <a:srgbClr val="FFFF00"/>
-              </a:solidFill>
-              <a:ln>
-                <a:solidFill>
-                  <a:srgbClr val="0070C0"/>
-                </a:solidFill>
-              </a:ln>
-            </p:spPr>
-            <p:style>
-              <a:lnRef idx="2">
-                <a:schemeClr val="accent1">
-                  <a:shade val="50000"/>
-                </a:schemeClr>
-              </a:lnRef>
-              <a:fillRef idx="1">
-                <a:schemeClr val="accent1"/>
-              </a:fillRef>
-              <a:effectRef idx="0">
-                <a:schemeClr val="accent1"/>
-              </a:effectRef>
-              <a:fontRef idx="minor">
-                <a:schemeClr val="lt1"/>
-              </a:fontRef>
-            </p:style>
-            <p:txBody>
-              <a:bodyPr rtlCol="0" anchor="ctr"/>
-              <a:lstStyle/>
-              <a:p>
-                <a:r>
-                  <a:rPr lang="en-US" sz="2000" dirty="0">
-                    <a:solidFill>
-                      <a:schemeClr val="tx1"/>
-                    </a:solidFill>
-                  </a:rPr>
-                  <a:t>wait</a:t>
-                </a:r>
-              </a:p>
-            </p:txBody>
-          </p:sp>
-        </p:grpSp>
-      </p:grpSp>
-      <p:sp>
-        <p:nvSpPr>
-          <p:cNvPr id="83" name="TextBox 82">
-            <a:extLst>
-              <a:ext uri="{FF2B5EF4-FFF2-40B4-BE49-F238E27FC236}">
-                <a16:creationId xmlns:a16="http://schemas.microsoft.com/office/drawing/2014/main" id="{289CE299-DF50-7F29-AADE-259F205F8158}"/>
-              </a:ext>
-            </a:extLst>
-          </p:cNvPr>
-          <p:cNvSpPr txBox="1"/>
-          <p:nvPr/>
-        </p:nvSpPr>
-        <p:spPr>
-          <a:xfrm>
-            <a:off x="2354508" y="1645677"/>
-            <a:ext cx="3020084" cy="914400"/>
-          </a:xfrm>
-          <a:prstGeom prst="rect">
-            <a:avLst/>
-          </a:prstGeom>
-          <a:noFill/>
-          <a:ln>
-            <a:noFill/>
-          </a:ln>
-        </p:spPr>
-        <p:style>
-          <a:lnRef idx="2">
-            <a:schemeClr val="accent1">
-              <a:shade val="50000"/>
-            </a:schemeClr>
-          </a:lnRef>
-          <a:fillRef idx="1">
-            <a:schemeClr val="accent1"/>
-          </a:fillRef>
-          <a:effectRef idx="0">
-            <a:schemeClr val="accent1"/>
-          </a:effectRef>
-          <a:fontRef idx="minor">
-            <a:schemeClr val="lt1"/>
-          </a:fontRef>
-        </p:style>
-        <p:txBody>
-          <a:bodyPr rot="0" spcFirstLastPara="0" vertOverflow="overflow" horzOverflow="overflow" vert="horz" wrap="none" lIns="91440" tIns="45720" rIns="91440" bIns="45720" numCol="1" spcCol="0" rtlCol="0" fromWordArt="0" anchor="ctr" anchorCtr="0" forceAA="0" compatLnSpc="1">
-            <a:prstTxWarp prst="textNoShape">
-              <a:avLst/>
-            </a:prstTxWarp>
-            <a:noAutofit/>
-          </a:bodyPr>
-          <a:lstStyle/>
-          <a:p>
-            <a:pPr algn="l"/>
-            <a:r>
-              <a:rPr lang="en-US" sz="2400" dirty="0">
-                <a:solidFill>
-                  <a:schemeClr val="tx1"/>
-                </a:solidFill>
-                <a:latin typeface="Verdana" panose="020B0604030504040204" pitchFamily="34" charset="0"/>
-                <a:ea typeface="Verdana" panose="020B0604030504040204" pitchFamily="34" charset="0"/>
-              </a:rPr>
-              <a:t>Sequential (await)</a:t>
-            </a:r>
-          </a:p>
-        </p:txBody>
-      </p:sp>
-      <p:sp>
-        <p:nvSpPr>
-          <p:cNvPr id="84" name="TextBox 83">
-            <a:extLst>
-              <a:ext uri="{FF2B5EF4-FFF2-40B4-BE49-F238E27FC236}">
-                <a16:creationId xmlns:a16="http://schemas.microsoft.com/office/drawing/2014/main" id="{75DA8819-1E1F-21D0-D328-BA212D0F69E0}"/>
-              </a:ext>
-            </a:extLst>
-          </p:cNvPr>
-          <p:cNvSpPr txBox="1"/>
-          <p:nvPr/>
-        </p:nvSpPr>
-        <p:spPr>
-          <a:xfrm>
-            <a:off x="2360810" y="3841707"/>
-            <a:ext cx="3782084" cy="914400"/>
-          </a:xfrm>
-          <a:prstGeom prst="rect">
-            <a:avLst/>
-          </a:prstGeom>
-          <a:noFill/>
-          <a:ln>
-            <a:noFill/>
-          </a:ln>
-        </p:spPr>
-        <p:style>
-          <a:lnRef idx="2">
-            <a:schemeClr val="accent1">
-              <a:shade val="50000"/>
-            </a:schemeClr>
-          </a:lnRef>
-          <a:fillRef idx="1">
-            <a:schemeClr val="accent1"/>
-          </a:fillRef>
-          <a:effectRef idx="0">
-            <a:schemeClr val="accent1"/>
-          </a:effectRef>
-          <a:fontRef idx="minor">
-            <a:schemeClr val="lt1"/>
-          </a:fontRef>
-        </p:style>
-        <p:txBody>
-          <a:bodyPr rot="0" spcFirstLastPara="0" vertOverflow="overflow" horzOverflow="overflow" vert="horz" wrap="none" lIns="91440" tIns="45720" rIns="91440" bIns="45720" numCol="1" spcCol="0" rtlCol="0" fromWordArt="0" anchor="ctr" anchorCtr="0" forceAA="0" compatLnSpc="1">
-            <a:prstTxWarp prst="textNoShape">
-              <a:avLst/>
-            </a:prstTxWarp>
-            <a:noAutofit/>
-          </a:bodyPr>
-          <a:lstStyle/>
-          <a:p>
-            <a:pPr algn="l"/>
-            <a:r>
-              <a:rPr lang="en-US" sz="2400" dirty="0">
-                <a:solidFill>
-                  <a:schemeClr val="tx1"/>
-                </a:solidFill>
-                <a:latin typeface="Verdana" panose="020B0604030504040204" pitchFamily="34" charset="0"/>
-                <a:ea typeface="Verdana" panose="020B0604030504040204" pitchFamily="34" charset="0"/>
-              </a:rPr>
-              <a:t>Concurrent (</a:t>
-            </a:r>
-            <a:r>
-              <a:rPr lang="en-US" sz="2400" dirty="0" err="1">
-                <a:solidFill>
-                  <a:schemeClr val="tx1"/>
-                </a:solidFill>
-                <a:latin typeface="Verdana" panose="020B0604030504040204" pitchFamily="34" charset="0"/>
-                <a:ea typeface="Verdana" panose="020B0604030504040204" pitchFamily="34" charset="0"/>
-              </a:rPr>
-              <a:t>Promise.all</a:t>
-            </a:r>
-            <a:r>
-              <a:rPr lang="en-US" sz="2400" dirty="0">
-                <a:solidFill>
-                  <a:schemeClr val="tx1"/>
-                </a:solidFill>
-                <a:latin typeface="Verdana" panose="020B0604030504040204" pitchFamily="34" charset="0"/>
-                <a:ea typeface="Verdana" panose="020B0604030504040204" pitchFamily="34" charset="0"/>
-              </a:rPr>
-              <a:t>)</a:t>
-            </a:r>
-          </a:p>
-        </p:txBody>
-      </p:sp>
-      <p:sp>
-        <p:nvSpPr>
-          <p:cNvPr id="85" name="TextBox 84">
-            <a:extLst>
-              <a:ext uri="{FF2B5EF4-FFF2-40B4-BE49-F238E27FC236}">
-                <a16:creationId xmlns:a16="http://schemas.microsoft.com/office/drawing/2014/main" id="{F53C8640-347D-C02C-2069-65D5C148A1A9}"/>
-              </a:ext>
-            </a:extLst>
-          </p:cNvPr>
-          <p:cNvSpPr txBox="1"/>
-          <p:nvPr/>
-        </p:nvSpPr>
-        <p:spPr>
-          <a:xfrm>
-            <a:off x="5821608" y="1497583"/>
-            <a:ext cx="3925004" cy="1210588"/>
-          </a:xfrm>
-          <a:prstGeom prst="rect">
-            <a:avLst/>
-          </a:prstGeom>
-          <a:ln/>
-        </p:spPr>
-        <p:style>
-          <a:lnRef idx="2">
-            <a:schemeClr val="dk1"/>
-          </a:lnRef>
-          <a:fillRef idx="1">
-            <a:schemeClr val="lt1"/>
-          </a:fillRef>
-          <a:effectRef idx="0">
-            <a:schemeClr val="dk1"/>
-          </a:effectRef>
-          <a:fontRef idx="minor">
-            <a:schemeClr val="dk1"/>
-          </a:fontRef>
-        </p:style>
-        <p:txBody>
-          <a:bodyPr rot="0" spcFirstLastPara="1" vertOverflow="overflow" horzOverflow="overflow" vert="horz" wrap="square" lIns="50800" tIns="50800" rIns="50800" bIns="50800" numCol="1" spcCol="38100" rtlCol="0" anchor="ctr">
-            <a:spAutoFit/>
-          </a:bodyPr>
-          <a:lstStyle/>
-          <a:p>
-            <a:pPr marL="0" marR="0" indent="0" algn="ctr" defTabSz="2438338" rtl="0" fontAlgn="auto" latinLnBrk="0" hangingPunct="0">
-              <a:lnSpc>
-                <a:spcPct val="100000"/>
-              </a:lnSpc>
-              <a:spcBef>
-                <a:spcPts val="0"/>
-              </a:spcBef>
-              <a:spcAft>
-                <a:spcPts val="0"/>
-              </a:spcAft>
-              <a:buClrTx/>
-              <a:buSzTx/>
-              <a:buFontTx/>
-              <a:buNone/>
-              <a:tabLst/>
-            </a:pPr>
-            <a:r>
-              <a:rPr kumimoji="0" lang="en-US" sz="2400" b="0" i="0" u="none" strike="noStrike" cap="none" spc="0" normalizeH="0" baseline="0" dirty="0">
-                <a:ln>
-                  <a:noFill/>
-                </a:ln>
-                <a:solidFill>
-                  <a:srgbClr val="5E5E5E"/>
-                </a:solidFill>
-                <a:effectLst/>
-                <a:uFillTx/>
-                <a:latin typeface="+mn-lt"/>
-                <a:ea typeface="+mn-ea"/>
-                <a:cs typeface="+mn-cs"/>
-                <a:sym typeface="Helvetica Neue"/>
-              </a:rPr>
-              <a:t>“Don’t make another request until you got the last response back”</a:t>
-            </a:r>
-          </a:p>
-        </p:txBody>
-      </p:sp>
-      <p:sp>
-        <p:nvSpPr>
-          <p:cNvPr id="87" name="TextBox 86">
-            <a:extLst>
-              <a:ext uri="{FF2B5EF4-FFF2-40B4-BE49-F238E27FC236}">
-                <a16:creationId xmlns:a16="http://schemas.microsoft.com/office/drawing/2014/main" id="{5B534789-66A7-D575-0C34-AFB9DCA26C31}"/>
-              </a:ext>
-            </a:extLst>
-          </p:cNvPr>
-          <p:cNvSpPr txBox="1"/>
-          <p:nvPr/>
-        </p:nvSpPr>
-        <p:spPr>
-          <a:xfrm>
-            <a:off x="6563167" y="3693613"/>
-            <a:ext cx="3925004" cy="1210588"/>
-          </a:xfrm>
-          <a:prstGeom prst="rect">
-            <a:avLst/>
-          </a:prstGeom>
-          <a:ln/>
-        </p:spPr>
-        <p:style>
-          <a:lnRef idx="2">
-            <a:schemeClr val="dk1"/>
-          </a:lnRef>
-          <a:fillRef idx="1">
-            <a:schemeClr val="lt1"/>
-          </a:fillRef>
-          <a:effectRef idx="0">
-            <a:schemeClr val="dk1"/>
-          </a:effectRef>
-          <a:fontRef idx="minor">
-            <a:schemeClr val="dk1"/>
-          </a:fontRef>
-        </p:style>
-        <p:txBody>
-          <a:bodyPr rot="0" spcFirstLastPara="1" vertOverflow="overflow" horzOverflow="overflow" vert="horz" wrap="square" lIns="50800" tIns="50800" rIns="50800" bIns="50800" numCol="1" spcCol="38100" rtlCol="0" anchor="ctr">
-            <a:spAutoFit/>
-          </a:bodyPr>
-          <a:lstStyle/>
-          <a:p>
-            <a:pPr marL="0" marR="0" indent="0" algn="ctr" defTabSz="2438338" rtl="0" fontAlgn="auto" latinLnBrk="0" hangingPunct="0">
-              <a:lnSpc>
-                <a:spcPct val="100000"/>
-              </a:lnSpc>
-              <a:spcBef>
-                <a:spcPts val="0"/>
-              </a:spcBef>
-              <a:spcAft>
-                <a:spcPts val="0"/>
-              </a:spcAft>
-              <a:buClrTx/>
-              <a:buSzTx/>
-              <a:buFontTx/>
-              <a:buNone/>
-              <a:tabLst/>
-            </a:pPr>
-            <a:r>
-              <a:rPr kumimoji="0" lang="en-US" sz="2400" b="0" i="0" u="none" strike="noStrike" cap="none" spc="0" normalizeH="0" baseline="0" dirty="0">
-                <a:ln>
-                  <a:noFill/>
-                </a:ln>
-                <a:solidFill>
-                  <a:srgbClr val="5E5E5E"/>
-                </a:solidFill>
-                <a:effectLst/>
-                <a:uFillTx/>
-                <a:latin typeface="+mn-lt"/>
-                <a:ea typeface="+mn-ea"/>
-                <a:cs typeface="+mn-cs"/>
-                <a:sym typeface="Helvetica Neue"/>
-              </a:rPr>
-              <a:t>“Make all of the requests now, then wait for all of the responses”</a:t>
-            </a:r>
-          </a:p>
-        </p:txBody>
-      </p:sp>
-      <p:sp>
-        <p:nvSpPr>
-          <p:cNvPr id="88" name="TextBox 87">
-            <a:extLst>
-              <a:ext uri="{FF2B5EF4-FFF2-40B4-BE49-F238E27FC236}">
-                <a16:creationId xmlns:a16="http://schemas.microsoft.com/office/drawing/2014/main" id="{7BCC99CE-DB71-E9BE-E8B0-BCDD5EE88A98}"/>
-              </a:ext>
-            </a:extLst>
-          </p:cNvPr>
-          <p:cNvSpPr txBox="1"/>
-          <p:nvPr/>
-        </p:nvSpPr>
-        <p:spPr>
-          <a:xfrm>
-            <a:off x="10429848" y="1836861"/>
-            <a:ext cx="1642882" cy="424016"/>
-          </a:xfrm>
-          <a:prstGeom prst="rect">
-            <a:avLst/>
-          </a:prstGeom>
-          <a:ln/>
-        </p:spPr>
-        <p:style>
-          <a:lnRef idx="2">
-            <a:schemeClr val="dk1"/>
-          </a:lnRef>
-          <a:fillRef idx="1">
-            <a:schemeClr val="lt1"/>
-          </a:fillRef>
-          <a:effectRef idx="0">
-            <a:schemeClr val="dk1"/>
-          </a:effectRef>
-          <a:fontRef idx="minor">
-            <a:schemeClr val="dk1"/>
-          </a:fontRef>
-        </p:style>
-        <p:txBody>
-          <a:bodyPr rot="0" spcFirstLastPara="0" vertOverflow="overflow" horzOverflow="overflow" vert="horz" wrap="square" lIns="91440" tIns="45720" rIns="91440" bIns="45720" numCol="1" spcCol="0" rtlCol="0" fromWordArt="0" anchor="ctr" anchorCtr="0" forceAA="0" compatLnSpc="1">
-            <a:prstTxWarp prst="textNoShape">
-              <a:avLst/>
-            </a:prstTxWarp>
-            <a:noAutofit/>
-          </a:bodyPr>
-          <a:lstStyle/>
-          <a:p>
-            <a:pPr algn="l"/>
-            <a:r>
-              <a:rPr lang="en-US" sz="2000" dirty="0">
-                <a:solidFill>
-                  <a:srgbClr val="FF0000"/>
-                </a:solidFill>
-                <a:latin typeface="Verdana" panose="020B0604030504040204" pitchFamily="34" charset="0"/>
-                <a:ea typeface="Verdana" panose="020B0604030504040204" pitchFamily="34" charset="0"/>
-              </a:rPr>
-              <a:t>3024 msec</a:t>
-            </a:r>
-          </a:p>
-        </p:txBody>
-      </p:sp>
-      <p:sp>
-        <p:nvSpPr>
-          <p:cNvPr id="89" name="Rectangle 88">
-            <a:extLst>
-              <a:ext uri="{FF2B5EF4-FFF2-40B4-BE49-F238E27FC236}">
-                <a16:creationId xmlns:a16="http://schemas.microsoft.com/office/drawing/2014/main" id="{77861A10-ABD5-B4EF-DE2A-5996A6E0AF54}"/>
-              </a:ext>
-            </a:extLst>
-          </p:cNvPr>
-          <p:cNvSpPr/>
-          <p:nvPr/>
-        </p:nvSpPr>
-        <p:spPr>
-          <a:xfrm>
-            <a:off x="10549119" y="3966210"/>
-            <a:ext cx="1642882" cy="365125"/>
-          </a:xfrm>
-          <a:prstGeom prst="rect">
-            <a:avLst/>
-          </a:prstGeom>
-          <a:ln/>
-        </p:spPr>
-        <p:style>
-          <a:lnRef idx="2">
-            <a:schemeClr val="dk1"/>
-          </a:lnRef>
-          <a:fillRef idx="1">
-            <a:schemeClr val="lt1"/>
-          </a:fillRef>
-          <a:effectRef idx="0">
-            <a:schemeClr val="dk1"/>
-          </a:effectRef>
-          <a:fontRef idx="minor">
-            <a:schemeClr val="dk1"/>
-          </a:fontRef>
-        </p:style>
-        <p:txBody>
-          <a:bodyPr rtlCol="0" anchor="ctr"/>
-          <a:lstStyle/>
-          <a:p>
-            <a:pPr algn="l"/>
-            <a:r>
-              <a:rPr lang="en-US" sz="2000" dirty="0">
-                <a:solidFill>
-                  <a:srgbClr val="FF0000"/>
-                </a:solidFill>
-                <a:latin typeface="Verdana" panose="020B0604030504040204" pitchFamily="34" charset="0"/>
-                <a:ea typeface="Verdana" panose="020B0604030504040204" pitchFamily="34" charset="0"/>
-              </a:rPr>
-              <a:t>1018 msec</a:t>
-            </a:r>
-          </a:p>
-        </p:txBody>
-      </p:sp>
-      <p:grpSp>
-        <p:nvGrpSpPr>
-          <p:cNvPr id="4" name="Group 3">
-            <a:extLst>
-              <a:ext uri="{FF2B5EF4-FFF2-40B4-BE49-F238E27FC236}">
-                <a16:creationId xmlns:a16="http://schemas.microsoft.com/office/drawing/2014/main" id="{9CF502FF-9449-C12E-99D4-A08648992BE5}"/>
-              </a:ext>
-            </a:extLst>
-          </p:cNvPr>
-          <p:cNvGrpSpPr/>
-          <p:nvPr/>
-        </p:nvGrpSpPr>
-        <p:grpSpPr>
-          <a:xfrm>
-            <a:off x="6451412" y="5079415"/>
-            <a:ext cx="4648390" cy="1364703"/>
-            <a:chOff x="753132" y="4258888"/>
-            <a:chExt cx="4648390" cy="1364703"/>
-          </a:xfrm>
-        </p:grpSpPr>
-        <p:grpSp>
-          <p:nvGrpSpPr>
-            <p:cNvPr id="5" name="Group 4">
-              <a:extLst>
-                <a:ext uri="{FF2B5EF4-FFF2-40B4-BE49-F238E27FC236}">
-                  <a16:creationId xmlns:a16="http://schemas.microsoft.com/office/drawing/2014/main" id="{45A6BC30-CAE2-DBE6-18DC-D80393610BC5}"/>
-                </a:ext>
-              </a:extLst>
-            </p:cNvPr>
-            <p:cNvGrpSpPr/>
-            <p:nvPr/>
-          </p:nvGrpSpPr>
-          <p:grpSpPr>
-            <a:xfrm>
-              <a:off x="753133" y="5148439"/>
-              <a:ext cx="4527917" cy="475152"/>
-              <a:chOff x="-958803" y="2326847"/>
-              <a:chExt cx="4527917" cy="475152"/>
-            </a:xfrm>
-          </p:grpSpPr>
-          <p:sp>
-            <p:nvSpPr>
-              <p:cNvPr id="14" name="Rectangle 13">
-                <a:extLst>
-                  <a:ext uri="{FF2B5EF4-FFF2-40B4-BE49-F238E27FC236}">
-                    <a16:creationId xmlns:a16="http://schemas.microsoft.com/office/drawing/2014/main" id="{77643C05-1C0D-55B0-435D-93610662EB5E}"/>
-                  </a:ext>
-                </a:extLst>
-              </p:cNvPr>
-              <p:cNvSpPr/>
-              <p:nvPr/>
-            </p:nvSpPr>
-            <p:spPr>
-              <a:xfrm>
-                <a:off x="-958803" y="2326847"/>
-                <a:ext cx="1266705" cy="475151"/>
-              </a:xfrm>
-              <a:prstGeom prst="rect">
-                <a:avLst/>
-              </a:prstGeom>
-              <a:ln/>
-            </p:spPr>
-            <p:style>
-              <a:lnRef idx="1">
-                <a:schemeClr val="accent6"/>
-              </a:lnRef>
-              <a:fillRef idx="2">
-                <a:schemeClr val="accent6"/>
-              </a:fillRef>
-              <a:effectRef idx="1">
-                <a:schemeClr val="accent6"/>
-              </a:effectRef>
-              <a:fontRef idx="minor">
-                <a:schemeClr val="dk1"/>
-              </a:fontRef>
-            </p:style>
-            <p:txBody>
-              <a:bodyPr rtlCol="0" anchor="ctr"/>
-              <a:lstStyle/>
-              <a:p>
-                <a:r>
-                  <a:rPr lang="en-US" sz="2000" dirty="0">
-                    <a:solidFill>
-                      <a:schemeClr val="tx1"/>
-                    </a:solidFill>
-                  </a:rPr>
-                  <a:t>send</a:t>
-                </a:r>
-              </a:p>
-            </p:txBody>
-          </p:sp>
-          <p:sp>
-            <p:nvSpPr>
-              <p:cNvPr id="15" name="Rectangle 14">
-                <a:extLst>
-                  <a:ext uri="{FF2B5EF4-FFF2-40B4-BE49-F238E27FC236}">
-                    <a16:creationId xmlns:a16="http://schemas.microsoft.com/office/drawing/2014/main" id="{45878723-B0A2-121E-3870-9B3A52567D5D}"/>
-                  </a:ext>
-                </a:extLst>
-              </p:cNvPr>
-              <p:cNvSpPr/>
-              <p:nvPr/>
-            </p:nvSpPr>
-            <p:spPr>
-              <a:xfrm>
-                <a:off x="2513432" y="2374551"/>
-                <a:ext cx="1055682" cy="420923"/>
-              </a:xfrm>
-              <a:prstGeom prst="rect">
-                <a:avLst/>
-              </a:prstGeom>
-              <a:ln/>
-            </p:spPr>
-            <p:style>
-              <a:lnRef idx="1">
-                <a:schemeClr val="accent6"/>
-              </a:lnRef>
-              <a:fillRef idx="2">
-                <a:schemeClr val="accent6"/>
-              </a:fillRef>
-              <a:effectRef idx="1">
-                <a:schemeClr val="accent6"/>
-              </a:effectRef>
-              <a:fontRef idx="minor">
-                <a:schemeClr val="dk1"/>
-              </a:fontRef>
-            </p:style>
-            <p:txBody>
-              <a:bodyPr rtlCol="0" anchor="ctr"/>
-              <a:lstStyle/>
-              <a:p>
-                <a:r>
-                  <a:rPr lang="en-US" sz="2000" dirty="0">
-                    <a:solidFill>
-                      <a:schemeClr val="tx1"/>
-                    </a:solidFill>
-                  </a:rPr>
-                  <a:t>receive</a:t>
-                </a:r>
-              </a:p>
-            </p:txBody>
-          </p:sp>
-          <p:sp>
-            <p:nvSpPr>
-              <p:cNvPr id="16" name="Rectangle 15">
-                <a:extLst>
-                  <a:ext uri="{FF2B5EF4-FFF2-40B4-BE49-F238E27FC236}">
-                    <a16:creationId xmlns:a16="http://schemas.microsoft.com/office/drawing/2014/main" id="{3A6A3E75-473F-128E-3407-0D00A7F8A088}"/>
-                  </a:ext>
-                </a:extLst>
-              </p:cNvPr>
-              <p:cNvSpPr/>
-              <p:nvPr/>
-            </p:nvSpPr>
-            <p:spPr>
-              <a:xfrm>
-                <a:off x="272125" y="2383963"/>
-                <a:ext cx="2241308" cy="418036"/>
-              </a:xfrm>
-              <a:prstGeom prst="rect">
-                <a:avLst/>
-              </a:prstGeom>
-              <a:solidFill>
-                <a:srgbClr val="FFFF00"/>
-              </a:solidFill>
-              <a:ln>
-                <a:solidFill>
-                  <a:srgbClr val="0070C0"/>
-                </a:solidFill>
-              </a:ln>
-            </p:spPr>
-            <p:style>
-              <a:lnRef idx="2">
-                <a:schemeClr val="accent1">
-                  <a:shade val="50000"/>
-                </a:schemeClr>
-              </a:lnRef>
-              <a:fillRef idx="1">
-                <a:schemeClr val="accent1"/>
-              </a:fillRef>
-              <a:effectRef idx="0">
-                <a:schemeClr val="accent1"/>
-              </a:effectRef>
-              <a:fontRef idx="minor">
-                <a:schemeClr val="lt1"/>
-              </a:fontRef>
-            </p:style>
-            <p:txBody>
-              <a:bodyPr rtlCol="0" anchor="ctr"/>
-              <a:lstStyle/>
-              <a:p>
-                <a:r>
-                  <a:rPr lang="en-US" sz="2000" dirty="0">
-                    <a:solidFill>
-                      <a:schemeClr val="tx1"/>
-                    </a:solidFill>
-                  </a:rPr>
-                  <a:t>wait</a:t>
-                </a:r>
-              </a:p>
-            </p:txBody>
-          </p:sp>
-        </p:grpSp>
-        <p:grpSp>
-          <p:nvGrpSpPr>
-            <p:cNvPr id="6" name="Group 5">
-              <a:extLst>
-                <a:ext uri="{FF2B5EF4-FFF2-40B4-BE49-F238E27FC236}">
-                  <a16:creationId xmlns:a16="http://schemas.microsoft.com/office/drawing/2014/main" id="{034280D1-6221-B6BA-7473-FFBDD58B00E6}"/>
-                </a:ext>
-              </a:extLst>
-            </p:cNvPr>
-            <p:cNvGrpSpPr/>
-            <p:nvPr/>
-          </p:nvGrpSpPr>
-          <p:grpSpPr>
-            <a:xfrm>
-              <a:off x="753133" y="4730403"/>
-              <a:ext cx="3749227" cy="475152"/>
-              <a:chOff x="448333" y="4425603"/>
-              <a:chExt cx="3749227" cy="475152"/>
-            </a:xfrm>
-          </p:grpSpPr>
-          <p:sp>
-            <p:nvSpPr>
-              <p:cNvPr id="11" name="Rectangle 10">
-                <a:extLst>
-                  <a:ext uri="{FF2B5EF4-FFF2-40B4-BE49-F238E27FC236}">
-                    <a16:creationId xmlns:a16="http://schemas.microsoft.com/office/drawing/2014/main" id="{01BE86A7-FE6A-A0AD-A1A6-DB66CD854509}"/>
-                  </a:ext>
-                </a:extLst>
-              </p:cNvPr>
-              <p:cNvSpPr/>
-              <p:nvPr/>
-            </p:nvSpPr>
-            <p:spPr>
-              <a:xfrm>
-                <a:off x="448333" y="4425603"/>
-                <a:ext cx="1230927" cy="475151"/>
-              </a:xfrm>
-              <a:prstGeom prst="rect">
-                <a:avLst/>
-              </a:prstGeom>
-              <a:ln/>
-            </p:spPr>
-            <p:style>
-              <a:lnRef idx="1">
-                <a:schemeClr val="accent6"/>
-              </a:lnRef>
-              <a:fillRef idx="2">
-                <a:schemeClr val="accent6"/>
-              </a:fillRef>
-              <a:effectRef idx="1">
-                <a:schemeClr val="accent6"/>
-              </a:effectRef>
-              <a:fontRef idx="minor">
-                <a:schemeClr val="dk1"/>
-              </a:fontRef>
-            </p:style>
-            <p:txBody>
-              <a:bodyPr rtlCol="0" anchor="ctr"/>
-              <a:lstStyle/>
-              <a:p>
-                <a:r>
-                  <a:rPr lang="en-US" sz="2000" dirty="0">
-                    <a:solidFill>
-                      <a:schemeClr val="tx1"/>
-                    </a:solidFill>
-                  </a:rPr>
-                  <a:t>send</a:t>
-                </a:r>
-              </a:p>
-            </p:txBody>
-          </p:sp>
-          <p:sp>
-            <p:nvSpPr>
-              <p:cNvPr id="12" name="Rectangle 11">
-                <a:extLst>
-                  <a:ext uri="{FF2B5EF4-FFF2-40B4-BE49-F238E27FC236}">
-                    <a16:creationId xmlns:a16="http://schemas.microsoft.com/office/drawing/2014/main" id="{8E90F00D-DE3C-8274-2A04-A4456C94AB74}"/>
-                  </a:ext>
-                </a:extLst>
-              </p:cNvPr>
-              <p:cNvSpPr/>
-              <p:nvPr/>
-            </p:nvSpPr>
-            <p:spPr>
-              <a:xfrm>
-                <a:off x="3141878" y="4432127"/>
-                <a:ext cx="1055682" cy="468628"/>
-              </a:xfrm>
-              <a:prstGeom prst="rect">
-                <a:avLst/>
-              </a:prstGeom>
-              <a:ln/>
-            </p:spPr>
-            <p:style>
-              <a:lnRef idx="1">
-                <a:schemeClr val="accent6"/>
-              </a:lnRef>
-              <a:fillRef idx="2">
-                <a:schemeClr val="accent6"/>
-              </a:fillRef>
-              <a:effectRef idx="1">
-                <a:schemeClr val="accent6"/>
-              </a:effectRef>
-              <a:fontRef idx="minor">
-                <a:schemeClr val="dk1"/>
-              </a:fontRef>
-            </p:style>
-            <p:txBody>
-              <a:bodyPr rtlCol="0" anchor="ctr"/>
-              <a:lstStyle/>
-              <a:p>
-                <a:r>
-                  <a:rPr lang="en-US" sz="2000" dirty="0">
-                    <a:solidFill>
-                      <a:schemeClr val="tx1"/>
-                    </a:solidFill>
-                  </a:rPr>
-                  <a:t>receive</a:t>
-                </a:r>
-              </a:p>
-            </p:txBody>
-          </p:sp>
-          <p:sp>
-            <p:nvSpPr>
-              <p:cNvPr id="13" name="Rectangle 12">
-                <a:extLst>
-                  <a:ext uri="{FF2B5EF4-FFF2-40B4-BE49-F238E27FC236}">
-                    <a16:creationId xmlns:a16="http://schemas.microsoft.com/office/drawing/2014/main" id="{823035FA-8EC1-BF3B-F72D-DF75E7CA6228}"/>
-                  </a:ext>
-                </a:extLst>
-              </p:cNvPr>
-              <p:cNvSpPr/>
-              <p:nvPr/>
-            </p:nvSpPr>
-            <p:spPr>
-              <a:xfrm>
-                <a:off x="1679260" y="4426353"/>
-                <a:ext cx="1451314" cy="468628"/>
-              </a:xfrm>
-              <a:prstGeom prst="rect">
-                <a:avLst/>
-              </a:prstGeom>
-              <a:solidFill>
-                <a:srgbClr val="FFFF00"/>
-              </a:solidFill>
-              <a:ln>
-                <a:solidFill>
-                  <a:srgbClr val="0070C0"/>
-                </a:solidFill>
-              </a:ln>
-            </p:spPr>
-            <p:style>
-              <a:lnRef idx="2">
-                <a:schemeClr val="accent1">
-                  <a:shade val="50000"/>
-                </a:schemeClr>
-              </a:lnRef>
-              <a:fillRef idx="1">
-                <a:schemeClr val="accent1"/>
-              </a:fillRef>
-              <a:effectRef idx="0">
-                <a:schemeClr val="accent1"/>
-              </a:effectRef>
-              <a:fontRef idx="minor">
-                <a:schemeClr val="lt1"/>
-              </a:fontRef>
-            </p:style>
-            <p:txBody>
-              <a:bodyPr rtlCol="0" anchor="ctr"/>
-              <a:lstStyle/>
-              <a:p>
-                <a:r>
-                  <a:rPr lang="en-US" sz="2000" dirty="0">
-                    <a:solidFill>
-                      <a:schemeClr val="tx1"/>
-                    </a:solidFill>
-                  </a:rPr>
-                  <a:t>wait</a:t>
-                </a:r>
-              </a:p>
-            </p:txBody>
-          </p:sp>
-        </p:grpSp>
-        <p:grpSp>
-          <p:nvGrpSpPr>
-            <p:cNvPr id="7" name="Group 6">
-              <a:extLst>
-                <a:ext uri="{FF2B5EF4-FFF2-40B4-BE49-F238E27FC236}">
-                  <a16:creationId xmlns:a16="http://schemas.microsoft.com/office/drawing/2014/main" id="{D91B0986-3B73-D027-0014-935CCA463F7D}"/>
-                </a:ext>
-              </a:extLst>
-            </p:cNvPr>
-            <p:cNvGrpSpPr/>
-            <p:nvPr/>
-          </p:nvGrpSpPr>
-          <p:grpSpPr>
-            <a:xfrm>
-              <a:off x="753132" y="4258888"/>
-              <a:ext cx="4648390" cy="471514"/>
-              <a:chOff x="1510076" y="2374554"/>
-              <a:chExt cx="4648390" cy="471514"/>
-            </a:xfrm>
-          </p:grpSpPr>
-          <p:sp>
-            <p:nvSpPr>
-              <p:cNvPr id="8" name="Rectangle 7">
-                <a:extLst>
-                  <a:ext uri="{FF2B5EF4-FFF2-40B4-BE49-F238E27FC236}">
-                    <a16:creationId xmlns:a16="http://schemas.microsoft.com/office/drawing/2014/main" id="{4132249D-836A-169B-C18E-AAD87E1FEB5F}"/>
-                  </a:ext>
-                </a:extLst>
-              </p:cNvPr>
-              <p:cNvSpPr/>
-              <p:nvPr/>
-            </p:nvSpPr>
-            <p:spPr>
-              <a:xfrm>
-                <a:off x="1510076" y="2377440"/>
-                <a:ext cx="1443244" cy="468628"/>
-              </a:xfrm>
-              <a:prstGeom prst="rect">
-                <a:avLst/>
-              </a:prstGeom>
-              <a:ln/>
-            </p:spPr>
-            <p:style>
-              <a:lnRef idx="1">
-                <a:schemeClr val="accent6"/>
-              </a:lnRef>
-              <a:fillRef idx="2">
-                <a:schemeClr val="accent6"/>
-              </a:fillRef>
-              <a:effectRef idx="1">
-                <a:schemeClr val="accent6"/>
-              </a:effectRef>
-              <a:fontRef idx="minor">
-                <a:schemeClr val="dk1"/>
-              </a:fontRef>
-            </p:style>
-            <p:txBody>
-              <a:bodyPr rtlCol="0" anchor="ctr"/>
-              <a:lstStyle/>
-              <a:p>
-                <a:r>
-                  <a:rPr lang="en-US" sz="2000" dirty="0">
-                    <a:solidFill>
-                      <a:schemeClr val="tx1"/>
-                    </a:solidFill>
-                  </a:rPr>
-                  <a:t>send</a:t>
-                </a:r>
-              </a:p>
-            </p:txBody>
-          </p:sp>
-          <p:sp>
-            <p:nvSpPr>
-              <p:cNvPr id="9" name="Rectangle 8">
-                <a:extLst>
-                  <a:ext uri="{FF2B5EF4-FFF2-40B4-BE49-F238E27FC236}">
-                    <a16:creationId xmlns:a16="http://schemas.microsoft.com/office/drawing/2014/main" id="{B13A1FA0-1AA8-8A40-C3B4-127F7ED8CC99}"/>
-                  </a:ext>
-                </a:extLst>
-              </p:cNvPr>
-              <p:cNvSpPr/>
-              <p:nvPr/>
-            </p:nvSpPr>
-            <p:spPr>
-              <a:xfrm>
-                <a:off x="4691047" y="2374554"/>
-                <a:ext cx="1467419" cy="468628"/>
-              </a:xfrm>
-              <a:prstGeom prst="rect">
-                <a:avLst/>
-              </a:prstGeom>
-              <a:ln/>
-            </p:spPr>
-            <p:style>
-              <a:lnRef idx="1">
-                <a:schemeClr val="accent6"/>
-              </a:lnRef>
-              <a:fillRef idx="2">
-                <a:schemeClr val="accent6"/>
-              </a:fillRef>
-              <a:effectRef idx="1">
-                <a:schemeClr val="accent6"/>
-              </a:effectRef>
-              <a:fontRef idx="minor">
-                <a:schemeClr val="dk1"/>
-              </a:fontRef>
-            </p:style>
-            <p:txBody>
-              <a:bodyPr rtlCol="0" anchor="ctr"/>
-              <a:lstStyle/>
-              <a:p>
-                <a:r>
-                  <a:rPr lang="en-US" sz="2000" dirty="0">
-                    <a:solidFill>
-                      <a:schemeClr val="tx1"/>
-                    </a:solidFill>
-                  </a:rPr>
-                  <a:t>receive</a:t>
-                </a:r>
-              </a:p>
-            </p:txBody>
-          </p:sp>
-          <p:sp>
-            <p:nvSpPr>
-              <p:cNvPr id="10" name="Rectangle 9">
-                <a:extLst>
-                  <a:ext uri="{FF2B5EF4-FFF2-40B4-BE49-F238E27FC236}">
-                    <a16:creationId xmlns:a16="http://schemas.microsoft.com/office/drawing/2014/main" id="{15AA8396-80B1-AAA3-A3B6-110731A02BD2}"/>
-                  </a:ext>
-                </a:extLst>
-              </p:cNvPr>
-              <p:cNvSpPr/>
-              <p:nvPr/>
-            </p:nvSpPr>
-            <p:spPr>
-              <a:xfrm>
-                <a:off x="2741003" y="2377440"/>
-                <a:ext cx="1969661" cy="468628"/>
-              </a:xfrm>
-              <a:prstGeom prst="rect">
-                <a:avLst/>
-              </a:prstGeom>
-              <a:solidFill>
-                <a:srgbClr val="FFFF00"/>
-              </a:solidFill>
-              <a:ln>
-                <a:solidFill>
-                  <a:srgbClr val="0070C0"/>
-                </a:solidFill>
-              </a:ln>
-            </p:spPr>
-            <p:style>
-              <a:lnRef idx="2">
-                <a:schemeClr val="accent1">
-                  <a:shade val="50000"/>
-                </a:schemeClr>
-              </a:lnRef>
-              <a:fillRef idx="1">
-                <a:schemeClr val="accent1"/>
-              </a:fillRef>
-              <a:effectRef idx="0">
-                <a:schemeClr val="accent1"/>
-              </a:effectRef>
-              <a:fontRef idx="minor">
-                <a:schemeClr val="lt1"/>
-              </a:fontRef>
-            </p:style>
-            <p:txBody>
-              <a:bodyPr rtlCol="0" anchor="ctr"/>
-              <a:lstStyle/>
-              <a:p>
-                <a:r>
-                  <a:rPr lang="en-US" sz="2000" dirty="0">
-                    <a:solidFill>
-                      <a:schemeClr val="tx1"/>
-                    </a:solidFill>
-                  </a:rPr>
-                  <a:t>wait</a:t>
-                </a:r>
-              </a:p>
-            </p:txBody>
-          </p:sp>
-        </p:grpSp>
-      </p:grpSp>
-      <p:sp>
-        <p:nvSpPr>
-          <p:cNvPr id="17" name="TextBox 16">
-            <a:extLst>
-              <a:ext uri="{FF2B5EF4-FFF2-40B4-BE49-F238E27FC236}">
-                <a16:creationId xmlns:a16="http://schemas.microsoft.com/office/drawing/2014/main" id="{AB2F4E94-2EAC-FCAC-5DDE-AA96AB7790FD}"/>
-              </a:ext>
-            </a:extLst>
-          </p:cNvPr>
-          <p:cNvSpPr txBox="1"/>
-          <p:nvPr/>
-        </p:nvSpPr>
-        <p:spPr>
-          <a:xfrm>
-            <a:off x="5768075" y="5143939"/>
-            <a:ext cx="423037" cy="914400"/>
-          </a:xfrm>
-          <a:prstGeom prst="rect">
-            <a:avLst/>
-          </a:prstGeom>
-          <a:noFill/>
-          <a:ln>
-            <a:noFill/>
-          </a:ln>
-        </p:spPr>
-        <p:style>
-          <a:lnRef idx="2">
-            <a:schemeClr val="accent1">
-              <a:shade val="50000"/>
-            </a:schemeClr>
-          </a:lnRef>
-          <a:fillRef idx="1">
-            <a:schemeClr val="accent1"/>
-          </a:fillRef>
-          <a:effectRef idx="0">
-            <a:schemeClr val="accent1"/>
-          </a:effectRef>
-          <a:fontRef idx="minor">
-            <a:schemeClr val="lt1"/>
-          </a:fontRef>
-        </p:style>
-        <p:txBody>
-          <a:bodyPr rot="0" spcFirstLastPara="0" vertOverflow="overflow" horzOverflow="overflow" vert="horz" wrap="none" lIns="91440" tIns="45720" rIns="91440" bIns="45720" numCol="1" spcCol="0" rtlCol="0" fromWordArt="0" anchor="ctr" anchorCtr="0" forceAA="0" compatLnSpc="1">
-            <a:prstTxWarp prst="textNoShape">
-              <a:avLst/>
-            </a:prstTxWarp>
-            <a:noAutofit/>
-          </a:bodyPr>
-          <a:lstStyle/>
-          <a:p>
-            <a:pPr algn="l"/>
-            <a:r>
-              <a:rPr lang="en-US" sz="2400" dirty="0">
-                <a:solidFill>
-                  <a:schemeClr val="tx1"/>
-                </a:solidFill>
-                <a:latin typeface="Verdana" panose="020B0604030504040204" pitchFamily="34" charset="0"/>
-                <a:ea typeface="Verdana" panose="020B0604030504040204" pitchFamily="34" charset="0"/>
-              </a:rPr>
-              <a:t>or</a:t>
-            </a:r>
-          </a:p>
-        </p:txBody>
-      </p:sp>
-    </p:spTree>
-    <p:extLst>
-      <p:ext uri="{BB962C8B-B14F-4D97-AF65-F5344CB8AC3E}">
-        <p14:creationId xmlns:p14="http://schemas.microsoft.com/office/powerpoint/2010/main" val="1318073523"/>
-      </p:ext>
-    </p:extLst>
-  </p:cSld>
-  <p:clrMapOvr>
-    <a:masterClrMapping/>
-  </p:clrMapOvr>
-  <p:timing>
-    <p:tnLst>
-      <p:par>
-        <p:cTn id="1" dur="indefinite" restart="never" nodeType="tmRoot">
-          <p:childTnLst>
-            <p:seq concurrent="1" nextAc="seek">
-              <p:cTn id="2" dur="indefinite" nodeType="mainSeq">
-                <p:childTnLst>
-                  <p:par>
-                    <p:cTn id="3" fill="hold">
-                      <p:stCondLst>
-                        <p:cond delay="indefinite"/>
-                      </p:stCondLst>
-                      <p:childTnLst>
-                        <p:par>
-                          <p:cTn id="4" fill="hold">
-                            <p:stCondLst>
-                              <p:cond delay="0"/>
-                            </p:stCondLst>
-                            <p:childTnLst>
-                              <p:par>
-                                <p:cTn id="5" presetID="1" presetClass="entr" presetSubtype="0" fill="hold" nodeType="clickEffect">
-                                  <p:stCondLst>
-                                    <p:cond delay="0"/>
-                                  </p:stCondLst>
-                                  <p:childTnLst>
-                                    <p:set>
-                                      <p:cBhvr>
-                                        <p:cTn id="6" dur="1" fill="hold">
-                                          <p:stCondLst>
-                                            <p:cond delay="0"/>
-                                          </p:stCondLst>
-                                        </p:cTn>
-                                        <p:tgtEl>
-                                          <p:spTgt spid="4"/>
-                                        </p:tgtEl>
-                                        <p:attrNameLst>
-                                          <p:attrName>style.visibility</p:attrName>
-                                        </p:attrNameLst>
-                                      </p:cBhvr>
-                                      <p:to>
-                                        <p:strVal val="visible"/>
-                                      </p:to>
-                                    </p:set>
-                                  </p:childTnLst>
-                                </p:cTn>
-                              </p:par>
-                              <p:par>
-                                <p:cTn id="7" presetID="1" presetClass="entr" presetSubtype="0" fill="hold" grpId="0" nodeType="withEffect">
-                                  <p:stCondLst>
-                                    <p:cond delay="0"/>
-                                  </p:stCondLst>
-                                  <p:childTnLst>
-                                    <p:set>
-                                      <p:cBhvr>
-                                        <p:cTn id="8" dur="1" fill="hold">
-                                          <p:stCondLst>
-                                            <p:cond delay="0"/>
-                                          </p:stCondLst>
-                                        </p:cTn>
-                                        <p:tgtEl>
-                                          <p:spTgt spid="17"/>
-                                        </p:tgtEl>
-                                        <p:attrNameLst>
-                                          <p:attrName>style.visibility</p:attrName>
-                                        </p:attrNameLst>
-                                      </p:cBhvr>
-                                      <p:to>
-                                        <p:strVal val="visible"/>
-                                      </p:to>
-                                    </p:set>
-                                  </p:childTnLst>
-                                </p:cTn>
-                              </p:par>
-                            </p:childTnLst>
-                          </p:cTn>
-                        </p:par>
-                      </p:childTnLst>
-                    </p:cTn>
-                  </p:par>
-                </p:childTnLst>
-              </p:cTn>
-              <p:prevCondLst>
-                <p:cond evt="onPrev" delay="0">
-                  <p:tgtEl>
-                    <p:sldTgt/>
-                  </p:tgtEl>
-                </p:cond>
-              </p:prevCondLst>
-              <p:nextCondLst>
-                <p:cond evt="onNext" delay="0">
-                  <p:tgtEl>
-                    <p:sldTgt/>
-                  </p:tgtEl>
-                </p:cond>
-              </p:nextCondLst>
-            </p:seq>
-          </p:childTnLst>
-        </p:cTn>
-      </p:par>
-    </p:tnLst>
-    <p:bldLst>
-      <p:bldP spid="17" grpId="0"/>
     </p:bldLst>
   </p:timing>
 </p:sld>

--- a/Slides/Module 08 Concurrency.pptx
+++ b/Slides/Module 08 Concurrency.pptx
@@ -3060,15 +3060,7 @@
             </a:r>
             <a:r>
               <a:rPr lang="en-US" b="0" dirty="0"/>
-              <a:t> checks to make sure that your test properly awaited the </a:t>
-            </a:r>
-            <a:r>
-              <a:rPr lang="en-US" b="0" dirty="0" err="1"/>
-              <a:t>the</a:t>
-            </a:r>
-            <a:r>
-              <a:rPr lang="en-US" b="0" dirty="0"/>
-              <a:t> result of the request.</a:t>
+              <a:t> checks to make sure that your test properly awaited the result of the request.</a:t>
             </a:r>
             <a:endParaRPr lang="en-US" dirty="0"/>
           </a:p>
@@ -3097,32 +3089,7 @@
           <a:p>
             <a:r>
               <a:rPr lang="en-US" dirty="0"/>
-              <a:t>Here, </a:t>
-            </a:r>
-            <a:r>
-              <a:rPr lang="en-US" b="1" dirty="0"/>
-              <a:t>echo</a:t>
-            </a:r>
-            <a:r>
-              <a:rPr lang="en-US" dirty="0"/>
-              <a:t> is an async function, so it returns a promise, which should eventually return a string (here “33”) to the async function that called it (here, the </a:t>
-            </a:r>
-            <a:r>
-              <a:rPr lang="en-US" b="1" dirty="0"/>
-              <a:t>expect</a:t>
-            </a:r>
-            <a:r>
-              <a:rPr lang="en-US" dirty="0"/>
-              <a:t>).  So here we are saying that we expect echo(33) to return a promise that will eventually resolve to “33”.</a:t>
-            </a:r>
-          </a:p>
-          <a:p>
-            <a:endParaRPr lang="en-US" dirty="0"/>
-          </a:p>
-          <a:p>
-            <a:r>
-              <a:rPr lang="en-US" dirty="0"/>
-              <a:t>Note the await on the next to last line.  If you leave that out, the async function in the test will succeed immediately, without waiting for the expect to run.   The </a:t>
+              <a:t>The </a:t>
             </a:r>
             <a:r>
               <a:rPr lang="en-US" b="1" dirty="0" err="1"/>
@@ -3134,7 +3101,15 @@
             </a:r>
             <a:r>
               <a:rPr lang="en-US" dirty="0"/>
-              <a:t>(in blue) tells Jest that the test should run exactly 1 test, so that will make the test fail if you leave out the </a:t>
+              <a:t>(in blue) tells </a:t>
+            </a:r>
+            <a:r>
+              <a:rPr lang="en-US" dirty="0" err="1"/>
+              <a:t>Vitest</a:t>
+            </a:r>
+            <a:r>
+              <a:rPr lang="en-US" dirty="0"/>
+              <a:t> that the test should run exactly 1 expect statement, so that will make the test fail if you leave out the </a:t>
             </a:r>
             <a:r>
               <a:rPr lang="en-US" b="1" dirty="0"/>
@@ -3206,14 +3181,24 @@
           <a:p>
             <a:r>
               <a:rPr lang="en-US" dirty="0"/>
-              <a:t>We've already seen non-deterministic behavior reflected in our console logs.  But that kind of behavior can easily become visible to our program.  All you need is some shared state across your promises. The activity explores this topic in more depth.</a:t>
-            </a:r>
-          </a:p>
-          <a:p>
-            <a:endParaRPr lang="en-US" dirty="0"/>
-          </a:p>
-          <a:p>
-            <a:endParaRPr lang="en-US" dirty="0"/>
+              <a:t>We've already seen non-deterministic behavior reflected in our console logs.  But that kind of behavior can easily become visible to our program. All you need is some shared state across your promises. </a:t>
+            </a:r>
+            <a:br>
+              <a:rPr lang="en-US" dirty="0"/>
+            </a:br>
+            <a:r>
+              <a:rPr lang="en-US" dirty="0"/>
+              <a:t>In the code above, X and Y are run concurrently (4 times) and depending on which functions finishes first, X or Y is pushed to log first.</a:t>
+            </a:r>
+          </a:p>
+          <a:p>
+            <a:br>
+              <a:rPr lang="en-US" dirty="0"/>
+            </a:br>
+            <a:r>
+              <a:rPr lang="en-US" dirty="0"/>
+              <a:t>The activity explores this topic in more depth.</a:t>
+            </a:r>
           </a:p>
         </p:txBody>
       </p:sp>
@@ -3292,6 +3277,39 @@
           <a:bodyPr/>
           <a:lstStyle/>
           <a:p>
+            <a:r>
+              <a:rPr lang="en-US" dirty="0"/>
+              <a:t>IO operations are async functions that return promises and you can await on them.</a:t>
+            </a:r>
+          </a:p>
+          <a:p>
+            <a:endParaRPr lang="en-US" dirty="0"/>
+          </a:p>
+          <a:p>
+            <a:r>
+              <a:rPr lang="en-US" dirty="0"/>
+              <a:t>Using </a:t>
+            </a:r>
+            <a:r>
+              <a:rPr lang="en-US" dirty="0" err="1"/>
+              <a:t>WebAPI</a:t>
+            </a:r>
+            <a:r>
+              <a:rPr lang="en-US" dirty="0"/>
+              <a:t> is like outsourcing of jobs. </a:t>
+            </a:r>
+            <a:r>
+              <a:rPr lang="en-US" dirty="0" err="1"/>
+              <a:t>WebAPI</a:t>
+            </a:r>
+            <a:r>
+              <a:rPr lang="en-US" dirty="0"/>
+              <a:t> uses browser to run these jobs and browser can run things using </a:t>
+            </a:r>
+            <a:r>
+              <a:rPr lang="en-US"/>
+              <a:t>multiple threads.</a:t>
+            </a:r>
             <a:endParaRPr lang="en-US" dirty="0"/>
           </a:p>
         </p:txBody>
@@ -4515,7 +4533,7 @@
                 <a:tabLst/>
                 <a:defRPr/>
               </a:pPr>
-              <a:t>9/30/2026</a:t>
+              <a:t>10/4/2026</a:t>
             </a:fld>
             <a:endParaRPr kumimoji="0" lang="en-US" sz="1200" b="0" i="0" u="none" strike="noStrike" kern="1200" cap="none" spc="0" normalizeH="0" baseline="0" noProof="0">
               <a:ln>
@@ -4999,7 +5017,7 @@
                 <a:tabLst/>
                 <a:defRPr/>
               </a:pPr>
-              <a:t>9/30/2026</a:t>
+              <a:t>10/4/2026</a:t>
             </a:fld>
             <a:endParaRPr kumimoji="0" lang="en-US" sz="1200" b="0" i="0" u="none" strike="noStrike" kern="1200" cap="none" spc="0" normalizeH="0" baseline="0" noProof="0">
               <a:ln>
@@ -5357,7 +5375,7 @@
                 <a:tabLst/>
                 <a:defRPr/>
               </a:pPr>
-              <a:t>9/30/2026</a:t>
+              <a:t>10/4/2026</a:t>
             </a:fld>
             <a:endParaRPr kumimoji="0" lang="en-US" sz="1200" b="0" i="0" u="none" strike="noStrike" kern="1200" cap="none" spc="0" normalizeH="0" baseline="0" noProof="0">
               <a:ln>
@@ -5725,7 +5743,7 @@
                 <a:tabLst/>
                 <a:defRPr/>
               </a:pPr>
-              <a:t>9/30/2026</a:t>
+              <a:t>10/4/2026</a:t>
             </a:fld>
             <a:endParaRPr kumimoji="0" lang="en-US" sz="1200" b="0" i="0" u="none" strike="noStrike" kern="1200" cap="none" spc="0" normalizeH="0" baseline="0" noProof="0">
               <a:ln>
@@ -6695,7 +6713,7 @@
                 <a:tabLst/>
                 <a:defRPr/>
               </a:pPr>
-              <a:t>9/30/2026</a:t>
+              <a:t>10/4/2026</a:t>
             </a:fld>
             <a:endParaRPr kumimoji="0" lang="en-US" sz="1200" b="0" i="0" u="none" strike="noStrike" kern="1200" cap="none" spc="0" normalizeH="0" baseline="0" noProof="0">
               <a:ln>
@@ -7121,7 +7139,7 @@
                 <a:tabLst/>
                 <a:defRPr/>
               </a:pPr>
-              <a:t>9/30/2026</a:t>
+              <a:t>10/4/2026</a:t>
             </a:fld>
             <a:endParaRPr kumimoji="0" lang="en-US" sz="1200" b="0" i="0" u="none" strike="noStrike" kern="1200" cap="none" spc="0" normalizeH="0" baseline="0" noProof="0">
               <a:ln>
@@ -7485,7 +7503,7 @@
                 <a:tabLst/>
                 <a:defRPr/>
               </a:pPr>
-              <a:t>9/30/2026</a:t>
+              <a:t>10/4/2026</a:t>
             </a:fld>
             <a:endParaRPr kumimoji="0" lang="en-US" sz="1200" b="0" i="0" u="none" strike="noStrike" kern="1200" cap="none" spc="0" normalizeH="0" baseline="0" noProof="0">
               <a:ln>
@@ -8012,7 +8030,7 @@
                 <a:tabLst/>
                 <a:defRPr/>
               </a:pPr>
-              <a:t>9/30/2026</a:t>
+              <a:t>10/4/2026</a:t>
             </a:fld>
             <a:endParaRPr kumimoji="0" lang="en-US" sz="1200" b="0" i="0" u="none" strike="noStrike" kern="1200" cap="none" spc="0" normalizeH="0" baseline="0" noProof="0">
               <a:ln>
@@ -8473,7 +8491,7 @@
                 <a:tabLst/>
                 <a:defRPr/>
               </a:pPr>
-              <a:t>9/30/2026</a:t>
+              <a:t>10/4/2026</a:t>
             </a:fld>
             <a:endParaRPr kumimoji="0" lang="en-US" sz="1200" b="0" i="0" u="none" strike="noStrike" kern="1200" cap="none" spc="0" normalizeH="0" baseline="0" noProof="0">
               <a:ln>
@@ -9081,7 +9099,7 @@
                 <a:tabLst/>
                 <a:defRPr/>
               </a:pPr>
-              <a:t>9/30/2026</a:t>
+              <a:t>10/4/2026</a:t>
             </a:fld>
             <a:endParaRPr kumimoji="0" lang="en-US" sz="1200" b="0" i="0" u="none" strike="noStrike" kern="1200" cap="none" spc="0" normalizeH="0" baseline="0" noProof="0">
               <a:ln>
@@ -9354,7 +9372,7 @@
                 <a:tabLst/>
                 <a:defRPr/>
               </a:pPr>
-              <a:t>9/30/2026</a:t>
+              <a:t>10/4/2026</a:t>
             </a:fld>
             <a:endParaRPr kumimoji="0" lang="en-US" sz="1200" b="0" i="0" u="none" strike="noStrike" kern="1200" cap="none" spc="0" normalizeH="0" baseline="0" noProof="0">
               <a:ln>
@@ -9825,7 +9843,7 @@
                 <a:tabLst/>
                 <a:defRPr/>
               </a:pPr>
-              <a:t>9/30/2026</a:t>
+              <a:t>10/4/2026</a:t>
             </a:fld>
             <a:endParaRPr kumimoji="0" lang="en-US" sz="1200" b="0" i="0" u="none" strike="noStrike" kern="1200" cap="none" spc="0" normalizeH="0" baseline="0" noProof="0">
               <a:ln>
@@ -10226,7 +10244,7 @@
                 <a:tabLst/>
                 <a:defRPr/>
               </a:pPr>
-              <a:t>9/30/2026</a:t>
+              <a:t>10/4/2026</a:t>
             </a:fld>
             <a:endParaRPr kumimoji="0" lang="en-US" sz="1200" b="0" i="0" u="none" strike="noStrike" kern="1200" cap="none" spc="0" normalizeH="0" baseline="0" noProof="0">
               <a:ln>
@@ -12330,13 +12348,29 @@
           <a:p>
             <a:r>
               <a:rPr lang="en-US" dirty="0"/>
-              <a:t>In JS, you work on one and one task only (i.e., event loop has a single call stack)</a:t>
-            </a:r>
-          </a:p>
-          <a:p>
+              <a:t>In JS, you work on </a:t>
+            </a:r>
+            <a:r>
+              <a:rPr lang="en-US" b="1" dirty="0"/>
+              <a:t>one and one task only</a:t>
+            </a:r>
             <a:r>
               <a:rPr lang="en-US" dirty="0"/>
-              <a:t>Also, if you start a task, you must finish it (i.e., call stack must be emptied) before you start another task. This pattern is called "run-to-completion" semantics</a:t>
+              <a:t> (i.e., event loop has a single call stack)</a:t>
+            </a:r>
+          </a:p>
+          <a:p>
+            <a:r>
+              <a:rPr lang="en-US" dirty="0"/>
+              <a:t>Also, if you start a task, you </a:t>
+            </a:r>
+            <a:r>
+              <a:rPr lang="en-US" b="1" dirty="0"/>
+              <a:t>must </a:t>
+            </a:r>
+            <a:r>
+              <a:rPr lang="en-US" dirty="0"/>
+              <a:t>finish it (i.e., call stack must be emptied) before you start another task. This pattern is called "run-to-completion" semantics</a:t>
             </a:r>
           </a:p>
           <a:p>
@@ -12349,7 +12383,11 @@
             <a:pPr lvl="1"/>
             <a:r>
               <a:rPr lang="en-US" dirty="0"/>
-              <a:t>when it reaches an await</a:t>
+              <a:t>when it reaches an </a:t>
+            </a:r>
+            <a:r>
+              <a:rPr lang="en-US" b="1" dirty="0"/>
+              <a:t>await</a:t>
             </a:r>
           </a:p>
           <a:p>
@@ -12454,6 +12492,36 @@
           </a:p>
         </p:txBody>
       </p:sp>
+      <p:pic>
+        <p:nvPicPr>
+          <p:cNvPr id="6" name="Picture 5" descr="a&#10;&#10;AI-generated content may be incorrect.">
+            <a:extLst>
+              <a:ext uri="{FF2B5EF4-FFF2-40B4-BE49-F238E27FC236}">
+                <a16:creationId xmlns:a16="http://schemas.microsoft.com/office/drawing/2014/main" id="{81F5B03E-34AA-D87B-8D3C-398C901AA0C4}"/>
+              </a:ext>
+            </a:extLst>
+          </p:cNvPr>
+          <p:cNvPicPr>
+            <a:picLocks noChangeAspect="1"/>
+          </p:cNvPicPr>
+          <p:nvPr/>
+        </p:nvPicPr>
+        <p:blipFill>
+          <a:blip r:embed="rId3"/>
+          <a:stretch>
+            <a:fillRect/>
+          </a:stretch>
+        </p:blipFill>
+        <p:spPr>
+          <a:xfrm>
+            <a:off x="8850888" y="1531097"/>
+            <a:ext cx="2262624" cy="3795806"/>
+          </a:xfrm>
+          <a:prstGeom prst="rect">
+            <a:avLst/>
+          </a:prstGeom>
+        </p:spPr>
+      </p:pic>
     </p:spTree>
     <p:extLst>
       <p:ext uri="{BB962C8B-B14F-4D97-AF65-F5344CB8AC3E}">
@@ -15069,7 +15137,7 @@
           <a:p>
             <a:r>
               <a:rPr lang="en-US" dirty="0"/>
-              <a:t>One Event Loop means that we have single thread of execution</a:t>
+              <a:t>Event Loop with one Call Stack means that we have single thread of execution</a:t>
             </a:r>
           </a:p>
           <a:p>
@@ -25448,7 +25516,7 @@
                 <a:effectLst/>
                 <a:latin typeface="Consolas" panose="020B0609020204030204" pitchFamily="49" charset="0"/>
               </a:rPr>
-              <a:t>2</a:t>
+              <a:t>3</a:t>
             </a:r>
             <a:r>
               <a:rPr lang="en-US" sz="2000" b="0" dirty="0">
@@ -25503,7 +25571,7 @@
                 <a:effectLst/>
                 <a:latin typeface="Consolas" panose="020B0609020204030204" pitchFamily="49" charset="0"/>
               </a:rPr>
-              <a:t>(2) returned: </a:t>
+              <a:t>(3) returned: </a:t>
             </a:r>
             <a:r>
               <a:rPr lang="en-US" sz="2000" b="0" dirty="0">
@@ -45286,7 +45354,7 @@
             </a:pPr>
             <a:r>
               <a:rPr lang="en-US" sz="1800" dirty="0"/>
-              <a:t>These are things like http requests, I/O operations, or timers.</a:t>
+              <a:t>These are things like http requests, I/O operations, or timers</a:t>
             </a:r>
           </a:p>
           <a:p>
